--- a/training/slides/Module_02_Getting_Started.pptx
+++ b/training/slides/Module_02_Getting_Started.pptx
@@ -17,7 +17,6 @@
     <p:sldId id="265" r:id="rId16"/>
     <p:sldId id="266" r:id="rId17"/>
     <p:sldId id="267" r:id="rId18"/>
-    <p:sldId id="268" r:id="rId19"/>
   </p:sldIdLst>
   <p:sldSz cx="12191695" cy="6858000" type="screen4x3"/>
   <p:notesSz cx="6858000" cy="9144000"/>
@@ -3096,7 +3095,7 @@
     <p:bg>
       <p:bgPr>
         <a:solidFill>
-          <a:srgbClr val="1A1A2E"/>
+          <a:srgbClr val="1E1B4B"/>
         </a:solidFill>
         <a:effectLst/>
       </p:bgPr>
@@ -3117,13 +3116,13 @@
         <p:spPr>
           <a:xfrm>
             <a:off x="0" y="0"/>
-            <a:ext cx="137160" cy="6858000"/>
+            <a:ext cx="5943600" cy="6858000"/>
           </a:xfrm>
           <a:prstGeom prst="rect">
             <a:avLst/>
           </a:prstGeom>
           <a:solidFill>
-            <a:srgbClr val="007BFF"/>
+            <a:srgbClr val="1E1B4B"/>
           </a:solidFill>
           <a:ln>
             <a:noFill/>
@@ -3153,14 +3152,288 @@
       </p:sp>
       <p:sp>
         <p:nvSpPr>
-          <p:cNvPr id="3" name="TextBox 2"/>
+          <p:cNvPr id="3" name="Rectangle 2"/>
+          <p:cNvSpPr/>
+          <p:nvPr/>
+        </p:nvSpPr>
+        <p:spPr>
+          <a:xfrm>
+            <a:off x="5943600" y="0"/>
+            <a:ext cx="3200400" cy="6858000"/>
+          </a:xfrm>
+          <a:prstGeom prst="rect">
+            <a:avLst/>
+          </a:prstGeom>
+          <a:solidFill>
+            <a:srgbClr val="312E81"/>
+          </a:solidFill>
+          <a:ln>
+            <a:noFill/>
+          </a:ln>
+        </p:spPr>
+        <p:style>
+          <a:lnRef idx="1">
+            <a:schemeClr val="accent1"/>
+          </a:lnRef>
+          <a:fillRef idx="3">
+            <a:schemeClr val="accent1"/>
+          </a:fillRef>
+          <a:effectRef idx="2">
+            <a:schemeClr val="accent1"/>
+          </a:effectRef>
+          <a:fontRef idx="minor">
+            <a:schemeClr val="lt1"/>
+          </a:fontRef>
+        </p:style>
+        <p:txBody>
+          <a:bodyPr rtlCol="0" anchor="ctr"/>
+          <a:lstStyle/>
+          <a:p>
+            <a:pPr algn="ctr"/>
+          </a:p>
+        </p:txBody>
+      </p:sp>
+      <p:sp>
+        <p:nvSpPr>
+          <p:cNvPr id="4" name="Rectangle 3"/>
+          <p:cNvSpPr/>
+          <p:nvPr/>
+        </p:nvSpPr>
+        <p:spPr>
+          <a:xfrm>
+            <a:off x="9144000" y="0"/>
+            <a:ext cx="3047695" cy="6858000"/>
+          </a:xfrm>
+          <a:prstGeom prst="rect">
+            <a:avLst/>
+          </a:prstGeom>
+          <a:solidFill>
+            <a:srgbClr val="4338CA"/>
+          </a:solidFill>
+          <a:ln>
+            <a:noFill/>
+          </a:ln>
+        </p:spPr>
+        <p:style>
+          <a:lnRef idx="1">
+            <a:schemeClr val="accent1"/>
+          </a:lnRef>
+          <a:fillRef idx="3">
+            <a:schemeClr val="accent1"/>
+          </a:fillRef>
+          <a:effectRef idx="2">
+            <a:schemeClr val="accent1"/>
+          </a:effectRef>
+          <a:fontRef idx="minor">
+            <a:schemeClr val="lt1"/>
+          </a:fontRef>
+        </p:style>
+        <p:txBody>
+          <a:bodyPr rtlCol="0" anchor="ctr"/>
+          <a:lstStyle/>
+          <a:p>
+            <a:pPr algn="ctr"/>
+          </a:p>
+        </p:txBody>
+      </p:sp>
+      <p:sp>
+        <p:nvSpPr>
+          <p:cNvPr id="5" name="Rectangle 4"/>
+          <p:cNvSpPr/>
+          <p:nvPr/>
+        </p:nvSpPr>
+        <p:spPr>
+          <a:xfrm>
+            <a:off x="0" y="0"/>
+            <a:ext cx="73152" cy="6858000"/>
+          </a:xfrm>
+          <a:prstGeom prst="rect">
+            <a:avLst/>
+          </a:prstGeom>
+          <a:solidFill>
+            <a:srgbClr val="6366F1"/>
+          </a:solidFill>
+          <a:ln>
+            <a:noFill/>
+          </a:ln>
+        </p:spPr>
+        <p:style>
+          <a:lnRef idx="1">
+            <a:schemeClr val="accent1"/>
+          </a:lnRef>
+          <a:fillRef idx="3">
+            <a:schemeClr val="accent1"/>
+          </a:fillRef>
+          <a:effectRef idx="2">
+            <a:schemeClr val="accent1"/>
+          </a:effectRef>
+          <a:fontRef idx="minor">
+            <a:schemeClr val="lt1"/>
+          </a:fontRef>
+        </p:style>
+        <p:txBody>
+          <a:bodyPr rtlCol="0" anchor="ctr"/>
+          <a:lstStyle/>
+          <a:p>
+            <a:pPr algn="ctr"/>
+          </a:p>
+        </p:txBody>
+      </p:sp>
+      <p:sp>
+        <p:nvSpPr>
+          <p:cNvPr id="6" name="Oval 5"/>
+          <p:cNvSpPr/>
+          <p:nvPr/>
+        </p:nvSpPr>
+        <p:spPr>
+          <a:xfrm>
+            <a:off x="8229600" y="-914400"/>
+            <a:ext cx="4572000" cy="4572000"/>
+          </a:xfrm>
+          <a:prstGeom prst="ellipse">
+            <a:avLst/>
+          </a:prstGeom>
+          <a:solidFill>
+            <a:srgbClr val="6366F1">
+              <a:lumMod val="70000"/>
+              <a:lumOff val="30000"/>
+            </a:srgbClr>
+          </a:solidFill>
+          <a:ln>
+            <a:noFill/>
+          </a:ln>
+        </p:spPr>
+        <p:style>
+          <a:lnRef idx="1">
+            <a:schemeClr val="accent1"/>
+          </a:lnRef>
+          <a:fillRef idx="3">
+            <a:schemeClr val="accent1"/>
+          </a:fillRef>
+          <a:effectRef idx="2">
+            <a:schemeClr val="accent1"/>
+          </a:effectRef>
+          <a:fontRef idx="minor">
+            <a:schemeClr val="lt1"/>
+          </a:fontRef>
+        </p:style>
+        <p:txBody>
+          <a:bodyPr rtlCol="0" anchor="ctr"/>
+          <a:lstStyle/>
+          <a:p>
+            <a:pPr algn="ctr"/>
+          </a:p>
+        </p:txBody>
+      </p:sp>
+      <p:sp>
+        <p:nvSpPr>
+          <p:cNvPr id="7" name="Oval 6"/>
+          <p:cNvSpPr/>
+          <p:nvPr/>
+        </p:nvSpPr>
+        <p:spPr>
+          <a:xfrm>
+            <a:off x="-914400" y="3657600"/>
+            <a:ext cx="3657600" cy="3657600"/>
+          </a:xfrm>
+          <a:prstGeom prst="ellipse">
+            <a:avLst/>
+          </a:prstGeom>
+          <a:solidFill>
+            <a:srgbClr val="5046E5">
+              <a:lumMod val="60000"/>
+              <a:lumOff val="40000"/>
+            </a:srgbClr>
+          </a:solidFill>
+          <a:ln>
+            <a:noFill/>
+          </a:ln>
+        </p:spPr>
+        <p:style>
+          <a:lnRef idx="1">
+            <a:schemeClr val="accent1"/>
+          </a:lnRef>
+          <a:fillRef idx="3">
+            <a:schemeClr val="accent1"/>
+          </a:fillRef>
+          <a:effectRef idx="2">
+            <a:schemeClr val="accent1"/>
+          </a:effectRef>
+          <a:fontRef idx="minor">
+            <a:schemeClr val="lt1"/>
+          </a:fontRef>
+        </p:style>
+        <p:txBody>
+          <a:bodyPr rtlCol="0" anchor="ctr"/>
+          <a:lstStyle/>
+          <a:p>
+            <a:pPr algn="ctr"/>
+          </a:p>
+        </p:txBody>
+      </p:sp>
+      <p:sp>
+        <p:nvSpPr>
+          <p:cNvPr id="8" name="Rounded Rectangle 7"/>
+          <p:cNvSpPr/>
+          <p:nvPr/>
+        </p:nvSpPr>
+        <p:spPr>
+          <a:xfrm>
+            <a:off x="914400" y="1371600"/>
+            <a:ext cx="2377440" cy="438912"/>
+          </a:xfrm>
+          <a:prstGeom prst="roundRect">
+            <a:avLst/>
+          </a:prstGeom>
+          <a:solidFill>
+            <a:srgbClr val="312E81"/>
+          </a:solidFill>
+          <a:ln>
+            <a:noFill/>
+          </a:ln>
+        </p:spPr>
+        <p:style>
+          <a:lnRef idx="1">
+            <a:schemeClr val="accent1"/>
+          </a:lnRef>
+          <a:fillRef idx="3">
+            <a:schemeClr val="accent1"/>
+          </a:fillRef>
+          <a:effectRef idx="2">
+            <a:schemeClr val="accent1"/>
+          </a:effectRef>
+          <a:fontRef idx="minor">
+            <a:schemeClr val="lt1"/>
+          </a:fontRef>
+        </p:style>
+        <p:txBody>
+          <a:bodyPr rtlCol="0" anchor="ctr" lIns="137160"/>
+          <a:lstStyle/>
+          <a:p>
+            <a:pPr algn="l">
+              <a:defRPr sz="1400" b="1">
+                <a:solidFill>
+                  <a:srgbClr val="C7D2FE"/>
+                </a:solidFill>
+                <a:latin typeface="Consolas"/>
+              </a:defRPr>
+            </a:pPr>
+            <a:r>
+              <a:t>MODULE 2</a:t>
+            </a:r>
+          </a:p>
+        </p:txBody>
+      </p:sp>
+      <p:sp>
+        <p:nvSpPr>
+          <p:cNvPr id="9" name="TextBox 8"/>
           <p:cNvSpPr txBox="1"/>
           <p:nvPr/>
         </p:nvSpPr>
         <p:spPr>
           <a:xfrm>
-            <a:off x="914400" y="1097280"/>
-            <a:ext cx="10058400" cy="731520"/>
+            <a:off x="914400" y="2286000"/>
+            <a:ext cx="9144000" cy="2011680"/>
           </a:xfrm>
           <a:prstGeom prst="rect">
             <a:avLst/>
@@ -3168,35 +3441,39 @@
           <a:noFill/>
         </p:spPr>
         <p:txBody>
-          <a:bodyPr wrap="none">
+          <a:bodyPr wrap="square">
             <a:spAutoFit/>
           </a:bodyPr>
           <a:lstStyle/>
           <a:p>
-            <a:pPr>
-              <a:defRPr sz="2000" b="1">
-                <a:solidFill>
-                  <a:srgbClr val="007BFF"/>
-                </a:solidFill>
-                <a:latin typeface="Calibri"/>
-              </a:defRPr>
-            </a:pPr>
-            <a:r>
-              <a:t>MODULE 2</a:t>
-            </a:r>
-          </a:p>
-        </p:txBody>
-      </p:sp>
-      <p:sp>
-        <p:nvSpPr>
-          <p:cNvPr id="4" name="TextBox 3"/>
+            <a:pPr algn="l">
+              <a:defRPr sz="4000" b="1">
+                <a:solidFill>
+                  <a:srgbClr val="FFFFFF"/>
+                </a:solidFill>
+                <a:latin typeface="Inter"/>
+              </a:defRPr>
+            </a:pPr>
+            <a:r>
+              <a:t>Getting Started</a:t>
+            </a:r>
+            <a:br/>
+            <a:r>
+              <a:t>with doe-helper</a:t>
+            </a:r>
+          </a:p>
+        </p:txBody>
+      </p:sp>
+      <p:sp>
+        <p:nvSpPr>
+          <p:cNvPr id="10" name="TextBox 9"/>
           <p:cNvSpPr txBox="1"/>
           <p:nvPr/>
         </p:nvSpPr>
         <p:spPr>
           <a:xfrm>
-            <a:off x="914400" y="2011680"/>
-            <a:ext cx="10058400" cy="1828800"/>
+            <a:off x="914400" y="4389120"/>
+            <a:ext cx="8686800" cy="1371600"/>
           </a:xfrm>
           <a:prstGeom prst="rect">
             <a:avLst/>
@@ -3209,30 +3486,30 @@
           </a:bodyPr>
           <a:lstStyle/>
           <a:p>
-            <a:pPr>
-              <a:defRPr sz="4400" b="1">
-                <a:solidFill>
-                  <a:srgbClr val="FFFFFF"/>
-                </a:solidFill>
-                <a:latin typeface="Calibri"/>
-              </a:defRPr>
-            </a:pPr>
-            <a:r>
-              <a:t>Getting Started with doe-helper</a:t>
-            </a:r>
-          </a:p>
-        </p:txBody>
-      </p:sp>
-      <p:sp>
-        <p:nvSpPr>
-          <p:cNvPr id="5" name="TextBox 4"/>
+            <a:pPr algn="l">
+              <a:defRPr sz="1900" b="0">
+                <a:solidFill>
+                  <a:srgbClr val="A5B4FC"/>
+                </a:solidFill>
+                <a:latin typeface="Inter"/>
+              </a:defRPr>
+            </a:pPr>
+            <a:r>
+              <a:t>Installation, configuration, and your first experiment</a:t>
+            </a:r>
+          </a:p>
+        </p:txBody>
+      </p:sp>
+      <p:sp>
+        <p:nvSpPr>
+          <p:cNvPr id="11" name="TextBox 10"/>
           <p:cNvSpPr txBox="1"/>
           <p:nvPr/>
         </p:nvSpPr>
         <p:spPr>
           <a:xfrm>
-            <a:off x="914400" y="4114800"/>
-            <a:ext cx="9144000" cy="1371600"/>
+            <a:off x="731520" y="6400800"/>
+            <a:ext cx="10058400" cy="365760"/>
           </a:xfrm>
           <a:prstGeom prst="rect">
             <a:avLst/>
@@ -3245,52 +3522,16 @@
           </a:bodyPr>
           <a:lstStyle/>
           <a:p>
-            <a:pPr>
-              <a:defRPr sz="2200">
-                <a:solidFill>
-                  <a:srgbClr val="CCCCCC"/>
-                </a:solidFill>
-                <a:latin typeface="Calibri"/>
-              </a:defRPr>
-            </a:pPr>
-            <a:r>
-              <a:t>Installation, configuration, and your first experiment</a:t>
-            </a:r>
-          </a:p>
-        </p:txBody>
-      </p:sp>
-      <p:sp>
-        <p:nvSpPr>
-          <p:cNvPr id="6" name="TextBox 5"/>
-          <p:cNvSpPr txBox="1"/>
-          <p:nvPr/>
-        </p:nvSpPr>
-        <p:spPr>
-          <a:xfrm>
-            <a:off x="914400" y="6126480"/>
-            <a:ext cx="10058400" cy="457200"/>
-          </a:xfrm>
-          <a:prstGeom prst="rect">
-            <a:avLst/>
-          </a:prstGeom>
-          <a:noFill/>
-        </p:spPr>
-        <p:txBody>
-          <a:bodyPr wrap="square">
-            <a:spAutoFit/>
-          </a:bodyPr>
-          <a:lstStyle/>
-          <a:p>
-            <a:pPr>
-              <a:defRPr sz="1200">
-                <a:solidFill>
-                  <a:srgbClr val="888888"/>
-                </a:solidFill>
-                <a:latin typeface="Calibri"/>
-              </a:defRPr>
-            </a:pPr>
-            <a:r>
-              <a:t>Copyright © 2026 Martin J. Gallagher. Licensed under GPL-3.0-or-later.</a:t>
+            <a:pPr algn="l">
+              <a:defRPr sz="1000" b="0">
+                <a:solidFill>
+                  <a:srgbClr val="6366F1"/>
+                </a:solidFill>
+                <a:latin typeface="Consolas"/>
+              </a:defRPr>
+            </a:pPr>
+            <a:r>
+              <a:t>© 2026 Martin J. Gallagher  |  GPL-3.0-or-later  |  doehelper.com</a:t>
             </a:r>
           </a:p>
         </p:txBody>
@@ -3309,7 +3550,7 @@
     <p:bg>
       <p:bgPr>
         <a:solidFill>
-          <a:srgbClr val="FFFFFF"/>
+          <a:srgbClr val="FAFAFA"/>
         </a:solidFill>
         <a:effectLst/>
       </p:bgPr>
@@ -3330,13 +3571,13 @@
         <p:spPr>
           <a:xfrm>
             <a:off x="0" y="0"/>
-            <a:ext cx="12191695" cy="54864"/>
+            <a:ext cx="12191695" cy="45720"/>
           </a:xfrm>
           <a:prstGeom prst="rect">
             <a:avLst/>
           </a:prstGeom>
           <a:solidFill>
-            <a:srgbClr val="00C853"/>
+            <a:srgbClr val="5046E5"/>
           </a:solidFill>
           <a:ln>
             <a:noFill/>
@@ -3366,56 +3607,20 @@
       </p:sp>
       <p:sp>
         <p:nvSpPr>
-          <p:cNvPr id="3" name="TextBox 2"/>
-          <p:cNvSpPr txBox="1"/>
+          <p:cNvPr id="3" name="Rectangle 2"/>
+          <p:cNvSpPr/>
           <p:nvPr/>
         </p:nvSpPr>
         <p:spPr>
           <a:xfrm>
-            <a:off x="731520" y="365760"/>
-            <a:ext cx="10515600" cy="822960"/>
+            <a:off x="548640" y="411480"/>
+            <a:ext cx="36576" cy="502920"/>
           </a:xfrm>
           <a:prstGeom prst="rect">
             <a:avLst/>
           </a:prstGeom>
-          <a:noFill/>
-        </p:spPr>
-        <p:txBody>
-          <a:bodyPr wrap="square">
-            <a:spAutoFit/>
-          </a:bodyPr>
-          <a:lstStyle/>
-          <a:p>
-            <a:pPr>
-              <a:defRPr sz="3000" b="1">
-                <a:solidFill>
-                  <a:srgbClr val="222222"/>
-                </a:solidFill>
-                <a:latin typeface="Calibri"/>
-              </a:defRPr>
-            </a:pPr>
-            <a:r>
-              <a:t>Full config.json Example</a:t>
-            </a:r>
-          </a:p>
-        </p:txBody>
-      </p:sp>
-      <p:sp>
-        <p:nvSpPr>
-          <p:cNvPr id="4" name="Rounded Rectangle 3"/>
-          <p:cNvSpPr/>
-          <p:nvPr/>
-        </p:nvSpPr>
-        <p:spPr>
-          <a:xfrm>
-            <a:off x="731520" y="1371600"/>
-            <a:ext cx="10515600" cy="4114800"/>
-          </a:xfrm>
-          <a:prstGeom prst="roundRect">
-            <a:avLst/>
-          </a:prstGeom>
           <a:solidFill>
-            <a:srgbClr val="2D2D2D"/>
+            <a:srgbClr val="5046E5"/>
           </a:solidFill>
           <a:ln>
             <a:noFill/>
@@ -3436,276 +3641,23 @@
           </a:fontRef>
         </p:style>
         <p:txBody>
-          <a:bodyPr rtlCol="0" anchor="ctr" wrap="square" lIns="274320" tIns="274320"/>
-          <a:lstStyle/>
-          <a:p>
-            <a:pPr algn="ctr">
-              <a:spcAft>
-                <a:spcPts val="200"/>
-              </a:spcAft>
-              <a:defRPr sz="1800">
-                <a:solidFill>
-                  <a:srgbClr val="D4D4D4"/>
-                </a:solidFill>
-                <a:latin typeface="Consolas"/>
-              </a:defRPr>
-            </a:pPr>
-            <a:r>
-              <a:t>{</a:t>
-            </a:r>
-          </a:p>
-          <a:p>
-            <a:pPr>
-              <a:spcAft>
-                <a:spcPts val="200"/>
-              </a:spcAft>
-              <a:defRPr sz="1800">
-                <a:solidFill>
-                  <a:srgbClr val="D4D4D4"/>
-                </a:solidFill>
-                <a:latin typeface="Consolas"/>
-              </a:defRPr>
-            </a:pPr>
-            <a:r>
-              <a:t>  "factors": {</a:t>
-            </a:r>
-          </a:p>
-          <a:p>
-            <a:pPr>
-              <a:spcAft>
-                <a:spcPts val="200"/>
-              </a:spcAft>
-              <a:defRPr sz="1800">
-                <a:solidFill>
-                  <a:srgbClr val="D4D4D4"/>
-                </a:solidFill>
-                <a:latin typeface="Consolas"/>
-              </a:defRPr>
-            </a:pPr>
-            <a:r>
-              <a:t>    "temperature": {"low": 150, "high": 200, "units": "C"},</a:t>
-            </a:r>
-          </a:p>
-          <a:p>
-            <a:pPr>
-              <a:spcAft>
-                <a:spcPts val="200"/>
-              </a:spcAft>
-              <a:defRPr sz="1800">
-                <a:solidFill>
-                  <a:srgbClr val="D4D4D4"/>
-                </a:solidFill>
-                <a:latin typeface="Consolas"/>
-              </a:defRPr>
-            </a:pPr>
-            <a:r>
-              <a:t>    "pressure":    {"low": 1.0, "high": 5.0, "units": "bar"},</a:t>
-            </a:r>
-          </a:p>
-          <a:p>
-            <a:pPr>
-              <a:spcAft>
-                <a:spcPts val="200"/>
-              </a:spcAft>
-              <a:defRPr sz="1800">
-                <a:solidFill>
-                  <a:srgbClr val="D4D4D4"/>
-                </a:solidFill>
-                <a:latin typeface="Consolas"/>
-              </a:defRPr>
-            </a:pPr>
-            <a:r>
-              <a:t>    "catalyst":    {"low": 0.5, "high": 1.5, "units": "g"}</a:t>
-            </a:r>
-          </a:p>
-          <a:p>
-            <a:pPr>
-              <a:spcAft>
-                <a:spcPts val="200"/>
-              </a:spcAft>
-              <a:defRPr sz="1800">
-                <a:solidFill>
-                  <a:srgbClr val="D4D4D4"/>
-                </a:solidFill>
-                <a:latin typeface="Consolas"/>
-              </a:defRPr>
-            </a:pPr>
-            <a:r>
-              <a:t>  },</a:t>
-            </a:r>
-          </a:p>
-          <a:p>
-            <a:pPr>
-              <a:spcAft>
-                <a:spcPts val="200"/>
-              </a:spcAft>
-              <a:defRPr sz="1800">
-                <a:solidFill>
-                  <a:srgbClr val="D4D4D4"/>
-                </a:solidFill>
-                <a:latin typeface="Consolas"/>
-              </a:defRPr>
-            </a:pPr>
-            <a:r>
-              <a:t>  "responses": {</a:t>
-            </a:r>
-          </a:p>
-          <a:p>
-            <a:pPr>
-              <a:spcAft>
-                <a:spcPts val="200"/>
-              </a:spcAft>
-              <a:defRPr sz="1800">
-                <a:solidFill>
-                  <a:srgbClr val="D4D4D4"/>
-                </a:solidFill>
-                <a:latin typeface="Consolas"/>
-              </a:defRPr>
-            </a:pPr>
-            <a:r>
-              <a:t>    "yield":  {"units": "%", "target": "maximize"},</a:t>
-            </a:r>
-          </a:p>
-          <a:p>
-            <a:pPr>
-              <a:spcAft>
-                <a:spcPts val="200"/>
-              </a:spcAft>
-              <a:defRPr sz="1800">
-                <a:solidFill>
-                  <a:srgbClr val="D4D4D4"/>
-                </a:solidFill>
-                <a:latin typeface="Consolas"/>
-              </a:defRPr>
-            </a:pPr>
-            <a:r>
-              <a:t>    "purity": {"units": "%", "target": "maximize"}</a:t>
-            </a:r>
-          </a:p>
-          <a:p>
-            <a:pPr>
-              <a:spcAft>
-                <a:spcPts val="200"/>
-              </a:spcAft>
-              <a:defRPr sz="1800">
-                <a:solidFill>
-                  <a:srgbClr val="D4D4D4"/>
-                </a:solidFill>
-                <a:latin typeface="Consolas"/>
-              </a:defRPr>
-            </a:pPr>
-            <a:r>
-              <a:t>  },</a:t>
-            </a:r>
-          </a:p>
-          <a:p>
-            <a:pPr>
-              <a:spcAft>
-                <a:spcPts val="200"/>
-              </a:spcAft>
-              <a:defRPr sz="1800">
-                <a:solidFill>
-                  <a:srgbClr val="D4D4D4"/>
-                </a:solidFill>
-                <a:latin typeface="Consolas"/>
-              </a:defRPr>
-            </a:pPr>
-            <a:r>
-              <a:t>  "design": {</a:t>
-            </a:r>
-          </a:p>
-          <a:p>
-            <a:pPr>
-              <a:spcAft>
-                <a:spcPts val="200"/>
-              </a:spcAft>
-              <a:defRPr sz="1800">
-                <a:solidFill>
-                  <a:srgbClr val="D4D4D4"/>
-                </a:solidFill>
-                <a:latin typeface="Consolas"/>
-              </a:defRPr>
-            </a:pPr>
-            <a:r>
-              <a:t>    "type": "full_factorial",</a:t>
-            </a:r>
-          </a:p>
-          <a:p>
-            <a:pPr>
-              <a:spcAft>
-                <a:spcPts val="200"/>
-              </a:spcAft>
-              <a:defRPr sz="1800">
-                <a:solidFill>
-                  <a:srgbClr val="D4D4D4"/>
-                </a:solidFill>
-                <a:latin typeface="Consolas"/>
-              </a:defRPr>
-            </a:pPr>
-            <a:r>
-              <a:t>    "randomize": true,</a:t>
-            </a:r>
-          </a:p>
-          <a:p>
-            <a:pPr>
-              <a:spcAft>
-                <a:spcPts val="200"/>
-              </a:spcAft>
-              <a:defRPr sz="1800">
-                <a:solidFill>
-                  <a:srgbClr val="D4D4D4"/>
-                </a:solidFill>
-                <a:latin typeface="Consolas"/>
-              </a:defRPr>
-            </a:pPr>
-            <a:r>
-              <a:t>    "center_points": 3</a:t>
-            </a:r>
-          </a:p>
-          <a:p>
-            <a:pPr>
-              <a:spcAft>
-                <a:spcPts val="200"/>
-              </a:spcAft>
-              <a:defRPr sz="1800">
-                <a:solidFill>
-                  <a:srgbClr val="D4D4D4"/>
-                </a:solidFill>
-                <a:latin typeface="Consolas"/>
-              </a:defRPr>
-            </a:pPr>
-            <a:r>
-              <a:t>  }</a:t>
-            </a:r>
-          </a:p>
-          <a:p>
-            <a:pPr>
-              <a:spcAft>
-                <a:spcPts val="200"/>
-              </a:spcAft>
-              <a:defRPr sz="1800">
-                <a:solidFill>
-                  <a:srgbClr val="D4D4D4"/>
-                </a:solidFill>
-                <a:latin typeface="Consolas"/>
-              </a:defRPr>
-            </a:pPr>
-            <a:r>
-              <a:t>}</a:t>
-            </a:r>
-          </a:p>
-        </p:txBody>
-      </p:sp>
-      <p:sp>
-        <p:nvSpPr>
-          <p:cNvPr id="5" name="TextBox 4"/>
+          <a:bodyPr rtlCol="0" anchor="ctr"/>
+          <a:lstStyle/>
+          <a:p>
+            <a:pPr algn="ctr"/>
+          </a:p>
+        </p:txBody>
+      </p:sp>
+      <p:sp>
+        <p:nvSpPr>
+          <p:cNvPr id="4" name="TextBox 3"/>
           <p:cNvSpPr txBox="1"/>
           <p:nvPr/>
         </p:nvSpPr>
         <p:spPr>
           <a:xfrm>
-            <a:off x="731520" y="5760720"/>
-            <a:ext cx="10058400" cy="731520"/>
+            <a:off x="777240" y="365760"/>
+            <a:ext cx="10058400" cy="640080"/>
           </a:xfrm>
           <a:prstGeom prst="rect">
             <a:avLst/>
@@ -3718,16 +3670,203 @@
           </a:bodyPr>
           <a:lstStyle/>
           <a:p>
-            <a:pPr>
-              <a:defRPr sz="1600" i="1">
+            <a:pPr algn="l">
+              <a:defRPr sz="2800" b="1">
+                <a:solidFill>
+                  <a:srgbClr val="111111"/>
+                </a:solidFill>
+                <a:latin typeface="Inter"/>
+              </a:defRPr>
+            </a:pPr>
+            <a:r>
+              <a:t>Built-in Templates (doe init)</a:t>
+            </a:r>
+          </a:p>
+        </p:txBody>
+      </p:sp>
+      <p:sp>
+        <p:nvSpPr>
+          <p:cNvPr id="5" name="TextBox 4"/>
+          <p:cNvSpPr txBox="1"/>
+          <p:nvPr/>
+        </p:nvSpPr>
+        <p:spPr>
+          <a:xfrm>
+            <a:off x="822960" y="1188720"/>
+            <a:ext cx="10241280" cy="5120640"/>
+          </a:xfrm>
+          <a:prstGeom prst="rect">
+            <a:avLst/>
+          </a:prstGeom>
+          <a:noFill/>
+        </p:spPr>
+        <p:txBody>
+          <a:bodyPr wrap="square">
+            <a:spAutoFit/>
+          </a:bodyPr>
+          <a:lstStyle/>
+          <a:p>
+            <a:pPr>
+              <a:spcAft>
+                <a:spcPts val="600"/>
+              </a:spcAft>
+              <a:defRPr sz="1900">
+                <a:solidFill>
+                  <a:srgbClr val="333333"/>
+                </a:solidFill>
+                <a:latin typeface="Inter"/>
+              </a:defRPr>
+            </a:pPr>
+            <a:r>
+              <a:t>doe-helper includes 221 worked use-case templates</a:t>
+            </a:r>
+          </a:p>
+          <a:p>
+            <a:pPr>
+              <a:spcAft>
+                <a:spcPts val="600"/>
+              </a:spcAft>
+              <a:defRPr sz="1900">
+                <a:solidFill>
+                  <a:srgbClr val="333333"/>
+                </a:solidFill>
+                <a:latin typeface="Inter"/>
+              </a:defRPr>
+            </a:pPr>
+            <a:r>
+              <a:t>Categories include:</a:t>
+            </a:r>
+          </a:p>
+          <a:p>
+            <a:pPr lvl="1">
+              <a:spcAft>
+                <a:spcPts val="600"/>
+              </a:spcAft>
+              <a:defRPr sz="1700">
                 <a:solidFill>
                   <a:srgbClr val="666666"/>
                 </a:solidFill>
-                <a:latin typeface="Calibri"/>
-              </a:defRPr>
-            </a:pPr>
-            <a:r>
-              <a:t>This config produces a 2^3 = 8 runs + 3 center points = 11 total runs</a:t>
+                <a:latin typeface="Inter"/>
+              </a:defRPr>
+            </a:pPr>
+            <a:r>
+              <a:t>Cloud/DevOps: Kubernetes, CI/CD, database tuning</a:t>
+            </a:r>
+          </a:p>
+          <a:p>
+            <a:pPr lvl="1">
+              <a:spcAft>
+                <a:spcPts val="600"/>
+              </a:spcAft>
+              <a:defRPr sz="1700">
+                <a:solidFill>
+                  <a:srgbClr val="666666"/>
+                </a:solidFill>
+                <a:latin typeface="Inter"/>
+              </a:defRPr>
+            </a:pPr>
+            <a:r>
+              <a:t>Manufacturing: 3D printing, injection molding, chemical processes</a:t>
+            </a:r>
+          </a:p>
+          <a:p>
+            <a:pPr lvl="1">
+              <a:spcAft>
+                <a:spcPts val="600"/>
+              </a:spcAft>
+              <a:defRPr sz="1700">
+                <a:solidFill>
+                  <a:srgbClr val="666666"/>
+                </a:solidFill>
+                <a:latin typeface="Inter"/>
+              </a:defRPr>
+            </a:pPr>
+            <a:r>
+              <a:t>Food science: coffee brewing, bread baking, fermentation</a:t>
+            </a:r>
+          </a:p>
+          <a:p>
+            <a:pPr lvl="1">
+              <a:spcAft>
+                <a:spcPts val="600"/>
+              </a:spcAft>
+              <a:defRPr sz="1700">
+                <a:solidFill>
+                  <a:srgbClr val="666666"/>
+                </a:solidFill>
+                <a:latin typeface="Inter"/>
+              </a:defRPr>
+            </a:pPr>
+            <a:r>
+              <a:t>IoT/Electronics: sensor calibration, motor control</a:t>
+            </a:r>
+          </a:p>
+          <a:p>
+            <a:pPr lvl="1">
+              <a:spcAft>
+                <a:spcPts val="600"/>
+              </a:spcAft>
+              <a:defRPr sz="1700">
+                <a:solidFill>
+                  <a:srgbClr val="666666"/>
+                </a:solidFill>
+                <a:latin typeface="Inter"/>
+              </a:defRPr>
+            </a:pPr>
+            <a:r>
+              <a:t>Sports/Health: training programs, sleep optimisation</a:t>
+            </a:r>
+          </a:p>
+          <a:p>
+            <a:pPr>
+              <a:spcAft>
+                <a:spcPts val="600"/>
+              </a:spcAft>
+              <a:defRPr sz="1900">
+                <a:solidFill>
+                  <a:srgbClr val="333333"/>
+                </a:solidFill>
+                <a:latin typeface="Inter"/>
+              </a:defRPr>
+            </a:pPr>
+            <a:r>
+              <a:t>Templates provide config.json + simulation scripts for practice</a:t>
+            </a:r>
+          </a:p>
+        </p:txBody>
+      </p:sp>
+      <p:sp>
+        <p:nvSpPr>
+          <p:cNvPr id="6" name="TextBox 5"/>
+          <p:cNvSpPr txBox="1"/>
+          <p:nvPr/>
+        </p:nvSpPr>
+        <p:spPr>
+          <a:xfrm>
+            <a:off x="731520" y="6400800"/>
+            <a:ext cx="10058400" cy="365760"/>
+          </a:xfrm>
+          <a:prstGeom prst="rect">
+            <a:avLst/>
+          </a:prstGeom>
+          <a:noFill/>
+        </p:spPr>
+        <p:txBody>
+          <a:bodyPr wrap="square">
+            <a:spAutoFit/>
+          </a:bodyPr>
+          <a:lstStyle/>
+          <a:p>
+            <a:pPr algn="l">
+              <a:defRPr sz="1000" b="0">
+                <a:solidFill>
+                  <a:srgbClr val="999999"/>
+                </a:solidFill>
+                <a:latin typeface="Consolas"/>
+              </a:defRPr>
+            </a:pPr>
+            <a:r>
+              <a:t>© 2026 Martin J. Gallagher  |  GPL-3.0-or-later  |  doehelper.com</a:t>
             </a:r>
           </a:p>
         </p:txBody>
@@ -3746,7 +3885,7 @@
     <p:bg>
       <p:bgPr>
         <a:solidFill>
-          <a:srgbClr val="FFFFFF"/>
+          <a:srgbClr val="FAFAFA"/>
         </a:solidFill>
         <a:effectLst/>
       </p:bgPr>
@@ -3767,13 +3906,13 @@
         <p:spPr>
           <a:xfrm>
             <a:off x="0" y="0"/>
-            <a:ext cx="12191695" cy="54864"/>
+            <a:ext cx="12191695" cy="45720"/>
           </a:xfrm>
           <a:prstGeom prst="rect">
             <a:avLst/>
           </a:prstGeom>
           <a:solidFill>
-            <a:srgbClr val="007BFF"/>
+            <a:srgbClr val="0D9488"/>
           </a:solidFill>
           <a:ln>
             <a:noFill/>
@@ -3809,8 +3948,8 @@
         </p:nvSpPr>
         <p:spPr>
           <a:xfrm>
-            <a:off x="731520" y="365760"/>
-            <a:ext cx="10515600" cy="822960"/>
+            <a:off x="777240" y="320040"/>
+            <a:ext cx="10058400" cy="548640"/>
           </a:xfrm>
           <a:prstGeom prst="rect">
             <a:avLst/>
@@ -3823,30 +3962,73 @@
           </a:bodyPr>
           <a:lstStyle/>
           <a:p>
-            <a:pPr>
-              <a:defRPr sz="3200" b="1">
-                <a:solidFill>
-                  <a:srgbClr val="222222"/>
-                </a:solidFill>
-                <a:latin typeface="Calibri"/>
-              </a:defRPr>
-            </a:pPr>
-            <a:r>
-              <a:t>Built-in Templates (doe init)</a:t>
-            </a:r>
-          </a:p>
-        </p:txBody>
-      </p:sp>
-      <p:sp>
-        <p:nvSpPr>
-          <p:cNvPr id="4" name="TextBox 3"/>
+            <a:pPr algn="l">
+              <a:defRPr sz="2600" b="1">
+                <a:solidFill>
+                  <a:srgbClr val="111111"/>
+                </a:solidFill>
+                <a:latin typeface="Inter"/>
+              </a:defRPr>
+            </a:pPr>
+            <a:r>
+              <a:t>Verifying with doe info</a:t>
+            </a:r>
+          </a:p>
+        </p:txBody>
+      </p:sp>
+      <p:sp>
+        <p:nvSpPr>
+          <p:cNvPr id="4" name="Rectangle 3"/>
+          <p:cNvSpPr/>
+          <p:nvPr/>
+        </p:nvSpPr>
+        <p:spPr>
+          <a:xfrm>
+            <a:off x="548640" y="1051560"/>
+            <a:ext cx="10972800" cy="320040"/>
+          </a:xfrm>
+          <a:prstGeom prst="rect">
+            <a:avLst/>
+          </a:prstGeom>
+          <a:solidFill>
+            <a:srgbClr val="222222"/>
+          </a:solidFill>
+          <a:ln>
+            <a:noFill/>
+          </a:ln>
+        </p:spPr>
+        <p:style>
+          <a:lnRef idx="1">
+            <a:schemeClr val="accent1"/>
+          </a:lnRef>
+          <a:fillRef idx="3">
+            <a:schemeClr val="accent1"/>
+          </a:fillRef>
+          <a:effectRef idx="2">
+            <a:schemeClr val="accent1"/>
+          </a:effectRef>
+          <a:fontRef idx="minor">
+            <a:schemeClr val="lt1"/>
+          </a:fontRef>
+        </p:style>
+        <p:txBody>
+          <a:bodyPr rtlCol="0" anchor="ctr"/>
+          <a:lstStyle/>
+          <a:p>
+            <a:pPr algn="ctr"/>
+          </a:p>
+        </p:txBody>
+      </p:sp>
+      <p:sp>
+        <p:nvSpPr>
+          <p:cNvPr id="5" name="TextBox 4"/>
           <p:cNvSpPr txBox="1"/>
           <p:nvPr/>
         </p:nvSpPr>
         <p:spPr>
           <a:xfrm>
-            <a:off x="914400" y="1463040"/>
-            <a:ext cx="10058400" cy="4754880"/>
+            <a:off x="822960" y="1051560"/>
+            <a:ext cx="3657600" cy="320040"/>
           </a:xfrm>
           <a:prstGeom prst="rect">
             <a:avLst/>
@@ -3854,136 +4036,335 @@
           <a:noFill/>
         </p:spPr>
         <p:txBody>
+          <a:bodyPr wrap="square" anchor="ctr">
+            <a:spAutoFit/>
+          </a:bodyPr>
+          <a:lstStyle/>
+          <a:p>
+            <a:pPr algn="l">
+              <a:defRPr sz="1000" b="0">
+                <a:solidFill>
+                  <a:srgbClr val="999999"/>
+                </a:solidFill>
+                <a:latin typeface="Consolas"/>
+              </a:defRPr>
+            </a:pPr>
+            <a:r>
+              <a:t>terminal</a:t>
+            </a:r>
+          </a:p>
+        </p:txBody>
+      </p:sp>
+      <p:sp>
+        <p:nvSpPr>
+          <p:cNvPr id="6" name="Rounded Rectangle 5"/>
+          <p:cNvSpPr/>
+          <p:nvPr/>
+        </p:nvSpPr>
+        <p:spPr>
+          <a:xfrm>
+            <a:off x="548640" y="1371600"/>
+            <a:ext cx="10972800" cy="3931920"/>
+          </a:xfrm>
+          <a:prstGeom prst="roundRect">
+            <a:avLst/>
+          </a:prstGeom>
+          <a:solidFill>
+            <a:srgbClr val="1A1A1A"/>
+          </a:solidFill>
+          <a:ln>
+            <a:noFill/>
+          </a:ln>
+        </p:spPr>
+        <p:style>
+          <a:lnRef idx="1">
+            <a:schemeClr val="accent1"/>
+          </a:lnRef>
+          <a:fillRef idx="3">
+            <a:schemeClr val="accent1"/>
+          </a:fillRef>
+          <a:effectRef idx="2">
+            <a:schemeClr val="accent1"/>
+          </a:effectRef>
+          <a:fontRef idx="minor">
+            <a:schemeClr val="lt1"/>
+          </a:fontRef>
+        </p:style>
+        <p:txBody>
+          <a:bodyPr rtlCol="0" anchor="ctr" wrap="square" lIns="274320" tIns="182880" rIns="274320"/>
+          <a:lstStyle/>
+          <a:p>
+            <a:pPr algn="ctr">
+              <a:spcAft>
+                <a:spcPts val="100"/>
+              </a:spcAft>
+              <a:defRPr sz="1500">
+                <a:solidFill>
+                  <a:srgbClr val="6EC86E"/>
+                </a:solidFill>
+                <a:latin typeface="Consolas"/>
+              </a:defRPr>
+            </a:pPr>
+            <a:r>
+              <a:t>$ doe info my_experiment/</a:t>
+            </a:r>
+          </a:p>
+          <a:p>
+            <a:pPr>
+              <a:spcAft>
+                <a:spcPts val="100"/>
+              </a:spcAft>
+              <a:defRPr sz="1500">
+                <a:solidFill>
+                  <a:srgbClr val="CCCCCC"/>
+                </a:solidFill>
+                <a:latin typeface="Consolas"/>
+              </a:defRPr>
+            </a:pPr>
+          </a:p>
+          <a:p>
+            <a:pPr>
+              <a:spcAft>
+                <a:spcPts val="100"/>
+              </a:spcAft>
+              <a:defRPr sz="1500">
+                <a:solidFill>
+                  <a:srgbClr val="CCCCCC"/>
+                </a:solidFill>
+                <a:latin typeface="Consolas"/>
+              </a:defRPr>
+            </a:pPr>
+            <a:r>
+              <a:t>Design Summary</a:t>
+            </a:r>
+          </a:p>
+          <a:p>
+            <a:pPr>
+              <a:spcAft>
+                <a:spcPts val="100"/>
+              </a:spcAft>
+              <a:defRPr sz="1500">
+                <a:solidFill>
+                  <a:srgbClr val="CCCCCC"/>
+                </a:solidFill>
+                <a:latin typeface="Consolas"/>
+              </a:defRPr>
+            </a:pPr>
+            <a:r>
+              <a:t>  Type:           full_factorial</a:t>
+            </a:r>
+          </a:p>
+          <a:p>
+            <a:pPr>
+              <a:spcAft>
+                <a:spcPts val="100"/>
+              </a:spcAft>
+              <a:defRPr sz="1500">
+                <a:solidFill>
+                  <a:srgbClr val="CCCCCC"/>
+                </a:solidFill>
+                <a:latin typeface="Consolas"/>
+              </a:defRPr>
+            </a:pPr>
+            <a:r>
+              <a:t>  Factors:        3</a:t>
+            </a:r>
+          </a:p>
+          <a:p>
+            <a:pPr>
+              <a:spcAft>
+                <a:spcPts val="100"/>
+              </a:spcAft>
+              <a:defRPr sz="1500">
+                <a:solidFill>
+                  <a:srgbClr val="CCCCCC"/>
+                </a:solidFill>
+                <a:latin typeface="Consolas"/>
+              </a:defRPr>
+            </a:pPr>
+            <a:r>
+              <a:t>  Runs:           11 (8 factorial + 3 center)</a:t>
+            </a:r>
+          </a:p>
+          <a:p>
+            <a:pPr>
+              <a:spcAft>
+                <a:spcPts val="100"/>
+              </a:spcAft>
+              <a:defRPr sz="1500">
+                <a:solidFill>
+                  <a:srgbClr val="CCCCCC"/>
+                </a:solidFill>
+                <a:latin typeface="Consolas"/>
+              </a:defRPr>
+            </a:pPr>
+            <a:r>
+              <a:t>  Replicates:     1</a:t>
+            </a:r>
+          </a:p>
+          <a:p>
+            <a:pPr>
+              <a:spcAft>
+                <a:spcPts val="100"/>
+              </a:spcAft>
+              <a:defRPr sz="1500">
+                <a:solidFill>
+                  <a:srgbClr val="CCCCCC"/>
+                </a:solidFill>
+                <a:latin typeface="Consolas"/>
+              </a:defRPr>
+            </a:pPr>
+            <a:r>
+              <a:t>  Randomized:     yes</a:t>
+            </a:r>
+          </a:p>
+          <a:p>
+            <a:pPr>
+              <a:spcAft>
+                <a:spcPts val="100"/>
+              </a:spcAft>
+              <a:defRPr sz="1500">
+                <a:solidFill>
+                  <a:srgbClr val="CCCCCC"/>
+                </a:solidFill>
+                <a:latin typeface="Consolas"/>
+              </a:defRPr>
+            </a:pPr>
+          </a:p>
+          <a:p>
+            <a:pPr>
+              <a:spcAft>
+                <a:spcPts val="100"/>
+              </a:spcAft>
+              <a:defRPr sz="1500">
+                <a:solidFill>
+                  <a:srgbClr val="CCCCCC"/>
+                </a:solidFill>
+                <a:latin typeface="Consolas"/>
+              </a:defRPr>
+            </a:pPr>
+            <a:r>
+              <a:t>Design Evaluation</a:t>
+            </a:r>
+          </a:p>
+          <a:p>
+            <a:pPr>
+              <a:spcAft>
+                <a:spcPts val="100"/>
+              </a:spcAft>
+              <a:defRPr sz="1500">
+                <a:solidFill>
+                  <a:srgbClr val="CCCCCC"/>
+                </a:solidFill>
+                <a:latin typeface="Consolas"/>
+              </a:defRPr>
+            </a:pPr>
+            <a:r>
+              <a:t>  D-efficiency:   100.0%</a:t>
+            </a:r>
+          </a:p>
+          <a:p>
+            <a:pPr>
+              <a:spcAft>
+                <a:spcPts val="100"/>
+              </a:spcAft>
+              <a:defRPr sz="1500">
+                <a:solidFill>
+                  <a:srgbClr val="CCCCCC"/>
+                </a:solidFill>
+                <a:latin typeface="Consolas"/>
+              </a:defRPr>
+            </a:pPr>
+            <a:r>
+              <a:t>  A-efficiency:   100.0%</a:t>
+            </a:r>
+          </a:p>
+          <a:p>
+            <a:pPr>
+              <a:spcAft>
+                <a:spcPts val="100"/>
+              </a:spcAft>
+              <a:defRPr sz="1500">
+                <a:solidFill>
+                  <a:srgbClr val="CCCCCC"/>
+                </a:solidFill>
+                <a:latin typeface="Consolas"/>
+              </a:defRPr>
+            </a:pPr>
+            <a:r>
+              <a:t>  G-efficiency:   100.0%</a:t>
+            </a:r>
+          </a:p>
+        </p:txBody>
+      </p:sp>
+      <p:sp>
+        <p:nvSpPr>
+          <p:cNvPr id="7" name="TextBox 6"/>
+          <p:cNvSpPr txBox="1"/>
+          <p:nvPr/>
+        </p:nvSpPr>
+        <p:spPr>
+          <a:xfrm>
+            <a:off x="822960" y="5349240"/>
+            <a:ext cx="10058400" cy="640080"/>
+          </a:xfrm>
+          <a:prstGeom prst="rect">
+            <a:avLst/>
+          </a:prstGeom>
+          <a:noFill/>
+        </p:spPr>
+        <p:txBody>
           <a:bodyPr wrap="square">
             <a:spAutoFit/>
           </a:bodyPr>
           <a:lstStyle/>
           <a:p>
-            <a:pPr>
-              <a:spcAft>
-                <a:spcPts val="800"/>
-              </a:spcAft>
-              <a:defRPr sz="2200" b="0">
-                <a:solidFill>
-                  <a:srgbClr val="222222"/>
-                </a:solidFill>
-                <a:latin typeface="Calibri"/>
-              </a:defRPr>
-            </a:pPr>
-            <a:r>
-              <a:t>doe-helper includes 221 worked use-case templates</a:t>
-            </a:r>
-          </a:p>
-          <a:p>
-            <a:pPr>
-              <a:spcAft>
-                <a:spcPts val="800"/>
-              </a:spcAft>
-              <a:defRPr sz="2200" b="0">
-                <a:solidFill>
-                  <a:srgbClr val="222222"/>
-                </a:solidFill>
-                <a:latin typeface="Calibri"/>
-              </a:defRPr>
-            </a:pPr>
-            <a:r>
-              <a:t>Categories include:</a:t>
-            </a:r>
-          </a:p>
-          <a:p>
-            <a:pPr lvl="1">
-              <a:spcAft>
-                <a:spcPts val="800"/>
-              </a:spcAft>
-              <a:defRPr sz="1900">
-                <a:solidFill>
-                  <a:srgbClr val="222222"/>
-                </a:solidFill>
-                <a:latin typeface="Calibri"/>
-              </a:defRPr>
-            </a:pPr>
-            <a:r>
-              <a:t>Cloud/DevOps: Kubernetes, CI/CD, database tuning</a:t>
-            </a:r>
-          </a:p>
-          <a:p>
-            <a:pPr lvl="1">
-              <a:spcAft>
-                <a:spcPts val="800"/>
-              </a:spcAft>
-              <a:defRPr sz="1900">
-                <a:solidFill>
-                  <a:srgbClr val="222222"/>
-                </a:solidFill>
-                <a:latin typeface="Calibri"/>
-              </a:defRPr>
-            </a:pPr>
-            <a:r>
-              <a:t>Manufacturing: 3D printing, injection molding, chemical processes</a:t>
-            </a:r>
-          </a:p>
-          <a:p>
-            <a:pPr lvl="1">
-              <a:spcAft>
-                <a:spcPts val="800"/>
-              </a:spcAft>
-              <a:defRPr sz="1900">
-                <a:solidFill>
-                  <a:srgbClr val="222222"/>
-                </a:solidFill>
-                <a:latin typeface="Calibri"/>
-              </a:defRPr>
-            </a:pPr>
-            <a:r>
-              <a:t>Food science: coffee brewing, bread baking, fermentation</a:t>
-            </a:r>
-          </a:p>
-          <a:p>
-            <a:pPr lvl="1">
-              <a:spcAft>
-                <a:spcPts val="800"/>
-              </a:spcAft>
-              <a:defRPr sz="1900">
-                <a:solidFill>
-                  <a:srgbClr val="222222"/>
-                </a:solidFill>
-                <a:latin typeface="Calibri"/>
-              </a:defRPr>
-            </a:pPr>
-            <a:r>
-              <a:t>IoT/Electronics: sensor calibration, motor control</a:t>
-            </a:r>
-          </a:p>
-          <a:p>
-            <a:pPr lvl="1">
-              <a:spcAft>
-                <a:spcPts val="800"/>
-              </a:spcAft>
-              <a:defRPr sz="1900">
-                <a:solidFill>
-                  <a:srgbClr val="222222"/>
-                </a:solidFill>
-                <a:latin typeface="Calibri"/>
-              </a:defRPr>
-            </a:pPr>
-            <a:r>
-              <a:t>Sports/Health: training programs, sleep optimisation</a:t>
-            </a:r>
-          </a:p>
-          <a:p>
-            <a:pPr>
-              <a:spcAft>
-                <a:spcPts val="800"/>
-              </a:spcAft>
-              <a:defRPr sz="2200" b="0">
-                <a:solidFill>
-                  <a:srgbClr val="222222"/>
-                </a:solidFill>
-                <a:latin typeface="Calibri"/>
-              </a:defRPr>
-            </a:pPr>
-            <a:r>
-              <a:t>Templates provide config.json + simulation scripts for practice</a:t>
+            <a:pPr algn="l">
+              <a:defRPr sz="1400" b="0">
+                <a:solidFill>
+                  <a:srgbClr val="666666"/>
+                </a:solidFill>
+                <a:latin typeface="Inter"/>
+              </a:defRPr>
+            </a:pPr>
+            <a:r>
+              <a:t>Always run doe info to verify your design before running experiments</a:t>
+            </a:r>
+          </a:p>
+        </p:txBody>
+      </p:sp>
+      <p:sp>
+        <p:nvSpPr>
+          <p:cNvPr id="8" name="TextBox 7"/>
+          <p:cNvSpPr txBox="1"/>
+          <p:nvPr/>
+        </p:nvSpPr>
+        <p:spPr>
+          <a:xfrm>
+            <a:off x="731520" y="6400800"/>
+            <a:ext cx="10058400" cy="365760"/>
+          </a:xfrm>
+          <a:prstGeom prst="rect">
+            <a:avLst/>
+          </a:prstGeom>
+          <a:noFill/>
+        </p:spPr>
+        <p:txBody>
+          <a:bodyPr wrap="square">
+            <a:spAutoFit/>
+          </a:bodyPr>
+          <a:lstStyle/>
+          <a:p>
+            <a:pPr algn="l">
+              <a:defRPr sz="1000" b="0">
+                <a:solidFill>
+                  <a:srgbClr val="999999"/>
+                </a:solidFill>
+                <a:latin typeface="Consolas"/>
+              </a:defRPr>
+            </a:pPr>
+            <a:r>
+              <a:t>© 2026 Martin J. Gallagher  |  GPL-3.0-or-later  |  doehelper.com</a:t>
             </a:r>
           </a:p>
         </p:txBody>
@@ -4002,7 +4383,7 @@
     <p:bg>
       <p:bgPr>
         <a:solidFill>
-          <a:srgbClr val="FFFFFF"/>
+          <a:srgbClr val="FAFAFA"/>
         </a:solidFill>
         <a:effectLst/>
       </p:bgPr>
@@ -4023,13 +4404,13 @@
         <p:spPr>
           <a:xfrm>
             <a:off x="0" y="0"/>
-            <a:ext cx="12191695" cy="54864"/>
+            <a:ext cx="12191695" cy="45720"/>
           </a:xfrm>
           <a:prstGeom prst="rect">
             <a:avLst/>
           </a:prstGeom>
           <a:solidFill>
-            <a:srgbClr val="00C853"/>
+            <a:srgbClr val="D97706"/>
           </a:solidFill>
           <a:ln>
             <a:noFill/>
@@ -4059,56 +4440,20 @@
       </p:sp>
       <p:sp>
         <p:nvSpPr>
-          <p:cNvPr id="3" name="TextBox 2"/>
-          <p:cNvSpPr txBox="1"/>
-          <p:nvPr/>
-        </p:nvSpPr>
-        <p:spPr>
-          <a:xfrm>
-            <a:off x="731520" y="365760"/>
-            <a:ext cx="10515600" cy="822960"/>
-          </a:xfrm>
-          <a:prstGeom prst="rect">
-            <a:avLst/>
-          </a:prstGeom>
-          <a:noFill/>
-        </p:spPr>
-        <p:txBody>
-          <a:bodyPr wrap="square">
-            <a:spAutoFit/>
-          </a:bodyPr>
-          <a:lstStyle/>
-          <a:p>
-            <a:pPr>
-              <a:defRPr sz="3000" b="1">
-                <a:solidFill>
-                  <a:srgbClr val="222222"/>
-                </a:solidFill>
-                <a:latin typeface="Calibri"/>
-              </a:defRPr>
-            </a:pPr>
-            <a:r>
-              <a:t>Using doe info</a:t>
-            </a:r>
-          </a:p>
-        </p:txBody>
-      </p:sp>
-      <p:sp>
-        <p:nvSpPr>
-          <p:cNvPr id="4" name="Rounded Rectangle 3"/>
+          <p:cNvPr id="3" name="Rounded Rectangle 2"/>
           <p:cNvSpPr/>
           <p:nvPr/>
         </p:nvSpPr>
         <p:spPr>
           <a:xfrm>
-            <a:off x="731520" y="1371600"/>
-            <a:ext cx="10515600" cy="4114800"/>
+            <a:off x="548640" y="274320"/>
+            <a:ext cx="2194560" cy="457200"/>
           </a:xfrm>
           <a:prstGeom prst="roundRect">
             <a:avLst/>
           </a:prstGeom>
           <a:solidFill>
-            <a:srgbClr val="2D2D2D"/>
+            <a:srgbClr val="D97706"/>
           </a:solidFill>
           <a:ln>
             <a:noFill/>
@@ -4129,222 +4474,33 @@
           </a:fontRef>
         </p:style>
         <p:txBody>
-          <a:bodyPr rtlCol="0" anchor="ctr" wrap="square" lIns="274320" tIns="274320"/>
+          <a:bodyPr rtlCol="0" anchor="ctr"/>
           <a:lstStyle/>
           <a:p>
             <a:pPr algn="ctr">
-              <a:spcAft>
-                <a:spcPts val="200"/>
-              </a:spcAft>
-              <a:defRPr sz="1800">
-                <a:solidFill>
-                  <a:srgbClr val="D4D4D4"/>
-                </a:solidFill>
-                <a:latin typeface="Consolas"/>
-              </a:defRPr>
-            </a:pPr>
-            <a:r>
-              <a:t>$ doe info my_experiment/</a:t>
-            </a:r>
-          </a:p>
-          <a:p>
-            <a:pPr>
-              <a:spcAft>
-                <a:spcPts val="200"/>
-              </a:spcAft>
-              <a:defRPr sz="1800">
-                <a:solidFill>
-                  <a:srgbClr val="D4D4D4"/>
-                </a:solidFill>
-                <a:latin typeface="Consolas"/>
-              </a:defRPr>
-            </a:pPr>
-          </a:p>
-          <a:p>
-            <a:pPr>
-              <a:spcAft>
-                <a:spcPts val="200"/>
-              </a:spcAft>
-              <a:defRPr sz="1800">
-                <a:solidFill>
-                  <a:srgbClr val="D4D4D4"/>
-                </a:solidFill>
-                <a:latin typeface="Consolas"/>
-              </a:defRPr>
-            </a:pPr>
-            <a:r>
-              <a:t>Design Summary</a:t>
-            </a:r>
-          </a:p>
-          <a:p>
-            <a:pPr>
-              <a:spcAft>
-                <a:spcPts val="200"/>
-              </a:spcAft>
-              <a:defRPr sz="1800">
-                <a:solidFill>
-                  <a:srgbClr val="D4D4D4"/>
-                </a:solidFill>
-                <a:latin typeface="Consolas"/>
-              </a:defRPr>
-            </a:pPr>
-            <a:r>
-              <a:t>  Type:           full_factorial</a:t>
-            </a:r>
-          </a:p>
-          <a:p>
-            <a:pPr>
-              <a:spcAft>
-                <a:spcPts val="200"/>
-              </a:spcAft>
-              <a:defRPr sz="1800">
-                <a:solidFill>
-                  <a:srgbClr val="D4D4D4"/>
-                </a:solidFill>
-                <a:latin typeface="Consolas"/>
-              </a:defRPr>
-            </a:pPr>
-            <a:r>
-              <a:t>  Factors:        3</a:t>
-            </a:r>
-          </a:p>
-          <a:p>
-            <a:pPr>
-              <a:spcAft>
-                <a:spcPts val="200"/>
-              </a:spcAft>
-              <a:defRPr sz="1800">
-                <a:solidFill>
-                  <a:srgbClr val="D4D4D4"/>
-                </a:solidFill>
-                <a:latin typeface="Consolas"/>
-              </a:defRPr>
-            </a:pPr>
-            <a:r>
-              <a:t>  Runs:           11 (8 factorial + 3 center)</a:t>
-            </a:r>
-          </a:p>
-          <a:p>
-            <a:pPr>
-              <a:spcAft>
-                <a:spcPts val="200"/>
-              </a:spcAft>
-              <a:defRPr sz="1800">
-                <a:solidFill>
-                  <a:srgbClr val="D4D4D4"/>
-                </a:solidFill>
-                <a:latin typeface="Consolas"/>
-              </a:defRPr>
-            </a:pPr>
-            <a:r>
-              <a:t>  Replicates:     1</a:t>
-            </a:r>
-          </a:p>
-          <a:p>
-            <a:pPr>
-              <a:spcAft>
-                <a:spcPts val="200"/>
-              </a:spcAft>
-              <a:defRPr sz="1800">
-                <a:solidFill>
-                  <a:srgbClr val="D4D4D4"/>
-                </a:solidFill>
-                <a:latin typeface="Consolas"/>
-              </a:defRPr>
-            </a:pPr>
-            <a:r>
-              <a:t>  Randomized:     yes</a:t>
-            </a:r>
-          </a:p>
-          <a:p>
-            <a:pPr>
-              <a:spcAft>
-                <a:spcPts val="200"/>
-              </a:spcAft>
-              <a:defRPr sz="1800">
-                <a:solidFill>
-                  <a:srgbClr val="D4D4D4"/>
-                </a:solidFill>
-                <a:latin typeface="Consolas"/>
-              </a:defRPr>
-            </a:pPr>
-          </a:p>
-          <a:p>
-            <a:pPr>
-              <a:spcAft>
-                <a:spcPts val="200"/>
-              </a:spcAft>
-              <a:defRPr sz="1800">
-                <a:solidFill>
-                  <a:srgbClr val="D4D4D4"/>
-                </a:solidFill>
-                <a:latin typeface="Consolas"/>
-              </a:defRPr>
-            </a:pPr>
-            <a:r>
-              <a:t>Design Evaluation</a:t>
-            </a:r>
-          </a:p>
-          <a:p>
-            <a:pPr>
-              <a:spcAft>
-                <a:spcPts val="200"/>
-              </a:spcAft>
-              <a:defRPr sz="1800">
-                <a:solidFill>
-                  <a:srgbClr val="D4D4D4"/>
-                </a:solidFill>
-                <a:latin typeface="Consolas"/>
-              </a:defRPr>
-            </a:pPr>
-            <a:r>
-              <a:t>  D-efficiency:   100.0%</a:t>
-            </a:r>
-          </a:p>
-          <a:p>
-            <a:pPr>
-              <a:spcAft>
-                <a:spcPts val="200"/>
-              </a:spcAft>
-              <a:defRPr sz="1800">
-                <a:solidFill>
-                  <a:srgbClr val="D4D4D4"/>
-                </a:solidFill>
-                <a:latin typeface="Consolas"/>
-              </a:defRPr>
-            </a:pPr>
-            <a:r>
-              <a:t>  A-efficiency:   100.0%</a:t>
-            </a:r>
-          </a:p>
-          <a:p>
-            <a:pPr>
-              <a:spcAft>
-                <a:spcPts val="200"/>
-              </a:spcAft>
-              <a:defRPr sz="1800">
-                <a:solidFill>
-                  <a:srgbClr val="D4D4D4"/>
-                </a:solidFill>
-                <a:latin typeface="Consolas"/>
-              </a:defRPr>
-            </a:pPr>
-            <a:r>
-              <a:t>  G-efficiency:   100.0%</a:t>
-            </a:r>
-          </a:p>
-        </p:txBody>
-      </p:sp>
-      <p:sp>
-        <p:nvSpPr>
-          <p:cNvPr id="5" name="TextBox 4"/>
+              <a:defRPr sz="1300" b="1">
+                <a:solidFill>
+                  <a:srgbClr val="FFFFFF"/>
+                </a:solidFill>
+                <a:latin typeface="Consolas"/>
+              </a:defRPr>
+            </a:pPr>
+            <a:r>
+              <a:t>HANDS-ON EXERCISE</a:t>
+            </a:r>
+          </a:p>
+        </p:txBody>
+      </p:sp>
+      <p:sp>
+        <p:nvSpPr>
+          <p:cNvPr id="4" name="TextBox 3"/>
           <p:cNvSpPr txBox="1"/>
           <p:nvPr/>
         </p:nvSpPr>
         <p:spPr>
           <a:xfrm>
-            <a:off x="731520" y="5760720"/>
-            <a:ext cx="10058400" cy="731520"/>
+            <a:off x="3017520" y="274320"/>
+            <a:ext cx="8229600" cy="548640"/>
           </a:xfrm>
           <a:prstGeom prst="rect">
             <a:avLst/>
@@ -4357,62 +4513,36 @@
           </a:bodyPr>
           <a:lstStyle/>
           <a:p>
-            <a:pPr>
-              <a:defRPr sz="1600" i="1">
-                <a:solidFill>
-                  <a:srgbClr val="666666"/>
-                </a:solidFill>
-                <a:latin typeface="Calibri"/>
-              </a:defRPr>
-            </a:pPr>
-            <a:r>
-              <a:t>Use doe info to verify your design before running experiments</a:t>
-            </a:r>
-          </a:p>
-        </p:txBody>
-      </p:sp>
-    </p:spTree>
-  </p:cSld>
-  <p:clrMapOvr>
-    <a:masterClrMapping/>
-  </p:clrMapOvr>
-</p:sld>
-</file>
-
-<file path=ppt/slides/slide13.xml><?xml version="1.0" encoding="utf-8"?>
-<p:sld xmlns:a="http://schemas.openxmlformats.org/drawingml/2006/main" xmlns:p="http://schemas.openxmlformats.org/presentationml/2006/main" xmlns:r="http://schemas.openxmlformats.org/officeDocument/2006/relationships">
-  <p:cSld>
-    <p:bg>
-      <p:bgPr>
-        <a:solidFill>
-          <a:srgbClr val="FFFFFF"/>
-        </a:solidFill>
-        <a:effectLst/>
-      </p:bgPr>
-    </p:bg>
-    <p:spTree>
-      <p:nvGrpSpPr>
-        <p:cNvPr id="1" name=""/>
-        <p:cNvGrpSpPr/>
-        <p:nvPr/>
-      </p:nvGrpSpPr>
-      <p:grpSpPr/>
-      <p:sp>
-        <p:nvSpPr>
-          <p:cNvPr id="2" name="Rectangle 1"/>
+            <a:pPr algn="l">
+              <a:defRPr sz="2600" b="1">
+                <a:solidFill>
+                  <a:srgbClr val="111111"/>
+                </a:solidFill>
+                <a:latin typeface="Inter"/>
+              </a:defRPr>
+            </a:pPr>
+            <a:r>
+              <a:t>Exercise 2: Build a Configuration</a:t>
+            </a:r>
+          </a:p>
+        </p:txBody>
+      </p:sp>
+      <p:sp>
+        <p:nvSpPr>
+          <p:cNvPr id="5" name="Rounded Rectangle 4"/>
           <p:cNvSpPr/>
           <p:nvPr/>
         </p:nvSpPr>
         <p:spPr>
           <a:xfrm>
-            <a:off x="0" y="0"/>
-            <a:ext cx="12191695" cy="54864"/>
-          </a:xfrm>
-          <a:prstGeom prst="rect">
+            <a:off x="548640" y="1005840"/>
+            <a:ext cx="10972800" cy="5120640"/>
+          </a:xfrm>
+          <a:prstGeom prst="roundRect">
             <a:avLst/>
           </a:prstGeom>
           <a:solidFill>
-            <a:srgbClr val="FF8C00"/>
+            <a:srgbClr val="FFFBEB"/>
           </a:solidFill>
           <a:ln>
             <a:noFill/>
@@ -4442,20 +4572,20 @@
       </p:sp>
       <p:sp>
         <p:nvSpPr>
-          <p:cNvPr id="3" name="Rounded Rectangle 2"/>
+          <p:cNvPr id="6" name="Rectangle 5"/>
           <p:cNvSpPr/>
           <p:nvPr/>
         </p:nvSpPr>
         <p:spPr>
           <a:xfrm>
-            <a:off x="731520" y="320040"/>
-            <a:ext cx="2011680" cy="502920"/>
-          </a:xfrm>
-          <a:prstGeom prst="roundRect">
+            <a:off x="548640" y="1005840"/>
+            <a:ext cx="36576" cy="5120640"/>
+          </a:xfrm>
+          <a:prstGeom prst="rect">
             <a:avLst/>
           </a:prstGeom>
           <a:solidFill>
-            <a:srgbClr val="FF8C00"/>
+            <a:srgbClr val="D97706"/>
           </a:solidFill>
           <a:ln>
             <a:noFill/>
@@ -4479,30 +4609,20 @@
           <a:bodyPr rtlCol="0" anchor="ctr"/>
           <a:lstStyle/>
           <a:p>
-            <a:pPr algn="ctr">
-              <a:defRPr sz="1400" b="1">
-                <a:solidFill>
-                  <a:srgbClr val="FFFFFF"/>
-                </a:solidFill>
-                <a:latin typeface="Calibri"/>
-              </a:defRPr>
-            </a:pPr>
-            <a:r>
-              <a:t>HANDS-ON EXERCISE</a:t>
-            </a:r>
-          </a:p>
-        </p:txBody>
-      </p:sp>
-      <p:sp>
-        <p:nvSpPr>
-          <p:cNvPr id="4" name="TextBox 3"/>
+            <a:pPr algn="ctr"/>
+          </a:p>
+        </p:txBody>
+      </p:sp>
+      <p:sp>
+        <p:nvSpPr>
+          <p:cNvPr id="7" name="TextBox 6"/>
           <p:cNvSpPr txBox="1"/>
           <p:nvPr/>
         </p:nvSpPr>
         <p:spPr>
           <a:xfrm>
-            <a:off x="3017520" y="320040"/>
-            <a:ext cx="8229600" cy="731520"/>
+            <a:off x="822960" y="1143000"/>
+            <a:ext cx="10424160" cy="4846320"/>
           </a:xfrm>
           <a:prstGeom prst="rect">
             <a:avLst/>
@@ -4510,35 +4630,195 @@
           <a:noFill/>
         </p:spPr>
         <p:txBody>
-          <a:bodyPr wrap="none">
+          <a:bodyPr wrap="square">
             <a:spAutoFit/>
           </a:bodyPr>
           <a:lstStyle/>
           <a:p>
             <a:pPr>
-              <a:defRPr sz="3000" b="1">
-                <a:solidFill>
-                  <a:srgbClr val="222222"/>
-                </a:solidFill>
-                <a:latin typeface="Calibri"/>
-              </a:defRPr>
-            </a:pPr>
-            <a:r>
-              <a:t>Exercise 2: Build a Configuration</a:t>
-            </a:r>
-          </a:p>
-        </p:txBody>
-      </p:sp>
-      <p:sp>
-        <p:nvSpPr>
-          <p:cNvPr id="5" name="TextBox 4"/>
+              <a:spcAft>
+                <a:spcPts val="500"/>
+              </a:spcAft>
+              <a:defRPr sz="1700">
+                <a:solidFill>
+                  <a:srgbClr val="333333"/>
+                </a:solidFill>
+                <a:latin typeface="Inter"/>
+              </a:defRPr>
+            </a:pPr>
+            <a:r>
+              <a:t>Scenario: optimising a web application's performance.</a:t>
+            </a:r>
+          </a:p>
+          <a:p>
+            <a:pPr>
+              <a:spcAft>
+                <a:spcPts val="500"/>
+              </a:spcAft>
+              <a:defRPr sz="1700">
+                <a:solidFill>
+                  <a:srgbClr val="333333"/>
+                </a:solidFill>
+                <a:latin typeface="Inter"/>
+              </a:defRPr>
+            </a:pPr>
+          </a:p>
+          <a:p>
+            <a:pPr>
+              <a:spcAft>
+                <a:spcPts val="500"/>
+              </a:spcAft>
+              <a:defRPr sz="1700">
+                <a:solidFill>
+                  <a:srgbClr val="333333"/>
+                </a:solidFill>
+                <a:latin typeface="Inter"/>
+              </a:defRPr>
+            </a:pPr>
+            <a:r>
+              <a:t>1. Create a directory:  mkdir webapp_perf</a:t>
+            </a:r>
+          </a:p>
+          <a:p>
+            <a:pPr>
+              <a:spcAft>
+                <a:spcPts val="500"/>
+              </a:spcAft>
+              <a:defRPr sz="1700">
+                <a:solidFill>
+                  <a:srgbClr val="333333"/>
+                </a:solidFill>
+                <a:latin typeface="Inter"/>
+              </a:defRPr>
+            </a:pPr>
+            <a:r>
+              <a:t>2. Create config.json with these factors:</a:t>
+            </a:r>
+          </a:p>
+          <a:p>
+            <a:pPr lvl="1">
+              <a:spcAft>
+                <a:spcPts val="500"/>
+              </a:spcAft>
+              <a:defRPr sz="1500">
+                <a:solidFill>
+                  <a:srgbClr val="666666"/>
+                </a:solidFill>
+                <a:latin typeface="Inter"/>
+              </a:defRPr>
+            </a:pPr>
+            <a:r>
+              <a:t>cache_size: 64–512 MB</a:t>
+            </a:r>
+          </a:p>
+          <a:p>
+            <a:pPr lvl="1">
+              <a:spcAft>
+                <a:spcPts val="500"/>
+              </a:spcAft>
+              <a:defRPr sz="1500">
+                <a:solidFill>
+                  <a:srgbClr val="666666"/>
+                </a:solidFill>
+                <a:latin typeface="Inter"/>
+              </a:defRPr>
+            </a:pPr>
+            <a:r>
+              <a:t>thread_count: 4–32</a:t>
+            </a:r>
+          </a:p>
+          <a:p>
+            <a:pPr lvl="1">
+              <a:spcAft>
+                <a:spcPts val="500"/>
+              </a:spcAft>
+              <a:defRPr sz="1500">
+                <a:solidFill>
+                  <a:srgbClr val="666666"/>
+                </a:solidFill>
+                <a:latin typeface="Inter"/>
+              </a:defRPr>
+            </a:pPr>
+            <a:r>
+              <a:t>compression: categorical [none, gzip, brotli]</a:t>
+            </a:r>
+          </a:p>
+          <a:p>
+            <a:pPr>
+              <a:spcAft>
+                <a:spcPts val="500"/>
+              </a:spcAft>
+              <a:defRPr sz="1700">
+                <a:solidFill>
+                  <a:srgbClr val="333333"/>
+                </a:solidFill>
+                <a:latin typeface="Inter"/>
+              </a:defRPr>
+            </a:pPr>
+            <a:r>
+              <a:t>3. Add responses: response_time_ms (min), throughput_rps (max)</a:t>
+            </a:r>
+          </a:p>
+          <a:p>
+            <a:pPr>
+              <a:spcAft>
+                <a:spcPts val="500"/>
+              </a:spcAft>
+              <a:defRPr sz="1700">
+                <a:solidFill>
+                  <a:srgbClr val="333333"/>
+                </a:solidFill>
+                <a:latin typeface="Inter"/>
+              </a:defRPr>
+            </a:pPr>
+            <a:r>
+              <a:t>4. Set design type to full_factorial</a:t>
+            </a:r>
+          </a:p>
+          <a:p>
+            <a:pPr>
+              <a:spcAft>
+                <a:spcPts val="500"/>
+              </a:spcAft>
+              <a:defRPr sz="1700">
+                <a:solidFill>
+                  <a:srgbClr val="333333"/>
+                </a:solidFill>
+                <a:latin typeface="Inter"/>
+              </a:defRPr>
+            </a:pPr>
+            <a:r>
+              <a:t>5. Run:  doe info webapp_perf/   to verify</a:t>
+            </a:r>
+          </a:p>
+          <a:p>
+            <a:pPr>
+              <a:spcAft>
+                <a:spcPts val="500"/>
+              </a:spcAft>
+              <a:defRPr sz="1700">
+                <a:solidFill>
+                  <a:srgbClr val="333333"/>
+                </a:solidFill>
+                <a:latin typeface="Inter"/>
+              </a:defRPr>
+            </a:pPr>
+            <a:r>
+              <a:t>6. Run:  doe generate webapp_perf/   to see the design matrix</a:t>
+            </a:r>
+          </a:p>
+        </p:txBody>
+      </p:sp>
+      <p:sp>
+        <p:nvSpPr>
+          <p:cNvPr id="8" name="TextBox 7"/>
           <p:cNvSpPr txBox="1"/>
           <p:nvPr/>
         </p:nvSpPr>
         <p:spPr>
           <a:xfrm>
-            <a:off x="914400" y="1371600"/>
-            <a:ext cx="10058400" cy="5029200"/>
+            <a:off x="731520" y="6400800"/>
+            <a:ext cx="10058400" cy="365760"/>
           </a:xfrm>
           <a:prstGeom prst="rect">
             <a:avLst/>
@@ -4551,192 +4831,16 @@
           </a:bodyPr>
           <a:lstStyle/>
           <a:p>
-            <a:pPr>
-              <a:spcAft>
-                <a:spcPts val="600"/>
-              </a:spcAft>
-              <a:defRPr sz="2000">
-                <a:solidFill>
-                  <a:srgbClr val="222222"/>
-                </a:solidFill>
-                <a:latin typeface="Calibri"/>
-              </a:defRPr>
-            </a:pPr>
-            <a:r>
-              <a:t>Scenario: You're optimising a web application's performance.</a:t>
-            </a:r>
-          </a:p>
-          <a:p>
-            <a:pPr>
-              <a:spcAft>
-                <a:spcPts val="600"/>
-              </a:spcAft>
-              <a:defRPr sz="2000">
-                <a:solidFill>
-                  <a:srgbClr val="222222"/>
-                </a:solidFill>
-                <a:latin typeface="Calibri"/>
-              </a:defRPr>
-            </a:pPr>
-          </a:p>
-          <a:p>
-            <a:pPr>
-              <a:spcAft>
-                <a:spcPts val="600"/>
-              </a:spcAft>
-              <a:defRPr sz="2000">
-                <a:solidFill>
-                  <a:srgbClr val="222222"/>
-                </a:solidFill>
-                <a:latin typeface="Calibri"/>
-              </a:defRPr>
-            </a:pPr>
-            <a:r>
-              <a:t>1. Create a directory: mkdir webapp_perf</a:t>
-            </a:r>
-          </a:p>
-          <a:p>
-            <a:pPr>
-              <a:spcAft>
-                <a:spcPts val="600"/>
-              </a:spcAft>
-              <a:defRPr sz="2000">
-                <a:solidFill>
-                  <a:srgbClr val="222222"/>
-                </a:solidFill>
-                <a:latin typeface="Calibri"/>
-              </a:defRPr>
-            </a:pPr>
-            <a:r>
-              <a:t>2. Create config.json with these factors:</a:t>
-            </a:r>
-          </a:p>
-          <a:p>
-            <a:pPr lvl="1">
-              <a:spcAft>
-                <a:spcPts val="600"/>
-              </a:spcAft>
-              <a:defRPr sz="1800">
-                <a:solidFill>
-                  <a:srgbClr val="222222"/>
-                </a:solidFill>
-                <a:latin typeface="Calibri"/>
-              </a:defRPr>
-            </a:pPr>
-            <a:r>
-              <a:t>cache_size: 64 to 512 (MB)</a:t>
-            </a:r>
-          </a:p>
-          <a:p>
-            <a:pPr lvl="1">
-              <a:spcAft>
-                <a:spcPts val="600"/>
-              </a:spcAft>
-              <a:defRPr sz="1800">
-                <a:solidFill>
-                  <a:srgbClr val="222222"/>
-                </a:solidFill>
-                <a:latin typeface="Calibri"/>
-              </a:defRPr>
-            </a:pPr>
-            <a:r>
-              <a:t>thread_count: 4 to 32</a:t>
-            </a:r>
-          </a:p>
-          <a:p>
-            <a:pPr lvl="1">
-              <a:spcAft>
-                <a:spcPts val="600"/>
-              </a:spcAft>
-              <a:defRPr sz="1800">
-                <a:solidFill>
-                  <a:srgbClr val="222222"/>
-                </a:solidFill>
-                <a:latin typeface="Calibri"/>
-              </a:defRPr>
-            </a:pPr>
-            <a:r>
-              <a:t>compression: categorical ["none", "gzip", "brotli"]</a:t>
-            </a:r>
-          </a:p>
-          <a:p>
-            <a:pPr>
-              <a:spcAft>
-                <a:spcPts val="600"/>
-              </a:spcAft>
-              <a:defRPr sz="2000">
-                <a:solidFill>
-                  <a:srgbClr val="222222"/>
-                </a:solidFill>
-                <a:latin typeface="Calibri"/>
-              </a:defRPr>
-            </a:pPr>
-            <a:r>
-              <a:t>3. Add two responses:</a:t>
-            </a:r>
-          </a:p>
-          <a:p>
-            <a:pPr lvl="1">
-              <a:spcAft>
-                <a:spcPts val="600"/>
-              </a:spcAft>
-              <a:defRPr sz="1800">
-                <a:solidFill>
-                  <a:srgbClr val="222222"/>
-                </a:solidFill>
-                <a:latin typeface="Calibri"/>
-              </a:defRPr>
-            </a:pPr>
-            <a:r>
-              <a:t>response_time_ms (minimize) and throughput_rps (maximize)</a:t>
-            </a:r>
-          </a:p>
-          <a:p>
-            <a:pPr>
-              <a:spcAft>
-                <a:spcPts val="600"/>
-              </a:spcAft>
-              <a:defRPr sz="2000">
-                <a:solidFill>
-                  <a:srgbClr val="222222"/>
-                </a:solidFill>
-                <a:latin typeface="Calibri"/>
-              </a:defRPr>
-            </a:pPr>
-            <a:r>
-              <a:t>4. Set the design type to full_factorial</a:t>
-            </a:r>
-          </a:p>
-          <a:p>
-            <a:pPr>
-              <a:spcAft>
-                <a:spcPts val="600"/>
-              </a:spcAft>
-              <a:defRPr sz="2000">
-                <a:solidFill>
-                  <a:srgbClr val="222222"/>
-                </a:solidFill>
-                <a:latin typeface="Calibri"/>
-              </a:defRPr>
-            </a:pPr>
-            <a:r>
-              <a:t>5. Run: doe info webapp_perf/  to verify your configuration</a:t>
-            </a:r>
-          </a:p>
-          <a:p>
-            <a:pPr>
-              <a:spcAft>
-                <a:spcPts val="600"/>
-              </a:spcAft>
-              <a:defRPr sz="2000">
-                <a:solidFill>
-                  <a:srgbClr val="222222"/>
-                </a:solidFill>
-                <a:latin typeface="Calibri"/>
-              </a:defRPr>
-            </a:pPr>
-            <a:r>
-              <a:t>6. Run: doe generate webapp_perf/  to see the design matrix</a:t>
+            <a:pPr algn="l">
+              <a:defRPr sz="1000" b="0">
+                <a:solidFill>
+                  <a:srgbClr val="999999"/>
+                </a:solidFill>
+                <a:latin typeface="Consolas"/>
+              </a:defRPr>
+            </a:pPr>
+            <a:r>
+              <a:t>© 2026 Martin J. Gallagher  |  GPL-3.0-or-later  |  doehelper.com</a:t>
             </a:r>
           </a:p>
         </p:txBody>
@@ -4755,7 +4859,7 @@
     <p:bg>
       <p:bgPr>
         <a:solidFill>
-          <a:srgbClr val="FFFFFF"/>
+          <a:srgbClr val="FAFAFA"/>
         </a:solidFill>
         <a:effectLst/>
       </p:bgPr>
@@ -4776,13 +4880,13 @@
         <p:spPr>
           <a:xfrm>
             <a:off x="0" y="0"/>
-            <a:ext cx="12191695" cy="54864"/>
+            <a:ext cx="12191695" cy="45720"/>
           </a:xfrm>
           <a:prstGeom prst="rect">
             <a:avLst/>
           </a:prstGeom>
           <a:solidFill>
-            <a:srgbClr val="007BFF"/>
+            <a:srgbClr val="5046E5"/>
           </a:solidFill>
           <a:ln>
             <a:noFill/>
@@ -4812,14 +4916,57 @@
       </p:sp>
       <p:sp>
         <p:nvSpPr>
-          <p:cNvPr id="3" name="TextBox 2"/>
+          <p:cNvPr id="3" name="Rectangle 2"/>
+          <p:cNvSpPr/>
+          <p:nvPr/>
+        </p:nvSpPr>
+        <p:spPr>
+          <a:xfrm>
+            <a:off x="548640" y="411480"/>
+            <a:ext cx="36576" cy="502920"/>
+          </a:xfrm>
+          <a:prstGeom prst="rect">
+            <a:avLst/>
+          </a:prstGeom>
+          <a:solidFill>
+            <a:srgbClr val="5046E5"/>
+          </a:solidFill>
+          <a:ln>
+            <a:noFill/>
+          </a:ln>
+        </p:spPr>
+        <p:style>
+          <a:lnRef idx="1">
+            <a:schemeClr val="accent1"/>
+          </a:lnRef>
+          <a:fillRef idx="3">
+            <a:schemeClr val="accent1"/>
+          </a:fillRef>
+          <a:effectRef idx="2">
+            <a:schemeClr val="accent1"/>
+          </a:effectRef>
+          <a:fontRef idx="minor">
+            <a:schemeClr val="lt1"/>
+          </a:fontRef>
+        </p:style>
+        <p:txBody>
+          <a:bodyPr rtlCol="0" anchor="ctr"/>
+          <a:lstStyle/>
+          <a:p>
+            <a:pPr algn="ctr"/>
+          </a:p>
+        </p:txBody>
+      </p:sp>
+      <p:sp>
+        <p:nvSpPr>
+          <p:cNvPr id="4" name="TextBox 3"/>
           <p:cNvSpPr txBox="1"/>
           <p:nvPr/>
         </p:nvSpPr>
         <p:spPr>
           <a:xfrm>
-            <a:off x="731520" y="365760"/>
-            <a:ext cx="10515600" cy="822960"/>
+            <a:off x="777240" y="365760"/>
+            <a:ext cx="10058400" cy="640080"/>
           </a:xfrm>
           <a:prstGeom prst="rect">
             <a:avLst/>
@@ -4832,12 +4979,12 @@
           </a:bodyPr>
           <a:lstStyle/>
           <a:p>
-            <a:pPr>
-              <a:defRPr sz="3200" b="1">
-                <a:solidFill>
-                  <a:srgbClr val="222222"/>
-                </a:solidFill>
-                <a:latin typeface="Calibri"/>
+            <a:pPr algn="l">
+              <a:defRPr sz="2800" b="1">
+                <a:solidFill>
+                  <a:srgbClr val="111111"/>
+                </a:solidFill>
+                <a:latin typeface="Inter"/>
               </a:defRPr>
             </a:pPr>
             <a:r>
@@ -4848,14 +4995,14 @@
       </p:sp>
       <p:sp>
         <p:nvSpPr>
-          <p:cNvPr id="4" name="TextBox 3"/>
+          <p:cNvPr id="5" name="TextBox 4"/>
           <p:cNvSpPr txBox="1"/>
           <p:nvPr/>
         </p:nvSpPr>
         <p:spPr>
           <a:xfrm>
-            <a:off x="914400" y="1463040"/>
-            <a:ext cx="10058400" cy="4754880"/>
+            <a:off x="822960" y="1188720"/>
+            <a:ext cx="10241280" cy="5120640"/>
           </a:xfrm>
           <a:prstGeom prst="rect">
             <a:avLst/>
@@ -4870,13 +5017,13 @@
           <a:p>
             <a:pPr>
               <a:spcAft>
-                <a:spcPts val="800"/>
-              </a:spcAft>
-              <a:defRPr sz="2200" b="0">
-                <a:solidFill>
-                  <a:srgbClr val="222222"/>
-                </a:solidFill>
-                <a:latin typeface="Calibri"/>
+                <a:spcPts val="600"/>
+              </a:spcAft>
+              <a:defRPr sz="1900">
+                <a:solidFill>
+                  <a:srgbClr val="333333"/>
+                </a:solidFill>
+                <a:latin typeface="Inter"/>
               </a:defRPr>
             </a:pPr>
             <a:r>
@@ -4886,13 +5033,13 @@
           <a:p>
             <a:pPr>
               <a:spcAft>
-                <a:spcPts val="800"/>
-              </a:spcAft>
-              <a:defRPr sz="2200" b="0">
-                <a:solidFill>
-                  <a:srgbClr val="222222"/>
-                </a:solidFill>
-                <a:latin typeface="Calibri"/>
+                <a:spcPts val="600"/>
+              </a:spcAft>
+              <a:defRPr sz="1900">
+                <a:solidFill>
+                  <a:srgbClr val="333333"/>
+                </a:solidFill>
+                <a:latin typeface="Inter"/>
               </a:defRPr>
             </a:pPr>
             <a:r>
@@ -4902,13 +5049,13 @@
           <a:p>
             <a:pPr>
               <a:spcAft>
-                <a:spcPts val="800"/>
-              </a:spcAft>
-              <a:defRPr sz="2200" b="0">
-                <a:solidFill>
-                  <a:srgbClr val="222222"/>
-                </a:solidFill>
-                <a:latin typeface="Calibri"/>
+                <a:spcPts val="600"/>
+              </a:spcAft>
+              <a:defRPr sz="1900">
+                <a:solidFill>
+                  <a:srgbClr val="333333"/>
+                </a:solidFill>
+                <a:latin typeface="Inter"/>
               </a:defRPr>
             </a:pPr>
             <a:r>
@@ -4918,13 +5065,13 @@
           <a:p>
             <a:pPr>
               <a:spcAft>
-                <a:spcPts val="800"/>
-              </a:spcAft>
-              <a:defRPr sz="2200" b="0">
-                <a:solidFill>
-                  <a:srgbClr val="222222"/>
-                </a:solidFill>
-                <a:latin typeface="Calibri"/>
+                <a:spcPts val="600"/>
+              </a:spcAft>
+              <a:defRPr sz="1900">
+                <a:solidFill>
+                  <a:srgbClr val="333333"/>
+                </a:solidFill>
+                <a:latin typeface="Inter"/>
               </a:defRPr>
             </a:pPr>
             <a:r>
@@ -4934,13 +5081,13 @@
           <a:p>
             <a:pPr>
               <a:spcAft>
-                <a:spcPts val="800"/>
-              </a:spcAft>
-              <a:defRPr sz="2200" b="0">
-                <a:solidFill>
-                  <a:srgbClr val="222222"/>
-                </a:solidFill>
-                <a:latin typeface="Calibri"/>
+                <a:spcPts val="600"/>
+              </a:spcAft>
+              <a:defRPr sz="1900">
+                <a:solidFill>
+                  <a:srgbClr val="333333"/>
+                </a:solidFill>
+                <a:latin typeface="Inter"/>
               </a:defRPr>
             </a:pPr>
             <a:r>
@@ -4950,17 +5097,53 @@
           <a:p>
             <a:pPr>
               <a:spcAft>
-                <a:spcPts val="800"/>
-              </a:spcAft>
-              <a:defRPr sz="2200" b="0">
-                <a:solidFill>
-                  <a:srgbClr val="222222"/>
-                </a:solidFill>
-                <a:latin typeface="Calibri"/>
+                <a:spcPts val="600"/>
+              </a:spcAft>
+              <a:defRPr sz="1900">
+                <a:solidFill>
+                  <a:srgbClr val="333333"/>
+                </a:solidFill>
+                <a:latin typeface="Inter"/>
               </a:defRPr>
             </a:pPr>
             <a:r>
               <a:t>Use doe init with built-in templates</a:t>
+            </a:r>
+          </a:p>
+        </p:txBody>
+      </p:sp>
+      <p:sp>
+        <p:nvSpPr>
+          <p:cNvPr id="6" name="TextBox 5"/>
+          <p:cNvSpPr txBox="1"/>
+          <p:nvPr/>
+        </p:nvSpPr>
+        <p:spPr>
+          <a:xfrm>
+            <a:off x="731520" y="6400800"/>
+            <a:ext cx="10058400" cy="365760"/>
+          </a:xfrm>
+          <a:prstGeom prst="rect">
+            <a:avLst/>
+          </a:prstGeom>
+          <a:noFill/>
+        </p:spPr>
+        <p:txBody>
+          <a:bodyPr wrap="square">
+            <a:spAutoFit/>
+          </a:bodyPr>
+          <a:lstStyle/>
+          <a:p>
+            <a:pPr algn="l">
+              <a:defRPr sz="1000" b="0">
+                <a:solidFill>
+                  <a:srgbClr val="999999"/>
+                </a:solidFill>
+                <a:latin typeface="Consolas"/>
+              </a:defRPr>
+            </a:pPr>
+            <a:r>
+              <a:t>© 2026 Martin J. Gallagher  |  GPL-3.0-or-later  |  doehelper.com</a:t>
             </a:r>
           </a:p>
         </p:txBody>
@@ -4979,7 +5162,7 @@
     <p:bg>
       <p:bgPr>
         <a:solidFill>
-          <a:srgbClr val="FFFFFF"/>
+          <a:srgbClr val="FAFAFA"/>
         </a:solidFill>
         <a:effectLst/>
       </p:bgPr>
@@ -5000,13 +5183,13 @@
         <p:spPr>
           <a:xfrm>
             <a:off x="0" y="0"/>
-            <a:ext cx="12191695" cy="54864"/>
+            <a:ext cx="12191695" cy="45720"/>
           </a:xfrm>
           <a:prstGeom prst="rect">
             <a:avLst/>
           </a:prstGeom>
           <a:solidFill>
-            <a:srgbClr val="00C853"/>
+            <a:srgbClr val="0D9488"/>
           </a:solidFill>
           <a:ln>
             <a:noFill/>
@@ -5042,8 +5225,8 @@
         </p:nvSpPr>
         <p:spPr>
           <a:xfrm>
-            <a:off x="731520" y="365760"/>
-            <a:ext cx="10515600" cy="822960"/>
+            <a:off x="777240" y="320040"/>
+            <a:ext cx="10058400" cy="548640"/>
           </a:xfrm>
           <a:prstGeom prst="rect">
             <a:avLst/>
@@ -5056,12 +5239,12 @@
           </a:bodyPr>
           <a:lstStyle/>
           <a:p>
-            <a:pPr>
-              <a:defRPr sz="3000" b="1">
-                <a:solidFill>
-                  <a:srgbClr val="222222"/>
-                </a:solidFill>
-                <a:latin typeface="Calibri"/>
+            <a:pPr algn="l">
+              <a:defRPr sz="2600" b="1">
+                <a:solidFill>
+                  <a:srgbClr val="111111"/>
+                </a:solidFill>
+                <a:latin typeface="Inter"/>
               </a:defRPr>
             </a:pPr>
             <a:r>
@@ -5072,20 +5255,20 @@
       </p:sp>
       <p:sp>
         <p:nvSpPr>
-          <p:cNvPr id="4" name="Rounded Rectangle 3"/>
+          <p:cNvPr id="4" name="Rectangle 3"/>
           <p:cNvSpPr/>
           <p:nvPr/>
         </p:nvSpPr>
         <p:spPr>
           <a:xfrm>
-            <a:off x="731520" y="1371600"/>
-            <a:ext cx="10515600" cy="4114800"/>
-          </a:xfrm>
-          <a:prstGeom prst="roundRect">
+            <a:off x="548640" y="1051560"/>
+            <a:ext cx="10972800" cy="320040"/>
+          </a:xfrm>
+          <a:prstGeom prst="rect">
             <a:avLst/>
           </a:prstGeom>
           <a:solidFill>
-            <a:srgbClr val="2D2D2D"/>
+            <a:srgbClr val="222222"/>
           </a:solidFill>
           <a:ln>
             <a:noFill/>
@@ -5106,16 +5289,95 @@
           </a:fontRef>
         </p:style>
         <p:txBody>
-          <a:bodyPr rtlCol="0" anchor="ctr" wrap="square" lIns="274320" tIns="274320"/>
+          <a:bodyPr rtlCol="0" anchor="ctr"/>
+          <a:lstStyle/>
+          <a:p>
+            <a:pPr algn="ctr"/>
+          </a:p>
+        </p:txBody>
+      </p:sp>
+      <p:sp>
+        <p:nvSpPr>
+          <p:cNvPr id="5" name="TextBox 4"/>
+          <p:cNvSpPr txBox="1"/>
+          <p:nvPr/>
+        </p:nvSpPr>
+        <p:spPr>
+          <a:xfrm>
+            <a:off x="822960" y="1051560"/>
+            <a:ext cx="3657600" cy="320040"/>
+          </a:xfrm>
+          <a:prstGeom prst="rect">
+            <a:avLst/>
+          </a:prstGeom>
+          <a:noFill/>
+        </p:spPr>
+        <p:txBody>
+          <a:bodyPr wrap="square" anchor="ctr">
+            <a:spAutoFit/>
+          </a:bodyPr>
+          <a:lstStyle/>
+          <a:p>
+            <a:pPr algn="l">
+              <a:defRPr sz="1000" b="0">
+                <a:solidFill>
+                  <a:srgbClr val="999999"/>
+                </a:solidFill>
+                <a:latin typeface="Consolas"/>
+              </a:defRPr>
+            </a:pPr>
+            <a:r>
+              <a:t>terminal</a:t>
+            </a:r>
+          </a:p>
+        </p:txBody>
+      </p:sp>
+      <p:sp>
+        <p:nvSpPr>
+          <p:cNvPr id="6" name="Rounded Rectangle 5"/>
+          <p:cNvSpPr/>
+          <p:nvPr/>
+        </p:nvSpPr>
+        <p:spPr>
+          <a:xfrm>
+            <a:off x="548640" y="1371600"/>
+            <a:ext cx="10972800" cy="4389120"/>
+          </a:xfrm>
+          <a:prstGeom prst="roundRect">
+            <a:avLst/>
+          </a:prstGeom>
+          <a:solidFill>
+            <a:srgbClr val="1A1A1A"/>
+          </a:solidFill>
+          <a:ln>
+            <a:noFill/>
+          </a:ln>
+        </p:spPr>
+        <p:style>
+          <a:lnRef idx="1">
+            <a:schemeClr val="accent1"/>
+          </a:lnRef>
+          <a:fillRef idx="3">
+            <a:schemeClr val="accent1"/>
+          </a:fillRef>
+          <a:effectRef idx="2">
+            <a:schemeClr val="accent1"/>
+          </a:effectRef>
+          <a:fontRef idx="minor">
+            <a:schemeClr val="lt1"/>
+          </a:fontRef>
+        </p:style>
+        <p:txBody>
+          <a:bodyPr rtlCol="0" anchor="ctr" wrap="square" lIns="274320" tIns="182880" rIns="274320"/>
           <a:lstStyle/>
           <a:p>
             <a:pPr algn="ctr">
               <a:spcAft>
-                <a:spcPts val="200"/>
-              </a:spcAft>
-              <a:defRPr sz="1800">
-                <a:solidFill>
-                  <a:srgbClr val="D4D4D4"/>
+                <a:spcPts val="100"/>
+              </a:spcAft>
+              <a:defRPr sz="1500">
+                <a:solidFill>
+                  <a:srgbClr val="555555"/>
                 </a:solidFill>
                 <a:latin typeface="Consolas"/>
               </a:defRPr>
@@ -5127,11 +5389,11 @@
           <a:p>
             <a:pPr>
               <a:spcAft>
-                <a:spcPts val="200"/>
-              </a:spcAft>
-              <a:defRPr sz="1800">
-                <a:solidFill>
-                  <a:srgbClr val="D4D4D4"/>
+                <a:spcPts val="100"/>
+              </a:spcAft>
+              <a:defRPr sz="1500">
+                <a:solidFill>
+                  <a:srgbClr val="6EC86E"/>
                 </a:solidFill>
                 <a:latin typeface="Consolas"/>
               </a:defRPr>
@@ -5143,24 +5405,24 @@
           <a:p>
             <a:pPr>
               <a:spcAft>
-                <a:spcPts val="200"/>
-              </a:spcAft>
-              <a:defRPr sz="1800">
-                <a:solidFill>
-                  <a:srgbClr val="D4D4D4"/>
-                </a:solidFill>
-                <a:latin typeface="Consolas"/>
-              </a:defRPr>
-            </a:pPr>
-          </a:p>
-          <a:p>
-            <a:pPr>
-              <a:spcAft>
-                <a:spcPts val="200"/>
-              </a:spcAft>
-              <a:defRPr sz="1800">
-                <a:solidFill>
-                  <a:srgbClr val="D4D4D4"/>
+                <a:spcPts val="100"/>
+              </a:spcAft>
+              <a:defRPr sz="1500">
+                <a:solidFill>
+                  <a:srgbClr val="CCCCCC"/>
+                </a:solidFill>
+                <a:latin typeface="Consolas"/>
+              </a:defRPr>
+            </a:pPr>
+          </a:p>
+          <a:p>
+            <a:pPr>
+              <a:spcAft>
+                <a:spcPts val="100"/>
+              </a:spcAft>
+              <a:defRPr sz="1500">
+                <a:solidFill>
+                  <a:srgbClr val="555555"/>
                 </a:solidFill>
                 <a:latin typeface="Consolas"/>
               </a:defRPr>
@@ -5172,11 +5434,11 @@
           <a:p>
             <a:pPr>
               <a:spcAft>
-                <a:spcPts val="200"/>
-              </a:spcAft>
-              <a:defRPr sz="1800">
-                <a:solidFill>
-                  <a:srgbClr val="D4D4D4"/>
+                <a:spcPts val="100"/>
+              </a:spcAft>
+              <a:defRPr sz="1500">
+                <a:solidFill>
+                  <a:srgbClr val="6EC86E"/>
                 </a:solidFill>
                 <a:latin typeface="Consolas"/>
               </a:defRPr>
@@ -5188,24 +5450,24 @@
           <a:p>
             <a:pPr>
               <a:spcAft>
-                <a:spcPts val="200"/>
-              </a:spcAft>
-              <a:defRPr sz="1800">
-                <a:solidFill>
-                  <a:srgbClr val="D4D4D4"/>
-                </a:solidFill>
-                <a:latin typeface="Consolas"/>
-              </a:defRPr>
-            </a:pPr>
-          </a:p>
-          <a:p>
-            <a:pPr>
-              <a:spcAft>
-                <a:spcPts val="200"/>
-              </a:spcAft>
-              <a:defRPr sz="1800">
-                <a:solidFill>
-                  <a:srgbClr val="D4D4D4"/>
+                <a:spcPts val="100"/>
+              </a:spcAft>
+              <a:defRPr sz="1500">
+                <a:solidFill>
+                  <a:srgbClr val="CCCCCC"/>
+                </a:solidFill>
+                <a:latin typeface="Consolas"/>
+              </a:defRPr>
+            </a:pPr>
+          </a:p>
+          <a:p>
+            <a:pPr>
+              <a:spcAft>
+                <a:spcPts val="100"/>
+              </a:spcAft>
+              <a:defRPr sz="1500">
+                <a:solidFill>
+                  <a:srgbClr val="555555"/>
                 </a:solidFill>
                 <a:latin typeface="Consolas"/>
               </a:defRPr>
@@ -5217,11 +5479,11 @@
           <a:p>
             <a:pPr>
               <a:spcAft>
-                <a:spcPts val="200"/>
-              </a:spcAft>
-              <a:defRPr sz="1800">
-                <a:solidFill>
-                  <a:srgbClr val="D4D4D4"/>
+                <a:spcPts val="100"/>
+              </a:spcAft>
+              <a:defRPr sz="1500">
+                <a:solidFill>
+                  <a:srgbClr val="6EC86E"/>
                 </a:solidFill>
                 <a:latin typeface="Consolas"/>
               </a:defRPr>
@@ -5233,11 +5495,11 @@
           <a:p>
             <a:pPr>
               <a:spcAft>
-                <a:spcPts val="200"/>
-              </a:spcAft>
-              <a:defRPr sz="1800">
-                <a:solidFill>
-                  <a:srgbClr val="D4D4D4"/>
+                <a:spcPts val="100"/>
+              </a:spcAft>
+              <a:defRPr sz="1500">
+                <a:solidFill>
+                  <a:srgbClr val="CCCCCC"/>
                 </a:solidFill>
                 <a:latin typeface="Consolas"/>
               </a:defRPr>
@@ -5249,78 +5511,98 @@
           <a:p>
             <a:pPr>
               <a:spcAft>
-                <a:spcPts val="200"/>
-              </a:spcAft>
-              <a:defRPr sz="1800">
-                <a:solidFill>
-                  <a:srgbClr val="D4D4D4"/>
-                </a:solidFill>
-                <a:latin typeface="Consolas"/>
-              </a:defRPr>
-            </a:pPr>
-          </a:p>
-          <a:p>
-            <a:pPr>
-              <a:spcAft>
-                <a:spcPts val="200"/>
-              </a:spcAft>
-              <a:defRPr sz="1800">
-                <a:solidFill>
-                  <a:srgbClr val="D4D4D4"/>
-                </a:solidFill>
-                <a:latin typeface="Consolas"/>
-              </a:defRPr>
-            </a:pPr>
-            <a:r>
-              <a:t># System requirements:</a:t>
-            </a:r>
-          </a:p>
-          <a:p>
-            <a:pPr>
-              <a:spcAft>
-                <a:spcPts val="200"/>
-              </a:spcAft>
-              <a:defRPr sz="1800">
-                <a:solidFill>
-                  <a:srgbClr val="D4D4D4"/>
-                </a:solidFill>
-                <a:latin typeface="Consolas"/>
-              </a:defRPr>
-            </a:pPr>
-            <a:r>
-              <a:t>#   Python 3.10+</a:t>
-            </a:r>
-          </a:p>
-          <a:p>
-            <a:pPr>
-              <a:spcAft>
-                <a:spcPts val="200"/>
-              </a:spcAft>
-              <a:defRPr sz="1800">
-                <a:solidFill>
-                  <a:srgbClr val="D4D4D4"/>
-                </a:solidFill>
-                <a:latin typeface="Consolas"/>
-              </a:defRPr>
-            </a:pPr>
-            <a:r>
-              <a:t>#   Works on Linux, macOS, Windows</a:t>
-            </a:r>
-          </a:p>
-          <a:p>
-            <a:pPr>
-              <a:spcAft>
-                <a:spcPts val="200"/>
-              </a:spcAft>
-              <a:defRPr sz="1800">
-                <a:solidFill>
-                  <a:srgbClr val="D4D4D4"/>
-                </a:solidFill>
-                <a:latin typeface="Consolas"/>
-              </a:defRPr>
-            </a:pPr>
-            <a:r>
-              <a:t>#   Dependencies: numpy, pandas, scipy, matplotlib, pyDOE3, Jinja2</a:t>
+                <a:spcPts val="100"/>
+              </a:spcAft>
+              <a:defRPr sz="1500">
+                <a:solidFill>
+                  <a:srgbClr val="CCCCCC"/>
+                </a:solidFill>
+                <a:latin typeface="Consolas"/>
+              </a:defRPr>
+            </a:pPr>
+          </a:p>
+          <a:p>
+            <a:pPr>
+              <a:spcAft>
+                <a:spcPts val="100"/>
+              </a:spcAft>
+              <a:defRPr sz="1500">
+                <a:solidFill>
+                  <a:srgbClr val="555555"/>
+                </a:solidFill>
+                <a:latin typeface="Consolas"/>
+              </a:defRPr>
+            </a:pPr>
+            <a:r>
+              <a:t># Requirements: Python 3.10+</a:t>
+            </a:r>
+          </a:p>
+          <a:p>
+            <a:pPr>
+              <a:spcAft>
+                <a:spcPts val="100"/>
+              </a:spcAft>
+              <a:defRPr sz="1500">
+                <a:solidFill>
+                  <a:srgbClr val="555555"/>
+                </a:solidFill>
+                <a:latin typeface="Consolas"/>
+              </a:defRPr>
+            </a:pPr>
+            <a:r>
+              <a:t># Works on Linux, macOS, Windows</a:t>
+            </a:r>
+          </a:p>
+          <a:p>
+            <a:pPr>
+              <a:spcAft>
+                <a:spcPts val="100"/>
+              </a:spcAft>
+              <a:defRPr sz="1500">
+                <a:solidFill>
+                  <a:srgbClr val="555555"/>
+                </a:solidFill>
+                <a:latin typeface="Consolas"/>
+              </a:defRPr>
+            </a:pPr>
+            <a:r>
+              <a:t># Deps: numpy, pandas, scipy, matplotlib, pyDOE3, Jinja2</a:t>
+            </a:r>
+          </a:p>
+        </p:txBody>
+      </p:sp>
+      <p:sp>
+        <p:nvSpPr>
+          <p:cNvPr id="7" name="TextBox 6"/>
+          <p:cNvSpPr txBox="1"/>
+          <p:nvPr/>
+        </p:nvSpPr>
+        <p:spPr>
+          <a:xfrm>
+            <a:off x="731520" y="6400800"/>
+            <a:ext cx="10058400" cy="365760"/>
+          </a:xfrm>
+          <a:prstGeom prst="rect">
+            <a:avLst/>
+          </a:prstGeom>
+          <a:noFill/>
+        </p:spPr>
+        <p:txBody>
+          <a:bodyPr wrap="square">
+            <a:spAutoFit/>
+          </a:bodyPr>
+          <a:lstStyle/>
+          <a:p>
+            <a:pPr algn="l">
+              <a:defRPr sz="1000" b="0">
+                <a:solidFill>
+                  <a:srgbClr val="999999"/>
+                </a:solidFill>
+                <a:latin typeface="Consolas"/>
+              </a:defRPr>
+            </a:pPr>
+            <a:r>
+              <a:t>© 2026 Martin J. Gallagher  |  GPL-3.0-or-later  |  doehelper.com</a:t>
             </a:r>
           </a:p>
         </p:txBody>
@@ -5339,7 +5621,7 @@
     <p:bg>
       <p:bgPr>
         <a:solidFill>
-          <a:srgbClr val="FFFFFF"/>
+          <a:srgbClr val="FAFAFA"/>
         </a:solidFill>
         <a:effectLst/>
       </p:bgPr>
@@ -5360,13 +5642,13 @@
         <p:spPr>
           <a:xfrm>
             <a:off x="0" y="0"/>
-            <a:ext cx="12191695" cy="54864"/>
+            <a:ext cx="12191695" cy="45720"/>
           </a:xfrm>
           <a:prstGeom prst="rect">
             <a:avLst/>
           </a:prstGeom>
           <a:solidFill>
-            <a:srgbClr val="00C853"/>
+            <a:srgbClr val="0D9488"/>
           </a:solidFill>
           <a:ln>
             <a:noFill/>
@@ -5402,8 +5684,8 @@
         </p:nvSpPr>
         <p:spPr>
           <a:xfrm>
-            <a:off x="731520" y="365760"/>
-            <a:ext cx="10515600" cy="822960"/>
+            <a:off x="777240" y="320040"/>
+            <a:ext cx="10058400" cy="548640"/>
           </a:xfrm>
           <a:prstGeom prst="rect">
             <a:avLst/>
@@ -5416,12 +5698,12 @@
           </a:bodyPr>
           <a:lstStyle/>
           <a:p>
-            <a:pPr>
-              <a:defRPr sz="3000" b="1">
-                <a:solidFill>
-                  <a:srgbClr val="222222"/>
-                </a:solidFill>
-                <a:latin typeface="Calibri"/>
+            <a:pPr algn="l">
+              <a:defRPr sz="2600" b="1">
+                <a:solidFill>
+                  <a:srgbClr val="111111"/>
+                </a:solidFill>
+                <a:latin typeface="Inter"/>
               </a:defRPr>
             </a:pPr>
             <a:r>
@@ -5432,20 +5714,20 @@
       </p:sp>
       <p:sp>
         <p:nvSpPr>
-          <p:cNvPr id="4" name="Rounded Rectangle 3"/>
+          <p:cNvPr id="4" name="Rectangle 3"/>
           <p:cNvSpPr/>
           <p:nvPr/>
         </p:nvSpPr>
         <p:spPr>
           <a:xfrm>
-            <a:off x="731520" y="1371600"/>
-            <a:ext cx="10515600" cy="4114800"/>
-          </a:xfrm>
-          <a:prstGeom prst="roundRect">
+            <a:off x="548640" y="1051560"/>
+            <a:ext cx="10972800" cy="320040"/>
+          </a:xfrm>
+          <a:prstGeom prst="rect">
             <a:avLst/>
           </a:prstGeom>
           <a:solidFill>
-            <a:srgbClr val="2D2D2D"/>
+            <a:srgbClr val="222222"/>
           </a:solidFill>
           <a:ln>
             <a:noFill/>
@@ -5466,16 +5748,95 @@
           </a:fontRef>
         </p:style>
         <p:txBody>
-          <a:bodyPr rtlCol="0" anchor="ctr" wrap="square" lIns="274320" tIns="274320"/>
+          <a:bodyPr rtlCol="0" anchor="ctr"/>
+          <a:lstStyle/>
+          <a:p>
+            <a:pPr algn="ctr"/>
+          </a:p>
+        </p:txBody>
+      </p:sp>
+      <p:sp>
+        <p:nvSpPr>
+          <p:cNvPr id="5" name="TextBox 4"/>
+          <p:cNvSpPr txBox="1"/>
+          <p:nvPr/>
+        </p:nvSpPr>
+        <p:spPr>
+          <a:xfrm>
+            <a:off x="822960" y="1051560"/>
+            <a:ext cx="3657600" cy="320040"/>
+          </a:xfrm>
+          <a:prstGeom prst="rect">
+            <a:avLst/>
+          </a:prstGeom>
+          <a:noFill/>
+        </p:spPr>
+        <p:txBody>
+          <a:bodyPr wrap="square" anchor="ctr">
+            <a:spAutoFit/>
+          </a:bodyPr>
+          <a:lstStyle/>
+          <a:p>
+            <a:pPr algn="l">
+              <a:defRPr sz="1000" b="0">
+                <a:solidFill>
+                  <a:srgbClr val="999999"/>
+                </a:solidFill>
+                <a:latin typeface="Consolas"/>
+              </a:defRPr>
+            </a:pPr>
+            <a:r>
+              <a:t>terminal</a:t>
+            </a:r>
+          </a:p>
+        </p:txBody>
+      </p:sp>
+      <p:sp>
+        <p:nvSpPr>
+          <p:cNvPr id="6" name="Rounded Rectangle 5"/>
+          <p:cNvSpPr/>
+          <p:nvPr/>
+        </p:nvSpPr>
+        <p:spPr>
+          <a:xfrm>
+            <a:off x="548640" y="1371600"/>
+            <a:ext cx="10972800" cy="4389120"/>
+          </a:xfrm>
+          <a:prstGeom prst="roundRect">
+            <a:avLst/>
+          </a:prstGeom>
+          <a:solidFill>
+            <a:srgbClr val="1A1A1A"/>
+          </a:solidFill>
+          <a:ln>
+            <a:noFill/>
+          </a:ln>
+        </p:spPr>
+        <p:style>
+          <a:lnRef idx="1">
+            <a:schemeClr val="accent1"/>
+          </a:lnRef>
+          <a:fillRef idx="3">
+            <a:schemeClr val="accent1"/>
+          </a:fillRef>
+          <a:effectRef idx="2">
+            <a:schemeClr val="accent1"/>
+          </a:effectRef>
+          <a:fontRef idx="minor">
+            <a:schemeClr val="lt1"/>
+          </a:fontRef>
+        </p:style>
+        <p:txBody>
+          <a:bodyPr rtlCol="0" anchor="ctr" wrap="square" lIns="274320" tIns="182880" rIns="274320"/>
           <a:lstStyle/>
           <a:p>
             <a:pPr algn="ctr">
               <a:spcAft>
-                <a:spcPts val="200"/>
-              </a:spcAft>
-              <a:defRPr sz="1800">
-                <a:solidFill>
-                  <a:srgbClr val="D4D4D4"/>
+                <a:spcPts val="100"/>
+              </a:spcAft>
+              <a:defRPr sz="1500">
+                <a:solidFill>
+                  <a:srgbClr val="555555"/>
                 </a:solidFill>
                 <a:latin typeface="Consolas"/>
               </a:defRPr>
@@ -5487,11 +5848,11 @@
           <a:p>
             <a:pPr>
               <a:spcAft>
-                <a:spcPts val="200"/>
-              </a:spcAft>
-              <a:defRPr sz="1800">
-                <a:solidFill>
-                  <a:srgbClr val="D4D4D4"/>
+                <a:spcPts val="100"/>
+              </a:spcAft>
+              <a:defRPr sz="1500">
+                <a:solidFill>
+                  <a:srgbClr val="6EC86E"/>
                 </a:solidFill>
                 <a:latin typeface="Consolas"/>
               </a:defRPr>
@@ -5503,72 +5864,56 @@
           <a:p>
             <a:pPr>
               <a:spcAft>
-                <a:spcPts val="200"/>
-              </a:spcAft>
-              <a:defRPr sz="1800">
-                <a:solidFill>
-                  <a:srgbClr val="D4D4D4"/>
-                </a:solidFill>
-                <a:latin typeface="Consolas"/>
-              </a:defRPr>
-            </a:pPr>
-          </a:p>
-          <a:p>
-            <a:pPr>
-              <a:spcAft>
-                <a:spcPts val="200"/>
-              </a:spcAft>
-              <a:defRPr sz="1800">
-                <a:solidFill>
-                  <a:srgbClr val="D4D4D4"/>
-                </a:solidFill>
-                <a:latin typeface="Consolas"/>
-              </a:defRPr>
-            </a:pPr>
-            <a:r>
-              <a:t># Or start from scratch: create config.json manually</a:t>
-            </a:r>
-          </a:p>
-          <a:p>
-            <a:pPr>
-              <a:spcAft>
-                <a:spcPts val="200"/>
-              </a:spcAft>
-              <a:defRPr sz="1800">
-                <a:solidFill>
-                  <a:srgbClr val="D4D4D4"/>
-                </a:solidFill>
-                <a:latin typeface="Consolas"/>
-              </a:defRPr>
-            </a:pPr>
-            <a:r>
-              <a:t>$ mkdir my_experiment</a:t>
-            </a:r>
-          </a:p>
-          <a:p>
-            <a:pPr>
-              <a:spcAft>
-                <a:spcPts val="200"/>
-              </a:spcAft>
-              <a:defRPr sz="1800">
-                <a:solidFill>
-                  <a:srgbClr val="D4D4D4"/>
-                </a:solidFill>
-                <a:latin typeface="Consolas"/>
-              </a:defRPr>
-            </a:pPr>
-            <a:r>
-              <a:t>$ cat &gt; my_experiment/config.json &lt;&lt; 'EOF'</a:t>
-            </a:r>
-          </a:p>
-          <a:p>
-            <a:pPr>
-              <a:spcAft>
-                <a:spcPts val="200"/>
-              </a:spcAft>
-              <a:defRPr sz="1800">
-                <a:solidFill>
-                  <a:srgbClr val="D4D4D4"/>
+                <a:spcPts val="100"/>
+              </a:spcAft>
+              <a:defRPr sz="1500">
+                <a:solidFill>
+                  <a:srgbClr val="CCCCCC"/>
+                </a:solidFill>
+                <a:latin typeface="Consolas"/>
+              </a:defRPr>
+            </a:pPr>
+          </a:p>
+          <a:p>
+            <a:pPr>
+              <a:spcAft>
+                <a:spcPts val="100"/>
+              </a:spcAft>
+              <a:defRPr sz="1500">
+                <a:solidFill>
+                  <a:srgbClr val="555555"/>
+                </a:solidFill>
+                <a:latin typeface="Consolas"/>
+              </a:defRPr>
+            </a:pPr>
+            <a:r>
+              <a:t># Or create config.json manually</a:t>
+            </a:r>
+          </a:p>
+          <a:p>
+            <a:pPr>
+              <a:spcAft>
+                <a:spcPts val="100"/>
+              </a:spcAft>
+              <a:defRPr sz="1500">
+                <a:solidFill>
+                  <a:srgbClr val="6EC86E"/>
+                </a:solidFill>
+                <a:latin typeface="Consolas"/>
+              </a:defRPr>
+            </a:pPr>
+            <a:r>
+              <a:t>$ mkdir my_experiment &amp;&amp; cat &gt; my_experiment/config.json &lt;&lt; 'EOF'</a:t>
+            </a:r>
+          </a:p>
+          <a:p>
+            <a:pPr>
+              <a:spcAft>
+                <a:spcPts val="100"/>
+              </a:spcAft>
+              <a:defRPr sz="1500">
+                <a:solidFill>
+                  <a:srgbClr val="CCCCCC"/>
                 </a:solidFill>
                 <a:latin typeface="Consolas"/>
               </a:defRPr>
@@ -5580,11 +5925,11 @@
           <a:p>
             <a:pPr>
               <a:spcAft>
-                <a:spcPts val="200"/>
-              </a:spcAft>
-              <a:defRPr sz="1800">
-                <a:solidFill>
-                  <a:srgbClr val="D4D4D4"/>
+                <a:spcPts val="100"/>
+              </a:spcAft>
+              <a:defRPr sz="1500">
+                <a:solidFill>
+                  <a:srgbClr val="CCCCCC"/>
                 </a:solidFill>
                 <a:latin typeface="Consolas"/>
               </a:defRPr>
@@ -5596,11 +5941,11 @@
           <a:p>
             <a:pPr>
               <a:spcAft>
-                <a:spcPts val="200"/>
-              </a:spcAft>
-              <a:defRPr sz="1800">
-                <a:solidFill>
-                  <a:srgbClr val="D4D4D4"/>
+                <a:spcPts val="100"/>
+              </a:spcAft>
+              <a:defRPr sz="1500">
+                <a:solidFill>
+                  <a:srgbClr val="CCCCCC"/>
                 </a:solidFill>
                 <a:latin typeface="Consolas"/>
               </a:defRPr>
@@ -5612,11 +5957,11 @@
           <a:p>
             <a:pPr>
               <a:spcAft>
-                <a:spcPts val="200"/>
-              </a:spcAft>
-              <a:defRPr sz="1800">
-                <a:solidFill>
-                  <a:srgbClr val="D4D4D4"/>
+                <a:spcPts val="100"/>
+              </a:spcAft>
+              <a:defRPr sz="1500">
+                <a:solidFill>
+                  <a:srgbClr val="CCCCCC"/>
                 </a:solidFill>
                 <a:latin typeface="Consolas"/>
               </a:defRPr>
@@ -5628,11 +5973,11 @@
           <a:p>
             <a:pPr>
               <a:spcAft>
-                <a:spcPts val="200"/>
-              </a:spcAft>
-              <a:defRPr sz="1800">
-                <a:solidFill>
-                  <a:srgbClr val="D4D4D4"/>
+                <a:spcPts val="100"/>
+              </a:spcAft>
+              <a:defRPr sz="1500">
+                <a:solidFill>
+                  <a:srgbClr val="CCCCCC"/>
                 </a:solidFill>
                 <a:latin typeface="Consolas"/>
               </a:defRPr>
@@ -5644,11 +5989,11 @@
           <a:p>
             <a:pPr>
               <a:spcAft>
-                <a:spcPts val="200"/>
-              </a:spcAft>
-              <a:defRPr sz="1800">
-                <a:solidFill>
-                  <a:srgbClr val="D4D4D4"/>
+                <a:spcPts val="100"/>
+              </a:spcAft>
+              <a:defRPr sz="1500">
+                <a:solidFill>
+                  <a:srgbClr val="CCCCCC"/>
                 </a:solidFill>
                 <a:latin typeface="Consolas"/>
               </a:defRPr>
@@ -5660,11 +6005,11 @@
           <a:p>
             <a:pPr>
               <a:spcAft>
-                <a:spcPts val="200"/>
-              </a:spcAft>
-              <a:defRPr sz="1800">
-                <a:solidFill>
-                  <a:srgbClr val="D4D4D4"/>
+                <a:spcPts val="100"/>
+              </a:spcAft>
+              <a:defRPr sz="1500">
+                <a:solidFill>
+                  <a:srgbClr val="CCCCCC"/>
                 </a:solidFill>
                 <a:latin typeface="Consolas"/>
               </a:defRPr>
@@ -5676,11 +6021,11 @@
           <a:p>
             <a:pPr>
               <a:spcAft>
-                <a:spcPts val="200"/>
-              </a:spcAft>
-              <a:defRPr sz="1800">
-                <a:solidFill>
-                  <a:srgbClr val="D4D4D4"/>
+                <a:spcPts val="100"/>
+              </a:spcAft>
+              <a:defRPr sz="1500">
+                <a:solidFill>
+                  <a:srgbClr val="CCCCCC"/>
                 </a:solidFill>
                 <a:latin typeface="Consolas"/>
               </a:defRPr>
@@ -5692,11 +6037,11 @@
           <a:p>
             <a:pPr>
               <a:spcAft>
-                <a:spcPts val="200"/>
-              </a:spcAft>
-              <a:defRPr sz="1800">
-                <a:solidFill>
-                  <a:srgbClr val="D4D4D4"/>
+                <a:spcPts val="100"/>
+              </a:spcAft>
+              <a:defRPr sz="1500">
+                <a:solidFill>
+                  <a:srgbClr val="CCCCCC"/>
                 </a:solidFill>
                 <a:latin typeface="Consolas"/>
               </a:defRPr>
@@ -5708,11 +6053,11 @@
           <a:p>
             <a:pPr>
               <a:spcAft>
-                <a:spcPts val="200"/>
-              </a:spcAft>
-              <a:defRPr sz="1800">
-                <a:solidFill>
-                  <a:srgbClr val="D4D4D4"/>
+                <a:spcPts val="100"/>
+              </a:spcAft>
+              <a:defRPr sz="1500">
+                <a:solidFill>
+                  <a:srgbClr val="CCCCCC"/>
                 </a:solidFill>
                 <a:latin typeface="Consolas"/>
               </a:defRPr>
@@ -5724,11 +6069,11 @@
           <a:p>
             <a:pPr>
               <a:spcAft>
-                <a:spcPts val="200"/>
-              </a:spcAft>
-              <a:defRPr sz="1800">
-                <a:solidFill>
-                  <a:srgbClr val="D4D4D4"/>
+                <a:spcPts val="100"/>
+              </a:spcAft>
+              <a:defRPr sz="1500">
+                <a:solidFill>
+                  <a:srgbClr val="CCCCCC"/>
                 </a:solidFill>
                 <a:latin typeface="Consolas"/>
               </a:defRPr>
@@ -5740,17 +6085,53 @@
           <a:p>
             <a:pPr>
               <a:spcAft>
-                <a:spcPts val="200"/>
-              </a:spcAft>
-              <a:defRPr sz="1800">
-                <a:solidFill>
-                  <a:srgbClr val="D4D4D4"/>
+                <a:spcPts val="100"/>
+              </a:spcAft>
+              <a:defRPr sz="1500">
+                <a:solidFill>
+                  <a:srgbClr val="CCCCCC"/>
                 </a:solidFill>
                 <a:latin typeface="Consolas"/>
               </a:defRPr>
             </a:pPr>
             <a:r>
               <a:t>EOF</a:t>
+            </a:r>
+          </a:p>
+        </p:txBody>
+      </p:sp>
+      <p:sp>
+        <p:nvSpPr>
+          <p:cNvPr id="7" name="TextBox 6"/>
+          <p:cNvSpPr txBox="1"/>
+          <p:nvPr/>
+        </p:nvSpPr>
+        <p:spPr>
+          <a:xfrm>
+            <a:off x="731520" y="6400800"/>
+            <a:ext cx="10058400" cy="365760"/>
+          </a:xfrm>
+          <a:prstGeom prst="rect">
+            <a:avLst/>
+          </a:prstGeom>
+          <a:noFill/>
+        </p:spPr>
+        <p:txBody>
+          <a:bodyPr wrap="square">
+            <a:spAutoFit/>
+          </a:bodyPr>
+          <a:lstStyle/>
+          <a:p>
+            <a:pPr algn="l">
+              <a:defRPr sz="1000" b="0">
+                <a:solidFill>
+                  <a:srgbClr val="999999"/>
+                </a:solidFill>
+                <a:latin typeface="Consolas"/>
+              </a:defRPr>
+            </a:pPr>
+            <a:r>
+              <a:t>© 2026 Martin J. Gallagher  |  GPL-3.0-or-later  |  doehelper.com</a:t>
             </a:r>
           </a:p>
         </p:txBody>
@@ -5769,7 +6150,7 @@
     <p:bg>
       <p:bgPr>
         <a:solidFill>
-          <a:srgbClr val="FFFFFF"/>
+          <a:srgbClr val="FAFAFA"/>
         </a:solidFill>
         <a:effectLst/>
       </p:bgPr>
@@ -5790,13 +6171,13 @@
         <p:spPr>
           <a:xfrm>
             <a:off x="0" y="0"/>
-            <a:ext cx="12191695" cy="54864"/>
+            <a:ext cx="12191695" cy="45720"/>
           </a:xfrm>
           <a:prstGeom prst="rect">
             <a:avLst/>
           </a:prstGeom>
           <a:solidFill>
-            <a:srgbClr val="007BFF"/>
+            <a:srgbClr val="5046E5"/>
           </a:solidFill>
           <a:ln>
             <a:noFill/>
@@ -5826,14 +6207,57 @@
       </p:sp>
       <p:sp>
         <p:nvSpPr>
-          <p:cNvPr id="3" name="TextBox 2"/>
+          <p:cNvPr id="3" name="Rectangle 2"/>
+          <p:cNvSpPr/>
+          <p:nvPr/>
+        </p:nvSpPr>
+        <p:spPr>
+          <a:xfrm>
+            <a:off x="548640" y="411480"/>
+            <a:ext cx="36576" cy="502920"/>
+          </a:xfrm>
+          <a:prstGeom prst="rect">
+            <a:avLst/>
+          </a:prstGeom>
+          <a:solidFill>
+            <a:srgbClr val="5046E5"/>
+          </a:solidFill>
+          <a:ln>
+            <a:noFill/>
+          </a:ln>
+        </p:spPr>
+        <p:style>
+          <a:lnRef idx="1">
+            <a:schemeClr val="accent1"/>
+          </a:lnRef>
+          <a:fillRef idx="3">
+            <a:schemeClr val="accent1"/>
+          </a:fillRef>
+          <a:effectRef idx="2">
+            <a:schemeClr val="accent1"/>
+          </a:effectRef>
+          <a:fontRef idx="minor">
+            <a:schemeClr val="lt1"/>
+          </a:fontRef>
+        </p:style>
+        <p:txBody>
+          <a:bodyPr rtlCol="0" anchor="ctr"/>
+          <a:lstStyle/>
+          <a:p>
+            <a:pPr algn="ctr"/>
+          </a:p>
+        </p:txBody>
+      </p:sp>
+      <p:sp>
+        <p:nvSpPr>
+          <p:cNvPr id="4" name="TextBox 3"/>
           <p:cNvSpPr txBox="1"/>
           <p:nvPr/>
         </p:nvSpPr>
         <p:spPr>
           <a:xfrm>
-            <a:off x="731520" y="365760"/>
-            <a:ext cx="10515600" cy="822960"/>
+            <a:off x="777240" y="365760"/>
+            <a:ext cx="10058400" cy="640080"/>
           </a:xfrm>
           <a:prstGeom prst="rect">
             <a:avLst/>
@@ -5846,12 +6270,12 @@
           </a:bodyPr>
           <a:lstStyle/>
           <a:p>
-            <a:pPr>
-              <a:defRPr sz="3200" b="1">
-                <a:solidFill>
-                  <a:srgbClr val="222222"/>
-                </a:solidFill>
-                <a:latin typeface="Calibri"/>
+            <a:pPr algn="l">
+              <a:defRPr sz="2800" b="1">
+                <a:solidFill>
+                  <a:srgbClr val="111111"/>
+                </a:solidFill>
+                <a:latin typeface="Inter"/>
               </a:defRPr>
             </a:pPr>
             <a:r>
@@ -5862,14 +6286,100 @@
       </p:sp>
       <p:sp>
         <p:nvSpPr>
-          <p:cNvPr id="4" name="TextBox 3"/>
+          <p:cNvPr id="5" name="Rounded Rectangle 4"/>
+          <p:cNvSpPr/>
+          <p:nvPr/>
+        </p:nvSpPr>
+        <p:spPr>
+          <a:xfrm>
+            <a:off x="548640" y="1188720"/>
+            <a:ext cx="5303520" cy="4937760"/>
+          </a:xfrm>
+          <a:prstGeom prst="roundRect">
+            <a:avLst/>
+          </a:prstGeom>
+          <a:solidFill>
+            <a:srgbClr val="F0FDF4"/>
+          </a:solidFill>
+          <a:ln>
+            <a:noFill/>
+          </a:ln>
+        </p:spPr>
+        <p:style>
+          <a:lnRef idx="1">
+            <a:schemeClr val="accent1"/>
+          </a:lnRef>
+          <a:fillRef idx="3">
+            <a:schemeClr val="accent1"/>
+          </a:fillRef>
+          <a:effectRef idx="2">
+            <a:schemeClr val="accent1"/>
+          </a:effectRef>
+          <a:fontRef idx="minor">
+            <a:schemeClr val="lt1"/>
+          </a:fontRef>
+        </p:style>
+        <p:txBody>
+          <a:bodyPr rtlCol="0" anchor="ctr"/>
+          <a:lstStyle/>
+          <a:p>
+            <a:pPr algn="ctr"/>
+          </a:p>
+        </p:txBody>
+      </p:sp>
+      <p:sp>
+        <p:nvSpPr>
+          <p:cNvPr id="6" name="Rectangle 5"/>
+          <p:cNvSpPr/>
+          <p:nvPr/>
+        </p:nvSpPr>
+        <p:spPr>
+          <a:xfrm>
+            <a:off x="548640" y="1188720"/>
+            <a:ext cx="36576" cy="4937760"/>
+          </a:xfrm>
+          <a:prstGeom prst="rect">
+            <a:avLst/>
+          </a:prstGeom>
+          <a:solidFill>
+            <a:srgbClr val="16A34A"/>
+          </a:solidFill>
+          <a:ln>
+            <a:noFill/>
+          </a:ln>
+        </p:spPr>
+        <p:style>
+          <a:lnRef idx="1">
+            <a:schemeClr val="accent1"/>
+          </a:lnRef>
+          <a:fillRef idx="3">
+            <a:schemeClr val="accent1"/>
+          </a:fillRef>
+          <a:effectRef idx="2">
+            <a:schemeClr val="accent1"/>
+          </a:effectRef>
+          <a:fontRef idx="minor">
+            <a:schemeClr val="lt1"/>
+          </a:fontRef>
+        </p:style>
+        <p:txBody>
+          <a:bodyPr rtlCol="0" anchor="ctr"/>
+          <a:lstStyle/>
+          <a:p>
+            <a:pPr algn="ctr"/>
+          </a:p>
+        </p:txBody>
+      </p:sp>
+      <p:sp>
+        <p:nvSpPr>
+          <p:cNvPr id="7" name="TextBox 6"/>
           <p:cNvSpPr txBox="1"/>
           <p:nvPr/>
         </p:nvSpPr>
         <p:spPr>
           <a:xfrm>
-            <a:off x="914400" y="1463040"/>
-            <a:ext cx="10058400" cy="4754880"/>
+            <a:off x="822960" y="1325880"/>
+            <a:ext cx="4754880" cy="365760"/>
           </a:xfrm>
           <a:prstGeom prst="rect">
             <a:avLst/>
@@ -5882,47 +6392,305 @@
           </a:bodyPr>
           <a:lstStyle/>
           <a:p>
-            <a:pPr>
-              <a:spcAft>
-                <a:spcPts val="800"/>
-              </a:spcAft>
-              <a:defRPr sz="2200" b="0">
-                <a:solidFill>
-                  <a:srgbClr val="222222"/>
-                </a:solidFill>
-                <a:latin typeface="Calibri"/>
-              </a:defRPr>
-            </a:pPr>
-            <a:r>
-              <a:t>Continuous: numeric range with low/high values</a:t>
+            <a:pPr algn="l">
+              <a:defRPr sz="1600" b="1">
+                <a:solidFill>
+                  <a:srgbClr val="16A34A"/>
+                </a:solidFill>
+                <a:latin typeface="Consolas"/>
+              </a:defRPr>
+            </a:pPr>
+            <a:r>
+              <a:t>CONTINUOUS</a:t>
+            </a:r>
+          </a:p>
+        </p:txBody>
+      </p:sp>
+      <p:sp>
+        <p:nvSpPr>
+          <p:cNvPr id="8" name="TextBox 7"/>
+          <p:cNvSpPr txBox="1"/>
+          <p:nvPr/>
+        </p:nvSpPr>
+        <p:spPr>
+          <a:xfrm>
+            <a:off x="822960" y="1737360"/>
+            <a:ext cx="4754880" cy="4114800"/>
+          </a:xfrm>
+          <a:prstGeom prst="rect">
+            <a:avLst/>
+          </a:prstGeom>
+          <a:noFill/>
+        </p:spPr>
+        <p:txBody>
+          <a:bodyPr wrap="square">
+            <a:spAutoFit/>
+          </a:bodyPr>
+          <a:lstStyle/>
+          <a:p>
+            <a:pPr>
+              <a:spcAft>
+                <a:spcPts val="500"/>
+              </a:spcAft>
+              <a:defRPr sz="1700">
+                <a:solidFill>
+                  <a:srgbClr val="333333"/>
+                </a:solidFill>
+                <a:latin typeface="Inter"/>
+              </a:defRPr>
+            </a:pPr>
+            <a:r>
+              <a:t>Continuous: numeric range with low/high</a:t>
             </a:r>
           </a:p>
           <a:p>
             <a:pPr lvl="1">
               <a:spcAft>
-                <a:spcPts val="800"/>
-              </a:spcAft>
-              <a:defRPr sz="1900">
-                <a:solidFill>
-                  <a:srgbClr val="222222"/>
-                </a:solidFill>
-                <a:latin typeface="Calibri"/>
-              </a:defRPr>
-            </a:pPr>
-            <a:r>
-              <a:t>Example: temperature (150-200), pressure (1.0-5.0)</a:t>
-            </a:r>
-          </a:p>
-          <a:p>
-            <a:pPr>
-              <a:spcAft>
-                <a:spcPts val="800"/>
-              </a:spcAft>
-              <a:defRPr sz="2200" b="0">
-                <a:solidFill>
-                  <a:srgbClr val="222222"/>
-                </a:solidFill>
-                <a:latin typeface="Calibri"/>
+                <a:spcPts val="500"/>
+              </a:spcAft>
+              <a:defRPr sz="1500">
+                <a:solidFill>
+                  <a:srgbClr val="666666"/>
+                </a:solidFill>
+                <a:latin typeface="Inter"/>
+              </a:defRPr>
+            </a:pPr>
+            <a:r>
+              <a:t>temperature: 150–200</a:t>
+            </a:r>
+          </a:p>
+          <a:p>
+            <a:pPr lvl="1">
+              <a:spcAft>
+                <a:spcPts val="500"/>
+              </a:spcAft>
+              <a:defRPr sz="1500">
+                <a:solidFill>
+                  <a:srgbClr val="666666"/>
+                </a:solidFill>
+                <a:latin typeface="Inter"/>
+              </a:defRPr>
+            </a:pPr>
+            <a:r>
+              <a:t>pressure: 1.0–5.0</a:t>
+            </a:r>
+          </a:p>
+          <a:p>
+            <a:pPr>
+              <a:spcAft>
+                <a:spcPts val="500"/>
+              </a:spcAft>
+              <a:defRPr sz="1700">
+                <a:solidFill>
+                  <a:srgbClr val="333333"/>
+                </a:solidFill>
+                <a:latin typeface="Inter"/>
+              </a:defRPr>
+            </a:pPr>
+          </a:p>
+          <a:p>
+            <a:pPr>
+              <a:spcAft>
+                <a:spcPts val="500"/>
+              </a:spcAft>
+              <a:defRPr sz="1700">
+                <a:solidFill>
+                  <a:srgbClr val="333333"/>
+                </a:solidFill>
+                <a:latin typeface="Inter"/>
+              </a:defRPr>
+            </a:pPr>
+            <a:r>
+              <a:t>Coded variables: factors are internally</a:t>
+            </a:r>
+          </a:p>
+          <a:p>
+            <a:pPr>
+              <a:spcAft>
+                <a:spcPts val="500"/>
+              </a:spcAft>
+              <a:defRPr sz="1700">
+                <a:solidFill>
+                  <a:srgbClr val="333333"/>
+                </a:solidFill>
+                <a:latin typeface="Inter"/>
+              </a:defRPr>
+            </a:pPr>
+            <a:r>
+              <a:t>scaled to −1 / +1 so all effects are</a:t>
+            </a:r>
+          </a:p>
+          <a:p>
+            <a:pPr>
+              <a:spcAft>
+                <a:spcPts val="500"/>
+              </a:spcAft>
+              <a:defRPr sz="1700">
+                <a:solidFill>
+                  <a:srgbClr val="333333"/>
+                </a:solidFill>
+                <a:latin typeface="Inter"/>
+              </a:defRPr>
+            </a:pPr>
+            <a:r>
+              <a:t>directly comparable</a:t>
+            </a:r>
+          </a:p>
+        </p:txBody>
+      </p:sp>
+      <p:sp>
+        <p:nvSpPr>
+          <p:cNvPr id="9" name="Rounded Rectangle 8"/>
+          <p:cNvSpPr/>
+          <p:nvPr/>
+        </p:nvSpPr>
+        <p:spPr>
+          <a:xfrm>
+            <a:off x="6217920" y="1188720"/>
+            <a:ext cx="5303520" cy="4937760"/>
+          </a:xfrm>
+          <a:prstGeom prst="roundRect">
+            <a:avLst/>
+          </a:prstGeom>
+          <a:solidFill>
+            <a:srgbClr val="EEF2FF"/>
+          </a:solidFill>
+          <a:ln>
+            <a:noFill/>
+          </a:ln>
+        </p:spPr>
+        <p:style>
+          <a:lnRef idx="1">
+            <a:schemeClr val="accent1"/>
+          </a:lnRef>
+          <a:fillRef idx="3">
+            <a:schemeClr val="accent1"/>
+          </a:fillRef>
+          <a:effectRef idx="2">
+            <a:schemeClr val="accent1"/>
+          </a:effectRef>
+          <a:fontRef idx="minor">
+            <a:schemeClr val="lt1"/>
+          </a:fontRef>
+        </p:style>
+        <p:txBody>
+          <a:bodyPr rtlCol="0" anchor="ctr"/>
+          <a:lstStyle/>
+          <a:p>
+            <a:pPr algn="ctr"/>
+          </a:p>
+        </p:txBody>
+      </p:sp>
+      <p:sp>
+        <p:nvSpPr>
+          <p:cNvPr id="10" name="Rectangle 9"/>
+          <p:cNvSpPr/>
+          <p:nvPr/>
+        </p:nvSpPr>
+        <p:spPr>
+          <a:xfrm>
+            <a:off x="6217920" y="1188720"/>
+            <a:ext cx="36576" cy="4937760"/>
+          </a:xfrm>
+          <a:prstGeom prst="rect">
+            <a:avLst/>
+          </a:prstGeom>
+          <a:solidFill>
+            <a:srgbClr val="5046E5"/>
+          </a:solidFill>
+          <a:ln>
+            <a:noFill/>
+          </a:ln>
+        </p:spPr>
+        <p:style>
+          <a:lnRef idx="1">
+            <a:schemeClr val="accent1"/>
+          </a:lnRef>
+          <a:fillRef idx="3">
+            <a:schemeClr val="accent1"/>
+          </a:fillRef>
+          <a:effectRef idx="2">
+            <a:schemeClr val="accent1"/>
+          </a:effectRef>
+          <a:fontRef idx="minor">
+            <a:schemeClr val="lt1"/>
+          </a:fontRef>
+        </p:style>
+        <p:txBody>
+          <a:bodyPr rtlCol="0" anchor="ctr"/>
+          <a:lstStyle/>
+          <a:p>
+            <a:pPr algn="ctr"/>
+          </a:p>
+        </p:txBody>
+      </p:sp>
+      <p:sp>
+        <p:nvSpPr>
+          <p:cNvPr id="11" name="TextBox 10"/>
+          <p:cNvSpPr txBox="1"/>
+          <p:nvPr/>
+        </p:nvSpPr>
+        <p:spPr>
+          <a:xfrm>
+            <a:off x="6492240" y="1325880"/>
+            <a:ext cx="4754880" cy="365760"/>
+          </a:xfrm>
+          <a:prstGeom prst="rect">
+            <a:avLst/>
+          </a:prstGeom>
+          <a:noFill/>
+        </p:spPr>
+        <p:txBody>
+          <a:bodyPr wrap="square">
+            <a:spAutoFit/>
+          </a:bodyPr>
+          <a:lstStyle/>
+          <a:p>
+            <a:pPr algn="l">
+              <a:defRPr sz="1600" b="1">
+                <a:solidFill>
+                  <a:srgbClr val="5046E5"/>
+                </a:solidFill>
+                <a:latin typeface="Consolas"/>
+              </a:defRPr>
+            </a:pPr>
+            <a:r>
+              <a:t>CATEGORICAL &amp; ORDINAL</a:t>
+            </a:r>
+          </a:p>
+        </p:txBody>
+      </p:sp>
+      <p:sp>
+        <p:nvSpPr>
+          <p:cNvPr id="12" name="TextBox 11"/>
+          <p:cNvSpPr txBox="1"/>
+          <p:nvPr/>
+        </p:nvSpPr>
+        <p:spPr>
+          <a:xfrm>
+            <a:off x="6492240" y="1737360"/>
+            <a:ext cx="4754880" cy="4114800"/>
+          </a:xfrm>
+          <a:prstGeom prst="rect">
+            <a:avLst/>
+          </a:prstGeom>
+          <a:noFill/>
+        </p:spPr>
+        <p:txBody>
+          <a:bodyPr wrap="square">
+            <a:spAutoFit/>
+          </a:bodyPr>
+          <a:lstStyle/>
+          <a:p>
+            <a:pPr>
+              <a:spcAft>
+                <a:spcPts val="500"/>
+              </a:spcAft>
+              <a:defRPr sz="1700">
+                <a:solidFill>
+                  <a:srgbClr val="333333"/>
+                </a:solidFill>
+                <a:latin typeface="Inter"/>
               </a:defRPr>
             </a:pPr>
             <a:r>
@@ -5932,94 +6700,127 @@
           <a:p>
             <a:pPr lvl="1">
               <a:spcAft>
-                <a:spcPts val="800"/>
-              </a:spcAft>
-              <a:defRPr sz="1900">
-                <a:solidFill>
-                  <a:srgbClr val="222222"/>
-                </a:solidFill>
-                <a:latin typeface="Calibri"/>
-              </a:defRPr>
-            </a:pPr>
-            <a:r>
-              <a:t>Example: material ("steel", "aluminum", "titanium")</a:t>
-            </a:r>
-          </a:p>
-          <a:p>
-            <a:pPr>
-              <a:spcAft>
-                <a:spcPts val="800"/>
-              </a:spcAft>
-              <a:defRPr sz="2200" b="0">
-                <a:solidFill>
-                  <a:srgbClr val="222222"/>
-                </a:solidFill>
-                <a:latin typeface="Calibri"/>
-              </a:defRPr>
-            </a:pPr>
-            <a:r>
-              <a:t>Ordinal: ordered categories with inherent ranking</a:t>
+                <a:spcPts val="500"/>
+              </a:spcAft>
+              <a:defRPr sz="1500">
+                <a:solidFill>
+                  <a:srgbClr val="666666"/>
+                </a:solidFill>
+                <a:latin typeface="Inter"/>
+              </a:defRPr>
+            </a:pPr>
+            <a:r>
+              <a:t>material: steel, aluminum, titanium</a:t>
+            </a:r>
+          </a:p>
+          <a:p>
+            <a:pPr>
+              <a:spcAft>
+                <a:spcPts val="500"/>
+              </a:spcAft>
+              <a:defRPr sz="1700">
+                <a:solidFill>
+                  <a:srgbClr val="333333"/>
+                </a:solidFill>
+                <a:latin typeface="Inter"/>
+              </a:defRPr>
+            </a:pPr>
+          </a:p>
+          <a:p>
+            <a:pPr>
+              <a:spcAft>
+                <a:spcPts val="500"/>
+              </a:spcAft>
+              <a:defRPr sz="1700">
+                <a:solidFill>
+                  <a:srgbClr val="333333"/>
+                </a:solidFill>
+                <a:latin typeface="Inter"/>
+              </a:defRPr>
+            </a:pPr>
+            <a:r>
+              <a:t>Ordinal: ordered categories</a:t>
             </a:r>
           </a:p>
           <a:p>
             <a:pPr lvl="1">
               <a:spcAft>
-                <a:spcPts val="800"/>
-              </a:spcAft>
-              <a:defRPr sz="1900">
-                <a:solidFill>
-                  <a:srgbClr val="222222"/>
-                </a:solidFill>
-                <a:latin typeface="Calibri"/>
-              </a:defRPr>
-            </a:pPr>
-            <a:r>
-              <a:t>Example: quality ("low", "medium", "high")</a:t>
-            </a:r>
-          </a:p>
-          <a:p>
-            <a:pPr>
-              <a:spcAft>
-                <a:spcPts val="800"/>
-              </a:spcAft>
-              <a:defRPr sz="2200" b="0">
-                <a:solidFill>
-                  <a:srgbClr val="222222"/>
-                </a:solidFill>
-                <a:latin typeface="Calibri"/>
-              </a:defRPr>
-            </a:pPr>
-          </a:p>
-          <a:p>
-            <a:pPr>
-              <a:spcAft>
-                <a:spcPts val="800"/>
-              </a:spcAft>
-              <a:defRPr sz="2200" b="0">
-                <a:solidFill>
-                  <a:srgbClr val="222222"/>
-                </a:solidFill>
-                <a:latin typeface="Calibri"/>
-              </a:defRPr>
-            </a:pPr>
-            <a:r>
-              <a:t>Coded variables: factors are internally scaled to -1 / +1</a:t>
-            </a:r>
-          </a:p>
-          <a:p>
-            <a:pPr lvl="1">
-              <a:spcAft>
-                <a:spcPts val="800"/>
-              </a:spcAft>
-              <a:defRPr sz="1900">
-                <a:solidFill>
-                  <a:srgbClr val="222222"/>
-                </a:solidFill>
-                <a:latin typeface="Calibri"/>
-              </a:defRPr>
-            </a:pPr>
-            <a:r>
-              <a:t>This ensures all effects are directly comparable</a:t>
+                <a:spcPts val="500"/>
+              </a:spcAft>
+              <a:defRPr sz="1500">
+                <a:solidFill>
+                  <a:srgbClr val="666666"/>
+                </a:solidFill>
+                <a:latin typeface="Inter"/>
+              </a:defRPr>
+            </a:pPr>
+            <a:r>
+              <a:t>quality: low, medium, high</a:t>
+            </a:r>
+          </a:p>
+          <a:p>
+            <a:pPr>
+              <a:spcAft>
+                <a:spcPts val="500"/>
+              </a:spcAft>
+              <a:defRPr sz="1700">
+                <a:solidFill>
+                  <a:srgbClr val="333333"/>
+                </a:solidFill>
+                <a:latin typeface="Inter"/>
+              </a:defRPr>
+            </a:pPr>
+          </a:p>
+          <a:p>
+            <a:pPr>
+              <a:spcAft>
+                <a:spcPts val="500"/>
+              </a:spcAft>
+              <a:defRPr sz="1700">
+                <a:solidFill>
+                  <a:srgbClr val="333333"/>
+                </a:solidFill>
+                <a:latin typeface="Inter"/>
+              </a:defRPr>
+            </a:pPr>
+            <a:r>
+              <a:t>Set "type" field in config.json</a:t>
+            </a:r>
+          </a:p>
+        </p:txBody>
+      </p:sp>
+      <p:sp>
+        <p:nvSpPr>
+          <p:cNvPr id="13" name="TextBox 12"/>
+          <p:cNvSpPr txBox="1"/>
+          <p:nvPr/>
+        </p:nvSpPr>
+        <p:spPr>
+          <a:xfrm>
+            <a:off x="731520" y="6400800"/>
+            <a:ext cx="10058400" cy="365760"/>
+          </a:xfrm>
+          <a:prstGeom prst="rect">
+            <a:avLst/>
+          </a:prstGeom>
+          <a:noFill/>
+        </p:spPr>
+        <p:txBody>
+          <a:bodyPr wrap="square">
+            <a:spAutoFit/>
+          </a:bodyPr>
+          <a:lstStyle/>
+          <a:p>
+            <a:pPr algn="l">
+              <a:defRPr sz="1000" b="0">
+                <a:solidFill>
+                  <a:srgbClr val="999999"/>
+                </a:solidFill>
+                <a:latin typeface="Consolas"/>
+              </a:defRPr>
+            </a:pPr>
+            <a:r>
+              <a:t>© 2026 Martin J. Gallagher  |  GPL-3.0-or-later  |  doehelper.com</a:t>
             </a:r>
           </a:p>
         </p:txBody>
@@ -6038,7 +6839,7 @@
     <p:bg>
       <p:bgPr>
         <a:solidFill>
-          <a:srgbClr val="FFFFFF"/>
+          <a:srgbClr val="FAFAFA"/>
         </a:solidFill>
         <a:effectLst/>
       </p:bgPr>
@@ -6059,13 +6860,13 @@
         <p:spPr>
           <a:xfrm>
             <a:off x="0" y="0"/>
-            <a:ext cx="12191695" cy="54864"/>
+            <a:ext cx="12191695" cy="45720"/>
           </a:xfrm>
           <a:prstGeom prst="rect">
             <a:avLst/>
           </a:prstGeom>
           <a:solidFill>
-            <a:srgbClr val="00C853"/>
+            <a:srgbClr val="0D9488"/>
           </a:solidFill>
           <a:ln>
             <a:noFill/>
@@ -6101,8 +6902,8 @@
         </p:nvSpPr>
         <p:spPr>
           <a:xfrm>
-            <a:off x="731520" y="365760"/>
-            <a:ext cx="10515600" cy="822960"/>
+            <a:off x="777240" y="320040"/>
+            <a:ext cx="10058400" cy="548640"/>
           </a:xfrm>
           <a:prstGeom prst="rect">
             <a:avLst/>
@@ -6115,12 +6916,12 @@
           </a:bodyPr>
           <a:lstStyle/>
           <a:p>
-            <a:pPr>
-              <a:defRPr sz="3000" b="1">
-                <a:solidFill>
-                  <a:srgbClr val="222222"/>
-                </a:solidFill>
-                <a:latin typeface="Calibri"/>
+            <a:pPr algn="l">
+              <a:defRPr sz="2600" b="1">
+                <a:solidFill>
+                  <a:srgbClr val="111111"/>
+                </a:solidFill>
+                <a:latin typeface="Inter"/>
               </a:defRPr>
             </a:pPr>
             <a:r>
@@ -6131,20 +6932,20 @@
       </p:sp>
       <p:sp>
         <p:nvSpPr>
-          <p:cNvPr id="4" name="Rounded Rectangle 3"/>
+          <p:cNvPr id="4" name="Rectangle 3"/>
           <p:cNvSpPr/>
           <p:nvPr/>
         </p:nvSpPr>
         <p:spPr>
           <a:xfrm>
-            <a:off x="731520" y="1371600"/>
-            <a:ext cx="10515600" cy="4114800"/>
-          </a:xfrm>
-          <a:prstGeom prst="roundRect">
+            <a:off x="548640" y="1051560"/>
+            <a:ext cx="10972800" cy="320040"/>
+          </a:xfrm>
+          <a:prstGeom prst="rect">
             <a:avLst/>
           </a:prstGeom>
           <a:solidFill>
-            <a:srgbClr val="2D2D2D"/>
+            <a:srgbClr val="222222"/>
           </a:solidFill>
           <a:ln>
             <a:noFill/>
@@ -6165,215 +6966,10 @@
           </a:fontRef>
         </p:style>
         <p:txBody>
-          <a:bodyPr rtlCol="0" anchor="ctr" wrap="square" lIns="274320" tIns="274320"/>
-          <a:lstStyle/>
-          <a:p>
-            <a:pPr algn="ctr">
-              <a:spcAft>
-                <a:spcPts val="200"/>
-              </a:spcAft>
-              <a:defRPr sz="1800">
-                <a:solidFill>
-                  <a:srgbClr val="D4D4D4"/>
-                </a:solidFill>
-                <a:latin typeface="Consolas"/>
-              </a:defRPr>
-            </a:pPr>
-            <a:r>
-              <a:t>"factors": {</a:t>
-            </a:r>
-          </a:p>
-          <a:p>
-            <a:pPr>
-              <a:spcAft>
-                <a:spcPts val="200"/>
-              </a:spcAft>
-              <a:defRPr sz="1800">
-                <a:solidFill>
-                  <a:srgbClr val="D4D4D4"/>
-                </a:solidFill>
-                <a:latin typeface="Consolas"/>
-              </a:defRPr>
-            </a:pPr>
-            <a:r>
-              <a:t>  "temperature": {</a:t>
-            </a:r>
-          </a:p>
-          <a:p>
-            <a:pPr>
-              <a:spcAft>
-                <a:spcPts val="200"/>
-              </a:spcAft>
-              <a:defRPr sz="1800">
-                <a:solidFill>
-                  <a:srgbClr val="D4D4D4"/>
-                </a:solidFill>
-                <a:latin typeface="Consolas"/>
-              </a:defRPr>
-            </a:pPr>
-            <a:r>
-              <a:t>    "low": 150, "high": 200, "units": "C"</a:t>
-            </a:r>
-          </a:p>
-          <a:p>
-            <a:pPr>
-              <a:spcAft>
-                <a:spcPts val="200"/>
-              </a:spcAft>
-              <a:defRPr sz="1800">
-                <a:solidFill>
-                  <a:srgbClr val="D4D4D4"/>
-                </a:solidFill>
-                <a:latin typeface="Consolas"/>
-              </a:defRPr>
-            </a:pPr>
-            <a:r>
-              <a:t>  },</a:t>
-            </a:r>
-          </a:p>
-          <a:p>
-            <a:pPr>
-              <a:spcAft>
-                <a:spcPts val="200"/>
-              </a:spcAft>
-              <a:defRPr sz="1800">
-                <a:solidFill>
-                  <a:srgbClr val="D4D4D4"/>
-                </a:solidFill>
-                <a:latin typeface="Consolas"/>
-              </a:defRPr>
-            </a:pPr>
-            <a:r>
-              <a:t>  "material": {</a:t>
-            </a:r>
-          </a:p>
-          <a:p>
-            <a:pPr>
-              <a:spcAft>
-                <a:spcPts val="200"/>
-              </a:spcAft>
-              <a:defRPr sz="1800">
-                <a:solidFill>
-                  <a:srgbClr val="D4D4D4"/>
-                </a:solidFill>
-                <a:latin typeface="Consolas"/>
-              </a:defRPr>
-            </a:pPr>
-            <a:r>
-              <a:t>    "type": "categorical",</a:t>
-            </a:r>
-          </a:p>
-          <a:p>
-            <a:pPr>
-              <a:spcAft>
-                <a:spcPts val="200"/>
-              </a:spcAft>
-              <a:defRPr sz="1800">
-                <a:solidFill>
-                  <a:srgbClr val="D4D4D4"/>
-                </a:solidFill>
-                <a:latin typeface="Consolas"/>
-              </a:defRPr>
-            </a:pPr>
-            <a:r>
-              <a:t>    "levels": ["steel", "aluminum", "titanium"]</a:t>
-            </a:r>
-          </a:p>
-          <a:p>
-            <a:pPr>
-              <a:spcAft>
-                <a:spcPts val="200"/>
-              </a:spcAft>
-              <a:defRPr sz="1800">
-                <a:solidFill>
-                  <a:srgbClr val="D4D4D4"/>
-                </a:solidFill>
-                <a:latin typeface="Consolas"/>
-              </a:defRPr>
-            </a:pPr>
-            <a:r>
-              <a:t>  },</a:t>
-            </a:r>
-          </a:p>
-          <a:p>
-            <a:pPr>
-              <a:spcAft>
-                <a:spcPts val="200"/>
-              </a:spcAft>
-              <a:defRPr sz="1800">
-                <a:solidFill>
-                  <a:srgbClr val="D4D4D4"/>
-                </a:solidFill>
-                <a:latin typeface="Consolas"/>
-              </a:defRPr>
-            </a:pPr>
-            <a:r>
-              <a:t>  "quality_grade": {</a:t>
-            </a:r>
-          </a:p>
-          <a:p>
-            <a:pPr>
-              <a:spcAft>
-                <a:spcPts val="200"/>
-              </a:spcAft>
-              <a:defRPr sz="1800">
-                <a:solidFill>
-                  <a:srgbClr val="D4D4D4"/>
-                </a:solidFill>
-                <a:latin typeface="Consolas"/>
-              </a:defRPr>
-            </a:pPr>
-            <a:r>
-              <a:t>    "type": "ordinal",</a:t>
-            </a:r>
-          </a:p>
-          <a:p>
-            <a:pPr>
-              <a:spcAft>
-                <a:spcPts val="200"/>
-              </a:spcAft>
-              <a:defRPr sz="1800">
-                <a:solidFill>
-                  <a:srgbClr val="D4D4D4"/>
-                </a:solidFill>
-                <a:latin typeface="Consolas"/>
-              </a:defRPr>
-            </a:pPr>
-            <a:r>
-              <a:t>    "levels": ["low", "medium", "high"]</a:t>
-            </a:r>
-          </a:p>
-          <a:p>
-            <a:pPr>
-              <a:spcAft>
-                <a:spcPts val="200"/>
-              </a:spcAft>
-              <a:defRPr sz="1800">
-                <a:solidFill>
-                  <a:srgbClr val="D4D4D4"/>
-                </a:solidFill>
-                <a:latin typeface="Consolas"/>
-              </a:defRPr>
-            </a:pPr>
-            <a:r>
-              <a:t>  }</a:t>
-            </a:r>
-          </a:p>
-          <a:p>
-            <a:pPr>
-              <a:spcAft>
-                <a:spcPts val="200"/>
-              </a:spcAft>
-              <a:defRPr sz="1800">
-                <a:solidFill>
-                  <a:srgbClr val="D4D4D4"/>
-                </a:solidFill>
-                <a:latin typeface="Consolas"/>
-              </a:defRPr>
-            </a:pPr>
-            <a:r>
-              <a:t>}</a:t>
-            </a:r>
+          <a:bodyPr rtlCol="0" anchor="ctr"/>
+          <a:lstStyle/>
+          <a:p>
+            <a:pPr algn="ctr"/>
           </a:p>
         </p:txBody>
       </p:sp>
@@ -6385,8 +6981,8 @@
         </p:nvSpPr>
         <p:spPr>
           <a:xfrm>
-            <a:off x="731520" y="5760720"/>
-            <a:ext cx="10058400" cy="731520"/>
+            <a:off x="822960" y="1051560"/>
+            <a:ext cx="3657600" cy="320040"/>
           </a:xfrm>
           <a:prstGeom prst="rect">
             <a:avLst/>
@@ -6394,21 +6990,341 @@
           <a:noFill/>
         </p:spPr>
         <p:txBody>
+          <a:bodyPr wrap="square" anchor="ctr">
+            <a:spAutoFit/>
+          </a:bodyPr>
+          <a:lstStyle/>
+          <a:p>
+            <a:pPr algn="l">
+              <a:defRPr sz="1000" b="0">
+                <a:solidFill>
+                  <a:srgbClr val="999999"/>
+                </a:solidFill>
+                <a:latin typeface="Consolas"/>
+              </a:defRPr>
+            </a:pPr>
+            <a:r>
+              <a:t>terminal</a:t>
+            </a:r>
+          </a:p>
+        </p:txBody>
+      </p:sp>
+      <p:sp>
+        <p:nvSpPr>
+          <p:cNvPr id="6" name="Rounded Rectangle 5"/>
+          <p:cNvSpPr/>
+          <p:nvPr/>
+        </p:nvSpPr>
+        <p:spPr>
+          <a:xfrm>
+            <a:off x="548640" y="1371600"/>
+            <a:ext cx="10972800" cy="3931920"/>
+          </a:xfrm>
+          <a:prstGeom prst="roundRect">
+            <a:avLst/>
+          </a:prstGeom>
+          <a:solidFill>
+            <a:srgbClr val="1A1A1A"/>
+          </a:solidFill>
+          <a:ln>
+            <a:noFill/>
+          </a:ln>
+        </p:spPr>
+        <p:style>
+          <a:lnRef idx="1">
+            <a:schemeClr val="accent1"/>
+          </a:lnRef>
+          <a:fillRef idx="3">
+            <a:schemeClr val="accent1"/>
+          </a:fillRef>
+          <a:effectRef idx="2">
+            <a:schemeClr val="accent1"/>
+          </a:effectRef>
+          <a:fontRef idx="minor">
+            <a:schemeClr val="lt1"/>
+          </a:fontRef>
+        </p:style>
+        <p:txBody>
+          <a:bodyPr rtlCol="0" anchor="ctr" wrap="square" lIns="274320" tIns="182880" rIns="274320"/>
+          <a:lstStyle/>
+          <a:p>
+            <a:pPr algn="ctr">
+              <a:spcAft>
+                <a:spcPts val="100"/>
+              </a:spcAft>
+              <a:defRPr sz="1500">
+                <a:solidFill>
+                  <a:srgbClr val="CCCCCC"/>
+                </a:solidFill>
+                <a:latin typeface="Consolas"/>
+              </a:defRPr>
+            </a:pPr>
+            <a:r>
+              <a:t>"factors": {</a:t>
+            </a:r>
+          </a:p>
+          <a:p>
+            <a:pPr>
+              <a:spcAft>
+                <a:spcPts val="100"/>
+              </a:spcAft>
+              <a:defRPr sz="1500">
+                <a:solidFill>
+                  <a:srgbClr val="CCCCCC"/>
+                </a:solidFill>
+                <a:latin typeface="Consolas"/>
+              </a:defRPr>
+            </a:pPr>
+            <a:r>
+              <a:t>    "temperature": {</a:t>
+            </a:r>
+          </a:p>
+          <a:p>
+            <a:pPr>
+              <a:spcAft>
+                <a:spcPts val="100"/>
+              </a:spcAft>
+              <a:defRPr sz="1500">
+                <a:solidFill>
+                  <a:srgbClr val="CCCCCC"/>
+                </a:solidFill>
+                <a:latin typeface="Consolas"/>
+              </a:defRPr>
+            </a:pPr>
+            <a:r>
+              <a:t>        "low": 150, "high": 200, "units": "C"</a:t>
+            </a:r>
+          </a:p>
+          <a:p>
+            <a:pPr>
+              <a:spcAft>
+                <a:spcPts val="100"/>
+              </a:spcAft>
+              <a:defRPr sz="1500">
+                <a:solidFill>
+                  <a:srgbClr val="CCCCCC"/>
+                </a:solidFill>
+                <a:latin typeface="Consolas"/>
+              </a:defRPr>
+            </a:pPr>
+            <a:r>
+              <a:t>    },</a:t>
+            </a:r>
+          </a:p>
+          <a:p>
+            <a:pPr>
+              <a:spcAft>
+                <a:spcPts val="100"/>
+              </a:spcAft>
+              <a:defRPr sz="1500">
+                <a:solidFill>
+                  <a:srgbClr val="CCCCCC"/>
+                </a:solidFill>
+                <a:latin typeface="Consolas"/>
+              </a:defRPr>
+            </a:pPr>
+            <a:r>
+              <a:t>    "material": {</a:t>
+            </a:r>
+          </a:p>
+          <a:p>
+            <a:pPr>
+              <a:spcAft>
+                <a:spcPts val="100"/>
+              </a:spcAft>
+              <a:defRPr sz="1500">
+                <a:solidFill>
+                  <a:srgbClr val="CCCCCC"/>
+                </a:solidFill>
+                <a:latin typeface="Consolas"/>
+              </a:defRPr>
+            </a:pPr>
+            <a:r>
+              <a:t>        "type": "categorical",</a:t>
+            </a:r>
+          </a:p>
+          <a:p>
+            <a:pPr>
+              <a:spcAft>
+                <a:spcPts val="100"/>
+              </a:spcAft>
+              <a:defRPr sz="1500">
+                <a:solidFill>
+                  <a:srgbClr val="CCCCCC"/>
+                </a:solidFill>
+                <a:latin typeface="Consolas"/>
+              </a:defRPr>
+            </a:pPr>
+            <a:r>
+              <a:t>        "levels": ["steel", "aluminum", "titanium"]</a:t>
+            </a:r>
+          </a:p>
+          <a:p>
+            <a:pPr>
+              <a:spcAft>
+                <a:spcPts val="100"/>
+              </a:spcAft>
+              <a:defRPr sz="1500">
+                <a:solidFill>
+                  <a:srgbClr val="CCCCCC"/>
+                </a:solidFill>
+                <a:latin typeface="Consolas"/>
+              </a:defRPr>
+            </a:pPr>
+            <a:r>
+              <a:t>    },</a:t>
+            </a:r>
+          </a:p>
+          <a:p>
+            <a:pPr>
+              <a:spcAft>
+                <a:spcPts val="100"/>
+              </a:spcAft>
+              <a:defRPr sz="1500">
+                <a:solidFill>
+                  <a:srgbClr val="CCCCCC"/>
+                </a:solidFill>
+                <a:latin typeface="Consolas"/>
+              </a:defRPr>
+            </a:pPr>
+            <a:r>
+              <a:t>    "quality_grade": {</a:t>
+            </a:r>
+          </a:p>
+          <a:p>
+            <a:pPr>
+              <a:spcAft>
+                <a:spcPts val="100"/>
+              </a:spcAft>
+              <a:defRPr sz="1500">
+                <a:solidFill>
+                  <a:srgbClr val="CCCCCC"/>
+                </a:solidFill>
+                <a:latin typeface="Consolas"/>
+              </a:defRPr>
+            </a:pPr>
+            <a:r>
+              <a:t>        "type": "ordinal",</a:t>
+            </a:r>
+          </a:p>
+          <a:p>
+            <a:pPr>
+              <a:spcAft>
+                <a:spcPts val="100"/>
+              </a:spcAft>
+              <a:defRPr sz="1500">
+                <a:solidFill>
+                  <a:srgbClr val="CCCCCC"/>
+                </a:solidFill>
+                <a:latin typeface="Consolas"/>
+              </a:defRPr>
+            </a:pPr>
+            <a:r>
+              <a:t>        "levels": ["low", "medium", "high"]</a:t>
+            </a:r>
+          </a:p>
+          <a:p>
+            <a:pPr>
+              <a:spcAft>
+                <a:spcPts val="100"/>
+              </a:spcAft>
+              <a:defRPr sz="1500">
+                <a:solidFill>
+                  <a:srgbClr val="CCCCCC"/>
+                </a:solidFill>
+                <a:latin typeface="Consolas"/>
+              </a:defRPr>
+            </a:pPr>
+            <a:r>
+              <a:t>    }</a:t>
+            </a:r>
+          </a:p>
+          <a:p>
+            <a:pPr>
+              <a:spcAft>
+                <a:spcPts val="100"/>
+              </a:spcAft>
+              <a:defRPr sz="1500">
+                <a:solidFill>
+                  <a:srgbClr val="CCCCCC"/>
+                </a:solidFill>
+                <a:latin typeface="Consolas"/>
+              </a:defRPr>
+            </a:pPr>
+            <a:r>
+              <a:t>}</a:t>
+            </a:r>
+          </a:p>
+        </p:txBody>
+      </p:sp>
+      <p:sp>
+        <p:nvSpPr>
+          <p:cNvPr id="7" name="TextBox 6"/>
+          <p:cNvSpPr txBox="1"/>
+          <p:nvPr/>
+        </p:nvSpPr>
+        <p:spPr>
+          <a:xfrm>
+            <a:off x="822960" y="5349240"/>
+            <a:ext cx="10058400" cy="640080"/>
+          </a:xfrm>
+          <a:prstGeom prst="rect">
+            <a:avLst/>
+          </a:prstGeom>
+          <a:noFill/>
+        </p:spPr>
+        <p:txBody>
           <a:bodyPr wrap="square">
             <a:spAutoFit/>
           </a:bodyPr>
           <a:lstStyle/>
           <a:p>
-            <a:pPr>
-              <a:defRPr sz="1600" i="1">
+            <a:pPr algn="l">
+              <a:defRPr sz="1400" b="0">
                 <a:solidFill>
                   <a:srgbClr val="666666"/>
                 </a:solidFill>
-                <a:latin typeface="Calibri"/>
-              </a:defRPr>
-            </a:pPr>
-            <a:r>
-              <a:t>Continuous factors use low/high; categorical and ordinal use levels list</a:t>
+                <a:latin typeface="Inter"/>
+              </a:defRPr>
+            </a:pPr>
+            <a:r>
+              <a:t>Continuous factors use low/high; categorical and ordinal use a levels list</a:t>
+            </a:r>
+          </a:p>
+        </p:txBody>
+      </p:sp>
+      <p:sp>
+        <p:nvSpPr>
+          <p:cNvPr id="8" name="TextBox 7"/>
+          <p:cNvSpPr txBox="1"/>
+          <p:nvPr/>
+        </p:nvSpPr>
+        <p:spPr>
+          <a:xfrm>
+            <a:off x="731520" y="6400800"/>
+            <a:ext cx="10058400" cy="365760"/>
+          </a:xfrm>
+          <a:prstGeom prst="rect">
+            <a:avLst/>
+          </a:prstGeom>
+          <a:noFill/>
+        </p:spPr>
+        <p:txBody>
+          <a:bodyPr wrap="square">
+            <a:spAutoFit/>
+          </a:bodyPr>
+          <a:lstStyle/>
+          <a:p>
+            <a:pPr algn="l">
+              <a:defRPr sz="1000" b="0">
+                <a:solidFill>
+                  <a:srgbClr val="999999"/>
+                </a:solidFill>
+                <a:latin typeface="Consolas"/>
+              </a:defRPr>
+            </a:pPr>
+            <a:r>
+              <a:t>© 2026 Martin J. Gallagher  |  GPL-3.0-or-later  |  doehelper.com</a:t>
             </a:r>
           </a:p>
         </p:txBody>
@@ -6427,7 +7343,7 @@
     <p:bg>
       <p:bgPr>
         <a:solidFill>
-          <a:srgbClr val="FFFFFF"/>
+          <a:srgbClr val="FAFAFA"/>
         </a:solidFill>
         <a:effectLst/>
       </p:bgPr>
@@ -6448,13 +7364,13 @@
         <p:spPr>
           <a:xfrm>
             <a:off x="0" y="0"/>
-            <a:ext cx="12191695" cy="54864"/>
+            <a:ext cx="12191695" cy="45720"/>
           </a:xfrm>
           <a:prstGeom prst="rect">
             <a:avLst/>
           </a:prstGeom>
           <a:solidFill>
-            <a:srgbClr val="007BFF"/>
+            <a:srgbClr val="5046E5"/>
           </a:solidFill>
           <a:ln>
             <a:noFill/>
@@ -6484,14 +7400,57 @@
       </p:sp>
       <p:sp>
         <p:nvSpPr>
-          <p:cNvPr id="3" name="TextBox 2"/>
+          <p:cNvPr id="3" name="Rectangle 2"/>
+          <p:cNvSpPr/>
+          <p:nvPr/>
+        </p:nvSpPr>
+        <p:spPr>
+          <a:xfrm>
+            <a:off x="548640" y="411480"/>
+            <a:ext cx="36576" cy="502920"/>
+          </a:xfrm>
+          <a:prstGeom prst="rect">
+            <a:avLst/>
+          </a:prstGeom>
+          <a:solidFill>
+            <a:srgbClr val="5046E5"/>
+          </a:solidFill>
+          <a:ln>
+            <a:noFill/>
+          </a:ln>
+        </p:spPr>
+        <p:style>
+          <a:lnRef idx="1">
+            <a:schemeClr val="accent1"/>
+          </a:lnRef>
+          <a:fillRef idx="3">
+            <a:schemeClr val="accent1"/>
+          </a:fillRef>
+          <a:effectRef idx="2">
+            <a:schemeClr val="accent1"/>
+          </a:effectRef>
+          <a:fontRef idx="minor">
+            <a:schemeClr val="lt1"/>
+          </a:fontRef>
+        </p:style>
+        <p:txBody>
+          <a:bodyPr rtlCol="0" anchor="ctr"/>
+          <a:lstStyle/>
+          <a:p>
+            <a:pPr algn="ctr"/>
+          </a:p>
+        </p:txBody>
+      </p:sp>
+      <p:sp>
+        <p:nvSpPr>
+          <p:cNvPr id="4" name="TextBox 3"/>
           <p:cNvSpPr txBox="1"/>
           <p:nvPr/>
         </p:nvSpPr>
         <p:spPr>
           <a:xfrm>
-            <a:off x="731520" y="365760"/>
-            <a:ext cx="10515600" cy="822960"/>
+            <a:off x="777240" y="365760"/>
+            <a:ext cx="10058400" cy="640080"/>
           </a:xfrm>
           <a:prstGeom prst="rect">
             <a:avLst/>
@@ -6504,12 +7463,12 @@
           </a:bodyPr>
           <a:lstStyle/>
           <a:p>
-            <a:pPr>
-              <a:defRPr sz="3200" b="1">
-                <a:solidFill>
-                  <a:srgbClr val="222222"/>
-                </a:solidFill>
-                <a:latin typeface="Calibri"/>
+            <a:pPr algn="l">
+              <a:defRPr sz="2800" b="1">
+                <a:solidFill>
+                  <a:srgbClr val="111111"/>
+                </a:solidFill>
+                <a:latin typeface="Inter"/>
               </a:defRPr>
             </a:pPr>
             <a:r>
@@ -6520,14 +7479,14 @@
       </p:sp>
       <p:sp>
         <p:nvSpPr>
-          <p:cNvPr id="4" name="TextBox 3"/>
+          <p:cNvPr id="5" name="TextBox 4"/>
           <p:cNvSpPr txBox="1"/>
           <p:nvPr/>
         </p:nvSpPr>
         <p:spPr>
           <a:xfrm>
-            <a:off x="914400" y="1463040"/>
-            <a:ext cx="10058400" cy="4754880"/>
+            <a:off x="822960" y="1188720"/>
+            <a:ext cx="10241280" cy="5120640"/>
           </a:xfrm>
           <a:prstGeom prst="rect">
             <a:avLst/>
@@ -6542,13 +7501,13 @@
           <a:p>
             <a:pPr>
               <a:spcAft>
-                <a:spcPts val="800"/>
-              </a:spcAft>
-              <a:defRPr sz="2200" b="0">
-                <a:solidFill>
-                  <a:srgbClr val="222222"/>
-                </a:solidFill>
-                <a:latin typeface="Calibri"/>
+                <a:spcPts val="600"/>
+              </a:spcAft>
+              <a:defRPr sz="1900">
+                <a:solidFill>
+                  <a:srgbClr val="333333"/>
+                </a:solidFill>
+                <a:latin typeface="Inter"/>
               </a:defRPr>
             </a:pPr>
             <a:r>
@@ -6558,13 +7517,13 @@
           <a:p>
             <a:pPr>
               <a:spcAft>
-                <a:spcPts val="800"/>
-              </a:spcAft>
-              <a:defRPr sz="2200" b="0">
-                <a:solidFill>
-                  <a:srgbClr val="222222"/>
-                </a:solidFill>
-                <a:latin typeface="Calibri"/>
+                <a:spcPts val="600"/>
+              </a:spcAft>
+              <a:defRPr sz="1900">
+                <a:solidFill>
+                  <a:srgbClr val="333333"/>
+                </a:solidFill>
+                <a:latin typeface="Inter"/>
               </a:defRPr>
             </a:pPr>
             <a:r>
@@ -6574,81 +7533,117 @@
           <a:p>
             <a:pPr lvl="1">
               <a:spcAft>
-                <a:spcPts val="800"/>
+                <a:spcPts val="600"/>
+              </a:spcAft>
+              <a:defRPr sz="1700">
+                <a:solidFill>
+                  <a:srgbClr val="666666"/>
+                </a:solidFill>
+                <a:latin typeface="Inter"/>
+              </a:defRPr>
+            </a:pPr>
+            <a:r>
+              <a:t>"maximize" — higher is better (yield, throughput)</a:t>
+            </a:r>
+          </a:p>
+          <a:p>
+            <a:pPr lvl="1">
+              <a:spcAft>
+                <a:spcPts val="600"/>
+              </a:spcAft>
+              <a:defRPr sz="1700">
+                <a:solidFill>
+                  <a:srgbClr val="666666"/>
+                </a:solidFill>
+                <a:latin typeface="Inter"/>
+              </a:defRPr>
+            </a:pPr>
+            <a:r>
+              <a:t>"minimize" — lower is better (cost, latency, defects)</a:t>
+            </a:r>
+          </a:p>
+          <a:p>
+            <a:pPr lvl="1">
+              <a:spcAft>
+                <a:spcPts val="600"/>
+              </a:spcAft>
+              <a:defRPr sz="1700">
+                <a:solidFill>
+                  <a:srgbClr val="666666"/>
+                </a:solidFill>
+                <a:latin typeface="Inter"/>
+              </a:defRPr>
+            </a:pPr>
+            <a:r>
+              <a:t>A specific number — hit a target (pH = 7.0)</a:t>
+            </a:r>
+          </a:p>
+          <a:p>
+            <a:pPr>
+              <a:spcAft>
+                <a:spcPts val="600"/>
               </a:spcAft>
               <a:defRPr sz="1900">
                 <a:solidFill>
-                  <a:srgbClr val="222222"/>
-                </a:solidFill>
-                <a:latin typeface="Calibri"/>
-              </a:defRPr>
-            </a:pPr>
-            <a:r>
-              <a:t>"maximize" - higher is better (yield, throughput)</a:t>
+                  <a:srgbClr val="333333"/>
+                </a:solidFill>
+                <a:latin typeface="Inter"/>
+              </a:defRPr>
+            </a:pPr>
+            <a:r>
+              <a:t>Multiple responses are supported for multi-objective optimisation</a:t>
             </a:r>
           </a:p>
           <a:p>
             <a:pPr lvl="1">
               <a:spcAft>
-                <a:spcPts val="800"/>
-              </a:spcAft>
-              <a:defRPr sz="1900">
-                <a:solidFill>
-                  <a:srgbClr val="222222"/>
-                </a:solidFill>
-                <a:latin typeface="Calibri"/>
-              </a:defRPr>
-            </a:pPr>
-            <a:r>
-              <a:t>"minimize" - lower is better (cost, latency, defects)</a:t>
-            </a:r>
-          </a:p>
-          <a:p>
-            <a:pPr lvl="1">
-              <a:spcAft>
-                <a:spcPts val="800"/>
-              </a:spcAft>
-              <a:defRPr sz="1900">
-                <a:solidFill>
-                  <a:srgbClr val="222222"/>
-                </a:solidFill>
-                <a:latin typeface="Calibri"/>
-              </a:defRPr>
-            </a:pPr>
-            <a:r>
-              <a:t>A specific numeric value - hit a target (pH = 7.0)</a:t>
-            </a:r>
-          </a:p>
-          <a:p>
-            <a:pPr>
-              <a:spcAft>
-                <a:spcPts val="800"/>
-              </a:spcAft>
-              <a:defRPr sz="2200" b="0">
-                <a:solidFill>
-                  <a:srgbClr val="222222"/>
-                </a:solidFill>
-                <a:latin typeface="Calibri"/>
-              </a:defRPr>
-            </a:pPr>
-            <a:r>
-              <a:t>Multiple responses are supported for multi-objective optimisation</a:t>
-            </a:r>
-          </a:p>
-          <a:p>
-            <a:pPr lvl="1">
-              <a:spcAft>
-                <a:spcPts val="800"/>
-              </a:spcAft>
-              <a:defRPr sz="1900">
-                <a:solidFill>
-                  <a:srgbClr val="222222"/>
-                </a:solidFill>
-                <a:latin typeface="Calibri"/>
+                <a:spcPts val="600"/>
+              </a:spcAft>
+              <a:defRPr sz="1700">
+                <a:solidFill>
+                  <a:srgbClr val="666666"/>
+                </a:solidFill>
+                <a:latin typeface="Inter"/>
               </a:defRPr>
             </a:pPr>
             <a:r>
               <a:t>doe-helper uses desirability functions to balance trade-offs</a:t>
+            </a:r>
+          </a:p>
+        </p:txBody>
+      </p:sp>
+      <p:sp>
+        <p:nvSpPr>
+          <p:cNvPr id="6" name="TextBox 5"/>
+          <p:cNvSpPr txBox="1"/>
+          <p:nvPr/>
+        </p:nvSpPr>
+        <p:spPr>
+          <a:xfrm>
+            <a:off x="731520" y="6400800"/>
+            <a:ext cx="10058400" cy="365760"/>
+          </a:xfrm>
+          <a:prstGeom prst="rect">
+            <a:avLst/>
+          </a:prstGeom>
+          <a:noFill/>
+        </p:spPr>
+        <p:txBody>
+          <a:bodyPr wrap="square">
+            <a:spAutoFit/>
+          </a:bodyPr>
+          <a:lstStyle/>
+          <a:p>
+            <a:pPr algn="l">
+              <a:defRPr sz="1000" b="0">
+                <a:solidFill>
+                  <a:srgbClr val="999999"/>
+                </a:solidFill>
+                <a:latin typeface="Consolas"/>
+              </a:defRPr>
+            </a:pPr>
+            <a:r>
+              <a:t>© 2026 Martin J. Gallagher  |  GPL-3.0-or-later  |  doehelper.com</a:t>
             </a:r>
           </a:p>
         </p:txBody>
@@ -6667,7 +7662,7 @@
     <p:bg>
       <p:bgPr>
         <a:solidFill>
-          <a:srgbClr val="FFFFFF"/>
+          <a:srgbClr val="FAFAFA"/>
         </a:solidFill>
         <a:effectLst/>
       </p:bgPr>
@@ -6688,13 +7683,13 @@
         <p:spPr>
           <a:xfrm>
             <a:off x="0" y="0"/>
-            <a:ext cx="12191695" cy="54864"/>
+            <a:ext cx="12191695" cy="45720"/>
           </a:xfrm>
           <a:prstGeom prst="rect">
             <a:avLst/>
           </a:prstGeom>
           <a:solidFill>
-            <a:srgbClr val="00C853"/>
+            <a:srgbClr val="5046E5"/>
           </a:solidFill>
           <a:ln>
             <a:noFill/>
@@ -6724,56 +7719,20 @@
       </p:sp>
       <p:sp>
         <p:nvSpPr>
-          <p:cNvPr id="3" name="TextBox 2"/>
-          <p:cNvSpPr txBox="1"/>
+          <p:cNvPr id="3" name="Rectangle 2"/>
+          <p:cNvSpPr/>
           <p:nvPr/>
         </p:nvSpPr>
         <p:spPr>
           <a:xfrm>
-            <a:off x="731520" y="365760"/>
-            <a:ext cx="10515600" cy="822960"/>
+            <a:off x="548640" y="411480"/>
+            <a:ext cx="36576" cy="502920"/>
           </a:xfrm>
           <a:prstGeom prst="rect">
             <a:avLst/>
           </a:prstGeom>
-          <a:noFill/>
-        </p:spPr>
-        <p:txBody>
-          <a:bodyPr wrap="square">
-            <a:spAutoFit/>
-          </a:bodyPr>
-          <a:lstStyle/>
-          <a:p>
-            <a:pPr>
-              <a:defRPr sz="3000" b="1">
-                <a:solidFill>
-                  <a:srgbClr val="222222"/>
-                </a:solidFill>
-                <a:latin typeface="Calibri"/>
-              </a:defRPr>
-            </a:pPr>
-            <a:r>
-              <a:t>Response Configuration Examples</a:t>
-            </a:r>
-          </a:p>
-        </p:txBody>
-      </p:sp>
-      <p:sp>
-        <p:nvSpPr>
-          <p:cNvPr id="4" name="Rounded Rectangle 3"/>
-          <p:cNvSpPr/>
-          <p:nvPr/>
-        </p:nvSpPr>
-        <p:spPr>
-          <a:xfrm>
-            <a:off x="731520" y="1371600"/>
-            <a:ext cx="10515600" cy="4114800"/>
-          </a:xfrm>
-          <a:prstGeom prst="roundRect">
-            <a:avLst/>
-          </a:prstGeom>
           <a:solidFill>
-            <a:srgbClr val="2D2D2D"/>
+            <a:srgbClr val="5046E5"/>
           </a:solidFill>
           <a:ln>
             <a:noFill/>
@@ -6794,230 +7753,216 @@
           </a:fontRef>
         </p:style>
         <p:txBody>
-          <a:bodyPr rtlCol="0" anchor="ctr" wrap="square" lIns="274320" tIns="274320"/>
-          <a:lstStyle/>
-          <a:p>
-            <a:pPr algn="ctr">
-              <a:spcAft>
-                <a:spcPts val="200"/>
-              </a:spcAft>
-              <a:defRPr sz="1800">
-                <a:solidFill>
-                  <a:srgbClr val="D4D4D4"/>
-                </a:solidFill>
-                <a:latin typeface="Consolas"/>
-              </a:defRPr>
-            </a:pPr>
-            <a:r>
-              <a:t>"responses": {</a:t>
-            </a:r>
-          </a:p>
-          <a:p>
-            <a:pPr>
-              <a:spcAft>
-                <a:spcPts val="200"/>
-              </a:spcAft>
-              <a:defRPr sz="1800">
-                <a:solidFill>
-                  <a:srgbClr val="D4D4D4"/>
-                </a:solidFill>
-                <a:latin typeface="Consolas"/>
-              </a:defRPr>
-            </a:pPr>
-            <a:r>
-              <a:t>  "yield": {</a:t>
-            </a:r>
-          </a:p>
-          <a:p>
-            <a:pPr>
-              <a:spcAft>
-                <a:spcPts val="200"/>
-              </a:spcAft>
-              <a:defRPr sz="1800">
-                <a:solidFill>
-                  <a:srgbClr val="D4D4D4"/>
-                </a:solidFill>
-                <a:latin typeface="Consolas"/>
-              </a:defRPr>
-            </a:pPr>
-            <a:r>
-              <a:t>    "units": "%",</a:t>
-            </a:r>
-          </a:p>
-          <a:p>
-            <a:pPr>
-              <a:spcAft>
-                <a:spcPts val="200"/>
-              </a:spcAft>
-              <a:defRPr sz="1800">
-                <a:solidFill>
-                  <a:srgbClr val="D4D4D4"/>
-                </a:solidFill>
-                <a:latin typeface="Consolas"/>
-              </a:defRPr>
-            </a:pPr>
-            <a:r>
-              <a:t>    "target": "maximize"</a:t>
-            </a:r>
-          </a:p>
-          <a:p>
-            <a:pPr>
-              <a:spcAft>
-                <a:spcPts val="200"/>
-              </a:spcAft>
-              <a:defRPr sz="1800">
-                <a:solidFill>
-                  <a:srgbClr val="D4D4D4"/>
-                </a:solidFill>
-                <a:latin typeface="Consolas"/>
-              </a:defRPr>
-            </a:pPr>
-            <a:r>
-              <a:t>  },</a:t>
-            </a:r>
-          </a:p>
-          <a:p>
-            <a:pPr>
-              <a:spcAft>
-                <a:spcPts val="200"/>
-              </a:spcAft>
-              <a:defRPr sz="1800">
-                <a:solidFill>
-                  <a:srgbClr val="D4D4D4"/>
-                </a:solidFill>
-                <a:latin typeface="Consolas"/>
-              </a:defRPr>
-            </a:pPr>
-            <a:r>
-              <a:t>  "cost": {</a:t>
-            </a:r>
-          </a:p>
-          <a:p>
-            <a:pPr>
-              <a:spcAft>
-                <a:spcPts val="200"/>
-              </a:spcAft>
-              <a:defRPr sz="1800">
-                <a:solidFill>
-                  <a:srgbClr val="D4D4D4"/>
-                </a:solidFill>
-                <a:latin typeface="Consolas"/>
-              </a:defRPr>
-            </a:pPr>
-            <a:r>
-              <a:t>    "units": "USD",</a:t>
-            </a:r>
-          </a:p>
-          <a:p>
-            <a:pPr>
-              <a:spcAft>
-                <a:spcPts val="200"/>
-              </a:spcAft>
-              <a:defRPr sz="1800">
-                <a:solidFill>
-                  <a:srgbClr val="D4D4D4"/>
-                </a:solidFill>
-                <a:latin typeface="Consolas"/>
-              </a:defRPr>
-            </a:pPr>
-            <a:r>
-              <a:t>    "target": "minimize"</a:t>
-            </a:r>
-          </a:p>
-          <a:p>
-            <a:pPr>
-              <a:spcAft>
-                <a:spcPts val="200"/>
-              </a:spcAft>
-              <a:defRPr sz="1800">
-                <a:solidFill>
-                  <a:srgbClr val="D4D4D4"/>
-                </a:solidFill>
-                <a:latin typeface="Consolas"/>
-              </a:defRPr>
-            </a:pPr>
-            <a:r>
-              <a:t>  },</a:t>
-            </a:r>
-          </a:p>
-          <a:p>
-            <a:pPr>
-              <a:spcAft>
-                <a:spcPts val="200"/>
-              </a:spcAft>
-              <a:defRPr sz="1800">
-                <a:solidFill>
-                  <a:srgbClr val="D4D4D4"/>
-                </a:solidFill>
-                <a:latin typeface="Consolas"/>
-              </a:defRPr>
-            </a:pPr>
-            <a:r>
-              <a:t>  "purity": {</a:t>
-            </a:r>
-          </a:p>
-          <a:p>
-            <a:pPr>
-              <a:spcAft>
-                <a:spcPts val="200"/>
-              </a:spcAft>
-              <a:defRPr sz="1800">
-                <a:solidFill>
-                  <a:srgbClr val="D4D4D4"/>
-                </a:solidFill>
-                <a:latin typeface="Consolas"/>
-              </a:defRPr>
-            </a:pPr>
-            <a:r>
-              <a:t>    "units": "%",</a:t>
-            </a:r>
-          </a:p>
-          <a:p>
-            <a:pPr>
-              <a:spcAft>
-                <a:spcPts val="200"/>
-              </a:spcAft>
-              <a:defRPr sz="1800">
-                <a:solidFill>
-                  <a:srgbClr val="D4D4D4"/>
-                </a:solidFill>
-                <a:latin typeface="Consolas"/>
-              </a:defRPr>
-            </a:pPr>
-            <a:r>
-              <a:t>    "target": 99.5</a:t>
-            </a:r>
-          </a:p>
-          <a:p>
-            <a:pPr>
-              <a:spcAft>
-                <a:spcPts val="200"/>
-              </a:spcAft>
-              <a:defRPr sz="1800">
-                <a:solidFill>
-                  <a:srgbClr val="D4D4D4"/>
-                </a:solidFill>
-                <a:latin typeface="Consolas"/>
-              </a:defRPr>
-            </a:pPr>
-            <a:r>
-              <a:t>  }</a:t>
-            </a:r>
-          </a:p>
-          <a:p>
-            <a:pPr>
-              <a:spcAft>
-                <a:spcPts val="200"/>
-              </a:spcAft>
-              <a:defRPr sz="1800">
-                <a:solidFill>
-                  <a:srgbClr val="D4D4D4"/>
-                </a:solidFill>
-                <a:latin typeface="Consolas"/>
-              </a:defRPr>
-            </a:pPr>
-            <a:r>
-              <a:t>}</a:t>
+          <a:bodyPr rtlCol="0" anchor="ctr"/>
+          <a:lstStyle/>
+          <a:p>
+            <a:pPr algn="ctr"/>
+          </a:p>
+        </p:txBody>
+      </p:sp>
+      <p:sp>
+        <p:nvSpPr>
+          <p:cNvPr id="4" name="TextBox 3"/>
+          <p:cNvSpPr txBox="1"/>
+          <p:nvPr/>
+        </p:nvSpPr>
+        <p:spPr>
+          <a:xfrm>
+            <a:off x="777240" y="365760"/>
+            <a:ext cx="10058400" cy="640080"/>
+          </a:xfrm>
+          <a:prstGeom prst="rect">
+            <a:avLst/>
+          </a:prstGeom>
+          <a:noFill/>
+        </p:spPr>
+        <p:txBody>
+          <a:bodyPr wrap="square">
+            <a:spAutoFit/>
+          </a:bodyPr>
+          <a:lstStyle/>
+          <a:p>
+            <a:pPr algn="l">
+              <a:defRPr sz="2800" b="1">
+                <a:solidFill>
+                  <a:srgbClr val="111111"/>
+                </a:solidFill>
+                <a:latin typeface="Inter"/>
+              </a:defRPr>
+            </a:pPr>
+            <a:r>
+              <a:t>Design Settings</a:t>
+            </a:r>
+          </a:p>
+        </p:txBody>
+      </p:sp>
+      <p:sp>
+        <p:nvSpPr>
+          <p:cNvPr id="5" name="TextBox 4"/>
+          <p:cNvSpPr txBox="1"/>
+          <p:nvPr/>
+        </p:nvSpPr>
+        <p:spPr>
+          <a:xfrm>
+            <a:off x="822960" y="1188720"/>
+            <a:ext cx="10241280" cy="5120640"/>
+          </a:xfrm>
+          <a:prstGeom prst="rect">
+            <a:avLst/>
+          </a:prstGeom>
+          <a:noFill/>
+        </p:spPr>
+        <p:txBody>
+          <a:bodyPr wrap="square">
+            <a:spAutoFit/>
+          </a:bodyPr>
+          <a:lstStyle/>
+          <a:p>
+            <a:pPr>
+              <a:spcAft>
+                <a:spcPts val="600"/>
+              </a:spcAft>
+              <a:defRPr sz="1900">
+                <a:solidFill>
+                  <a:srgbClr val="333333"/>
+                </a:solidFill>
+                <a:latin typeface="Inter"/>
+              </a:defRPr>
+            </a:pPr>
+            <a:r>
+              <a:t>The "design" section controls experiment structure:</a:t>
+            </a:r>
+          </a:p>
+          <a:p>
+            <a:pPr lvl="1">
+              <a:spcAft>
+                <a:spcPts val="600"/>
+              </a:spcAft>
+              <a:defRPr sz="1700">
+                <a:solidFill>
+                  <a:srgbClr val="666666"/>
+                </a:solidFill>
+                <a:latin typeface="Inter"/>
+              </a:defRPr>
+            </a:pPr>
+            <a:r>
+              <a:t>type: design type (full_factorial, ccd, box_behnken, etc.)</a:t>
+            </a:r>
+          </a:p>
+          <a:p>
+            <a:pPr lvl="1">
+              <a:spcAft>
+                <a:spcPts val="600"/>
+              </a:spcAft>
+              <a:defRPr sz="1700">
+                <a:solidFill>
+                  <a:srgbClr val="666666"/>
+                </a:solidFill>
+                <a:latin typeface="Inter"/>
+              </a:defRPr>
+            </a:pPr>
+            <a:r>
+              <a:t>randomize: true/false — randomise run order (default: true)</a:t>
+            </a:r>
+          </a:p>
+          <a:p>
+            <a:pPr lvl="1">
+              <a:spcAft>
+                <a:spcPts val="600"/>
+              </a:spcAft>
+              <a:defRPr sz="1700">
+                <a:solidFill>
+                  <a:srgbClr val="666666"/>
+                </a:solidFill>
+                <a:latin typeface="Inter"/>
+              </a:defRPr>
+            </a:pPr>
+            <a:r>
+              <a:t>replicates: number of times to repeat each run</a:t>
+            </a:r>
+          </a:p>
+          <a:p>
+            <a:pPr lvl="1">
+              <a:spcAft>
+                <a:spcPts val="600"/>
+              </a:spcAft>
+              <a:defRPr sz="1700">
+                <a:solidFill>
+                  <a:srgbClr val="666666"/>
+                </a:solidFill>
+                <a:latin typeface="Inter"/>
+              </a:defRPr>
+            </a:pPr>
+            <a:r>
+              <a:t>center_points: add center points for curvature detection</a:t>
+            </a:r>
+          </a:p>
+          <a:p>
+            <a:pPr lvl="1">
+              <a:spcAft>
+                <a:spcPts val="600"/>
+              </a:spcAft>
+              <a:defRPr sz="1700">
+                <a:solidFill>
+                  <a:srgbClr val="666666"/>
+                </a:solidFill>
+                <a:latin typeface="Inter"/>
+              </a:defRPr>
+            </a:pPr>
+            <a:r>
+              <a:t>blocks: number of blocks for nuisance variables</a:t>
+            </a:r>
+          </a:p>
+          <a:p>
+            <a:pPr lvl="1">
+              <a:spcAft>
+                <a:spcPts val="600"/>
+              </a:spcAft>
+              <a:defRPr sz="1700">
+                <a:solidFill>
+                  <a:srgbClr val="666666"/>
+                </a:solidFill>
+                <a:latin typeface="Inter"/>
+              </a:defRPr>
+            </a:pPr>
+            <a:r>
+              <a:t>resolution: for fractional factorials (III, IV, V)</a:t>
+            </a:r>
+          </a:p>
+        </p:txBody>
+      </p:sp>
+      <p:sp>
+        <p:nvSpPr>
+          <p:cNvPr id="6" name="TextBox 5"/>
+          <p:cNvSpPr txBox="1"/>
+          <p:nvPr/>
+        </p:nvSpPr>
+        <p:spPr>
+          <a:xfrm>
+            <a:off x="731520" y="6400800"/>
+            <a:ext cx="10058400" cy="365760"/>
+          </a:xfrm>
+          <a:prstGeom prst="rect">
+            <a:avLst/>
+          </a:prstGeom>
+          <a:noFill/>
+        </p:spPr>
+        <p:txBody>
+          <a:bodyPr wrap="square">
+            <a:spAutoFit/>
+          </a:bodyPr>
+          <a:lstStyle/>
+          <a:p>
+            <a:pPr algn="l">
+              <a:defRPr sz="1000" b="0">
+                <a:solidFill>
+                  <a:srgbClr val="999999"/>
+                </a:solidFill>
+                <a:latin typeface="Consolas"/>
+              </a:defRPr>
+            </a:pPr>
+            <a:r>
+              <a:t>© 2026 Martin J. Gallagher  |  GPL-3.0-or-later  |  doehelper.com</a:t>
             </a:r>
           </a:p>
         </p:txBody>
@@ -7036,7 +7981,7 @@
     <p:bg>
       <p:bgPr>
         <a:solidFill>
-          <a:srgbClr val="FFFFFF"/>
+          <a:srgbClr val="FAFAFA"/>
         </a:solidFill>
         <a:effectLst/>
       </p:bgPr>
@@ -7057,13 +8002,13 @@
         <p:spPr>
           <a:xfrm>
             <a:off x="0" y="0"/>
-            <a:ext cx="12191695" cy="54864"/>
+            <a:ext cx="12191695" cy="45720"/>
           </a:xfrm>
           <a:prstGeom prst="rect">
             <a:avLst/>
           </a:prstGeom>
           <a:solidFill>
-            <a:srgbClr val="007BFF"/>
+            <a:srgbClr val="0D9488"/>
           </a:solidFill>
           <a:ln>
             <a:noFill/>
@@ -7099,8 +8044,8 @@
         </p:nvSpPr>
         <p:spPr>
           <a:xfrm>
-            <a:off x="731520" y="365760"/>
-            <a:ext cx="10515600" cy="822960"/>
+            <a:off x="777240" y="320040"/>
+            <a:ext cx="10058400" cy="548640"/>
           </a:xfrm>
           <a:prstGeom prst="rect">
             <a:avLst/>
@@ -7113,30 +8058,73 @@
           </a:bodyPr>
           <a:lstStyle/>
           <a:p>
-            <a:pPr>
-              <a:defRPr sz="3200" b="1">
-                <a:solidFill>
-                  <a:srgbClr val="222222"/>
-                </a:solidFill>
-                <a:latin typeface="Calibri"/>
-              </a:defRPr>
-            </a:pPr>
-            <a:r>
-              <a:t>Design Settings</a:t>
-            </a:r>
-          </a:p>
-        </p:txBody>
-      </p:sp>
-      <p:sp>
-        <p:nvSpPr>
-          <p:cNvPr id="4" name="TextBox 3"/>
+            <a:pPr algn="l">
+              <a:defRPr sz="2600" b="1">
+                <a:solidFill>
+                  <a:srgbClr val="111111"/>
+                </a:solidFill>
+                <a:latin typeface="Inter"/>
+              </a:defRPr>
+            </a:pPr>
+            <a:r>
+              <a:t>Complete config.json Example</a:t>
+            </a:r>
+          </a:p>
+        </p:txBody>
+      </p:sp>
+      <p:sp>
+        <p:nvSpPr>
+          <p:cNvPr id="4" name="Rectangle 3"/>
+          <p:cNvSpPr/>
+          <p:nvPr/>
+        </p:nvSpPr>
+        <p:spPr>
+          <a:xfrm>
+            <a:off x="548640" y="1051560"/>
+            <a:ext cx="10972800" cy="320040"/>
+          </a:xfrm>
+          <a:prstGeom prst="rect">
+            <a:avLst/>
+          </a:prstGeom>
+          <a:solidFill>
+            <a:srgbClr val="222222"/>
+          </a:solidFill>
+          <a:ln>
+            <a:noFill/>
+          </a:ln>
+        </p:spPr>
+        <p:style>
+          <a:lnRef idx="1">
+            <a:schemeClr val="accent1"/>
+          </a:lnRef>
+          <a:fillRef idx="3">
+            <a:schemeClr val="accent1"/>
+          </a:fillRef>
+          <a:effectRef idx="2">
+            <a:schemeClr val="accent1"/>
+          </a:effectRef>
+          <a:fontRef idx="minor">
+            <a:schemeClr val="lt1"/>
+          </a:fontRef>
+        </p:style>
+        <p:txBody>
+          <a:bodyPr rtlCol="0" anchor="ctr"/>
+          <a:lstStyle/>
+          <a:p>
+            <a:pPr algn="ctr"/>
+          </a:p>
+        </p:txBody>
+      </p:sp>
+      <p:sp>
+        <p:nvSpPr>
+          <p:cNvPr id="5" name="TextBox 4"/>
           <p:cNvSpPr txBox="1"/>
           <p:nvPr/>
         </p:nvSpPr>
         <p:spPr>
           <a:xfrm>
-            <a:off x="914400" y="1463040"/>
-            <a:ext cx="10058400" cy="4754880"/>
+            <a:off x="822960" y="1051560"/>
+            <a:ext cx="3657600" cy="320040"/>
           </a:xfrm>
           <a:prstGeom prst="rect">
             <a:avLst/>
@@ -7144,120 +8132,389 @@
           <a:noFill/>
         </p:spPr>
         <p:txBody>
+          <a:bodyPr wrap="square" anchor="ctr">
+            <a:spAutoFit/>
+          </a:bodyPr>
+          <a:lstStyle/>
+          <a:p>
+            <a:pPr algn="l">
+              <a:defRPr sz="1000" b="0">
+                <a:solidFill>
+                  <a:srgbClr val="999999"/>
+                </a:solidFill>
+                <a:latin typeface="Consolas"/>
+              </a:defRPr>
+            </a:pPr>
+            <a:r>
+              <a:t>terminal</a:t>
+            </a:r>
+          </a:p>
+        </p:txBody>
+      </p:sp>
+      <p:sp>
+        <p:nvSpPr>
+          <p:cNvPr id="6" name="Rounded Rectangle 5"/>
+          <p:cNvSpPr/>
+          <p:nvPr/>
+        </p:nvSpPr>
+        <p:spPr>
+          <a:xfrm>
+            <a:off x="548640" y="1371600"/>
+            <a:ext cx="10972800" cy="3931920"/>
+          </a:xfrm>
+          <a:prstGeom prst="roundRect">
+            <a:avLst/>
+          </a:prstGeom>
+          <a:solidFill>
+            <a:srgbClr val="1A1A1A"/>
+          </a:solidFill>
+          <a:ln>
+            <a:noFill/>
+          </a:ln>
+        </p:spPr>
+        <p:style>
+          <a:lnRef idx="1">
+            <a:schemeClr val="accent1"/>
+          </a:lnRef>
+          <a:fillRef idx="3">
+            <a:schemeClr val="accent1"/>
+          </a:fillRef>
+          <a:effectRef idx="2">
+            <a:schemeClr val="accent1"/>
+          </a:effectRef>
+          <a:fontRef idx="minor">
+            <a:schemeClr val="lt1"/>
+          </a:fontRef>
+        </p:style>
+        <p:txBody>
+          <a:bodyPr rtlCol="0" anchor="ctr" wrap="square" lIns="274320" tIns="182880" rIns="274320"/>
+          <a:lstStyle/>
+          <a:p>
+            <a:pPr algn="ctr">
+              <a:spcAft>
+                <a:spcPts val="100"/>
+              </a:spcAft>
+              <a:defRPr sz="1500">
+                <a:solidFill>
+                  <a:srgbClr val="CCCCCC"/>
+                </a:solidFill>
+                <a:latin typeface="Consolas"/>
+              </a:defRPr>
+            </a:pPr>
+            <a:r>
+              <a:t>{</a:t>
+            </a:r>
+          </a:p>
+          <a:p>
+            <a:pPr>
+              <a:spcAft>
+                <a:spcPts val="100"/>
+              </a:spcAft>
+              <a:defRPr sz="1500">
+                <a:solidFill>
+                  <a:srgbClr val="CCCCCC"/>
+                </a:solidFill>
+                <a:latin typeface="Consolas"/>
+              </a:defRPr>
+            </a:pPr>
+            <a:r>
+              <a:t>  "factors": {</a:t>
+            </a:r>
+          </a:p>
+          <a:p>
+            <a:pPr>
+              <a:spcAft>
+                <a:spcPts val="100"/>
+              </a:spcAft>
+              <a:defRPr sz="1500">
+                <a:solidFill>
+                  <a:srgbClr val="CCCCCC"/>
+                </a:solidFill>
+                <a:latin typeface="Consolas"/>
+              </a:defRPr>
+            </a:pPr>
+            <a:r>
+              <a:t>    "temperature": {"low": 150, "high": 200, "units": "C"},</a:t>
+            </a:r>
+          </a:p>
+          <a:p>
+            <a:pPr>
+              <a:spcAft>
+                <a:spcPts val="100"/>
+              </a:spcAft>
+              <a:defRPr sz="1500">
+                <a:solidFill>
+                  <a:srgbClr val="CCCCCC"/>
+                </a:solidFill>
+                <a:latin typeface="Consolas"/>
+              </a:defRPr>
+            </a:pPr>
+            <a:r>
+              <a:t>    "pressure":    {"low": 1.0, "high": 5.0, "units": "bar"},</a:t>
+            </a:r>
+          </a:p>
+          <a:p>
+            <a:pPr>
+              <a:spcAft>
+                <a:spcPts val="100"/>
+              </a:spcAft>
+              <a:defRPr sz="1500">
+                <a:solidFill>
+                  <a:srgbClr val="CCCCCC"/>
+                </a:solidFill>
+                <a:latin typeface="Consolas"/>
+              </a:defRPr>
+            </a:pPr>
+            <a:r>
+              <a:t>    "catalyst":    {"low": 0.5, "high": 1.5, "units": "g"}</a:t>
+            </a:r>
+          </a:p>
+          <a:p>
+            <a:pPr>
+              <a:spcAft>
+                <a:spcPts val="100"/>
+              </a:spcAft>
+              <a:defRPr sz="1500">
+                <a:solidFill>
+                  <a:srgbClr val="CCCCCC"/>
+                </a:solidFill>
+                <a:latin typeface="Consolas"/>
+              </a:defRPr>
+            </a:pPr>
+            <a:r>
+              <a:t>  },</a:t>
+            </a:r>
+          </a:p>
+          <a:p>
+            <a:pPr>
+              <a:spcAft>
+                <a:spcPts val="100"/>
+              </a:spcAft>
+              <a:defRPr sz="1500">
+                <a:solidFill>
+                  <a:srgbClr val="CCCCCC"/>
+                </a:solidFill>
+                <a:latin typeface="Consolas"/>
+              </a:defRPr>
+            </a:pPr>
+            <a:r>
+              <a:t>  "responses": {</a:t>
+            </a:r>
+          </a:p>
+          <a:p>
+            <a:pPr>
+              <a:spcAft>
+                <a:spcPts val="100"/>
+              </a:spcAft>
+              <a:defRPr sz="1500">
+                <a:solidFill>
+                  <a:srgbClr val="CCCCCC"/>
+                </a:solidFill>
+                <a:latin typeface="Consolas"/>
+              </a:defRPr>
+            </a:pPr>
+            <a:r>
+              <a:t>    "yield":  {"units": "%", "target": "maximize"},</a:t>
+            </a:r>
+          </a:p>
+          <a:p>
+            <a:pPr>
+              <a:spcAft>
+                <a:spcPts val="100"/>
+              </a:spcAft>
+              <a:defRPr sz="1500">
+                <a:solidFill>
+                  <a:srgbClr val="CCCCCC"/>
+                </a:solidFill>
+                <a:latin typeface="Consolas"/>
+              </a:defRPr>
+            </a:pPr>
+            <a:r>
+              <a:t>    "purity": {"units": "%", "target": "maximize"}</a:t>
+            </a:r>
+          </a:p>
+          <a:p>
+            <a:pPr>
+              <a:spcAft>
+                <a:spcPts val="100"/>
+              </a:spcAft>
+              <a:defRPr sz="1500">
+                <a:solidFill>
+                  <a:srgbClr val="CCCCCC"/>
+                </a:solidFill>
+                <a:latin typeface="Consolas"/>
+              </a:defRPr>
+            </a:pPr>
+            <a:r>
+              <a:t>  },</a:t>
+            </a:r>
+          </a:p>
+          <a:p>
+            <a:pPr>
+              <a:spcAft>
+                <a:spcPts val="100"/>
+              </a:spcAft>
+              <a:defRPr sz="1500">
+                <a:solidFill>
+                  <a:srgbClr val="CCCCCC"/>
+                </a:solidFill>
+                <a:latin typeface="Consolas"/>
+              </a:defRPr>
+            </a:pPr>
+            <a:r>
+              <a:t>  "design": {</a:t>
+            </a:r>
+          </a:p>
+          <a:p>
+            <a:pPr>
+              <a:spcAft>
+                <a:spcPts val="100"/>
+              </a:spcAft>
+              <a:defRPr sz="1500">
+                <a:solidFill>
+                  <a:srgbClr val="CCCCCC"/>
+                </a:solidFill>
+                <a:latin typeface="Consolas"/>
+              </a:defRPr>
+            </a:pPr>
+            <a:r>
+              <a:t>    "type": "full_factorial",</a:t>
+            </a:r>
+          </a:p>
+          <a:p>
+            <a:pPr>
+              <a:spcAft>
+                <a:spcPts val="100"/>
+              </a:spcAft>
+              <a:defRPr sz="1500">
+                <a:solidFill>
+                  <a:srgbClr val="CCCCCC"/>
+                </a:solidFill>
+                <a:latin typeface="Consolas"/>
+              </a:defRPr>
+            </a:pPr>
+            <a:r>
+              <a:t>    "randomize": true,</a:t>
+            </a:r>
+          </a:p>
+          <a:p>
+            <a:pPr>
+              <a:spcAft>
+                <a:spcPts val="100"/>
+              </a:spcAft>
+              <a:defRPr sz="1500">
+                <a:solidFill>
+                  <a:srgbClr val="CCCCCC"/>
+                </a:solidFill>
+                <a:latin typeface="Consolas"/>
+              </a:defRPr>
+            </a:pPr>
+            <a:r>
+              <a:t>    "center_points": 3</a:t>
+            </a:r>
+          </a:p>
+          <a:p>
+            <a:pPr>
+              <a:spcAft>
+                <a:spcPts val="100"/>
+              </a:spcAft>
+              <a:defRPr sz="1500">
+                <a:solidFill>
+                  <a:srgbClr val="CCCCCC"/>
+                </a:solidFill>
+                <a:latin typeface="Consolas"/>
+              </a:defRPr>
+            </a:pPr>
+            <a:r>
+              <a:t>  }</a:t>
+            </a:r>
+          </a:p>
+          <a:p>
+            <a:pPr>
+              <a:spcAft>
+                <a:spcPts val="100"/>
+              </a:spcAft>
+              <a:defRPr sz="1500">
+                <a:solidFill>
+                  <a:srgbClr val="CCCCCC"/>
+                </a:solidFill>
+                <a:latin typeface="Consolas"/>
+              </a:defRPr>
+            </a:pPr>
+            <a:r>
+              <a:t>}</a:t>
+            </a:r>
+          </a:p>
+        </p:txBody>
+      </p:sp>
+      <p:sp>
+        <p:nvSpPr>
+          <p:cNvPr id="7" name="TextBox 6"/>
+          <p:cNvSpPr txBox="1"/>
+          <p:nvPr/>
+        </p:nvSpPr>
+        <p:spPr>
+          <a:xfrm>
+            <a:off x="822960" y="5349240"/>
+            <a:ext cx="10058400" cy="640080"/>
+          </a:xfrm>
+          <a:prstGeom prst="rect">
+            <a:avLst/>
+          </a:prstGeom>
+          <a:noFill/>
+        </p:spPr>
+        <p:txBody>
           <a:bodyPr wrap="square">
             <a:spAutoFit/>
           </a:bodyPr>
           <a:lstStyle/>
           <a:p>
-            <a:pPr>
-              <a:spcAft>
-                <a:spcPts val="800"/>
-              </a:spcAft>
-              <a:defRPr sz="2200" b="0">
-                <a:solidFill>
-                  <a:srgbClr val="222222"/>
-                </a:solidFill>
-                <a:latin typeface="Calibri"/>
-              </a:defRPr>
-            </a:pPr>
-            <a:r>
-              <a:t>The "design" section controls how the experiment is structured:</a:t>
-            </a:r>
-          </a:p>
-          <a:p>
-            <a:pPr lvl="1">
-              <a:spcAft>
-                <a:spcPts val="800"/>
-              </a:spcAft>
-              <a:defRPr sz="1900">
-                <a:solidFill>
-                  <a:srgbClr val="222222"/>
-                </a:solidFill>
-                <a:latin typeface="Calibri"/>
-              </a:defRPr>
-            </a:pPr>
-            <a:r>
-              <a:t>type: design type (full_factorial, ccd, box_behnken, etc.)</a:t>
-            </a:r>
-          </a:p>
-          <a:p>
-            <a:pPr lvl="1">
-              <a:spcAft>
-                <a:spcPts val="800"/>
-              </a:spcAft>
-              <a:defRPr sz="1900">
-                <a:solidFill>
-                  <a:srgbClr val="222222"/>
-                </a:solidFill>
-                <a:latin typeface="Calibri"/>
-              </a:defRPr>
-            </a:pPr>
-            <a:r>
-              <a:t>randomize: true/false - randomise run order (default: true)</a:t>
-            </a:r>
-          </a:p>
-          <a:p>
-            <a:pPr lvl="1">
-              <a:spcAft>
-                <a:spcPts val="800"/>
-              </a:spcAft>
-              <a:defRPr sz="1900">
-                <a:solidFill>
-                  <a:srgbClr val="222222"/>
-                </a:solidFill>
-                <a:latin typeface="Calibri"/>
-              </a:defRPr>
-            </a:pPr>
-            <a:r>
-              <a:t>replicates: number of times to repeat each run (default: 1)</a:t>
-            </a:r>
-          </a:p>
-          <a:p>
-            <a:pPr lvl="1">
-              <a:spcAft>
-                <a:spcPts val="800"/>
-              </a:spcAft>
-              <a:defRPr sz="1900">
-                <a:solidFill>
-                  <a:srgbClr val="222222"/>
-                </a:solidFill>
-                <a:latin typeface="Calibri"/>
-              </a:defRPr>
-            </a:pPr>
-            <a:r>
-              <a:t>center_points: add center points for curvature detection</a:t>
-            </a:r>
-          </a:p>
-          <a:p>
-            <a:pPr lvl="1">
-              <a:spcAft>
-                <a:spcPts val="800"/>
-              </a:spcAft>
-              <a:defRPr sz="1900">
-                <a:solidFill>
-                  <a:srgbClr val="222222"/>
-                </a:solidFill>
-                <a:latin typeface="Calibri"/>
-              </a:defRPr>
-            </a:pPr>
-            <a:r>
-              <a:t>blocks: number of blocks for blocking out nuisance variables</a:t>
-            </a:r>
-          </a:p>
-          <a:p>
-            <a:pPr lvl="1">
-              <a:spcAft>
-                <a:spcPts val="800"/>
-              </a:spcAft>
-              <a:defRPr sz="1900">
-                <a:solidFill>
-                  <a:srgbClr val="222222"/>
-                </a:solidFill>
-                <a:latin typeface="Calibri"/>
-              </a:defRPr>
-            </a:pPr>
-            <a:r>
-              <a:t>resolution: for fractional factorials (III, IV, V)</a:t>
+            <a:pPr algn="l">
+              <a:defRPr sz="1400" b="0">
+                <a:solidFill>
+                  <a:srgbClr val="666666"/>
+                </a:solidFill>
+                <a:latin typeface="Inter"/>
+              </a:defRPr>
+            </a:pPr>
+            <a:r>
+              <a:t>This config produces 2³ = 8 runs + 3 center points = 11 total runs</a:t>
+            </a:r>
+          </a:p>
+        </p:txBody>
+      </p:sp>
+      <p:sp>
+        <p:nvSpPr>
+          <p:cNvPr id="8" name="TextBox 7"/>
+          <p:cNvSpPr txBox="1"/>
+          <p:nvPr/>
+        </p:nvSpPr>
+        <p:spPr>
+          <a:xfrm>
+            <a:off x="731520" y="6400800"/>
+            <a:ext cx="10058400" cy="365760"/>
+          </a:xfrm>
+          <a:prstGeom prst="rect">
+            <a:avLst/>
+          </a:prstGeom>
+          <a:noFill/>
+        </p:spPr>
+        <p:txBody>
+          <a:bodyPr wrap="square">
+            <a:spAutoFit/>
+          </a:bodyPr>
+          <a:lstStyle/>
+          <a:p>
+            <a:pPr algn="l">
+              <a:defRPr sz="1000" b="0">
+                <a:solidFill>
+                  <a:srgbClr val="999999"/>
+                </a:solidFill>
+                <a:latin typeface="Consolas"/>
+              </a:defRPr>
+            </a:pPr>
+            <a:r>
+              <a:t>© 2026 Martin J. Gallagher  |  GPL-3.0-or-later  |  doehelper.com</a:t>
             </a:r>
           </a:p>
         </p:txBody>
